--- a/thesis/PPSI_Final_Presentation.pptx
+++ b/thesis/PPSI_Final_Presentation.pptx
@@ -6368,7 +6368,7 @@
                 </a:solidFill>
                 <a:latin typeface="Calibri"/>
               </a:rPr>
-              <a:t> FL − PRE: −0.000508 → federation adds nothing over a strong pretrain</a:t>
+              <a:t> FL − PRE: −0.000508 [−0.000933, −0.000037]: slightly worse than the pretrain alone</a:t>
             </a:r>
           </a:p>
           <a:p>
@@ -8815,7 +8815,7 @@
                 </a:solidFill>
                 <a:latin typeface="Calibri"/>
               </a:rPr>
-              <a:t>Warm inference ≈ 1.7–3 ms per recommendation</a:t>
+              <a:t>Warm median latency 1.7–5.1 ms per query</a:t>
             </a:r>
           </a:p>
           <a:p>
@@ -12125,7 +12125,7 @@
         <p:spPr>
           <a:xfrm>
             <a:off x="4617720" y="2331720"/>
-            <a:ext cx="1600200" cy="1097280"/>
+            <a:ext cx="1600200" cy="1554480"/>
           </a:xfrm>
           <a:prstGeom prst="rect">
             <a:avLst/>
@@ -12184,7 +12184,7 @@
         <p:spPr>
           <a:xfrm>
             <a:off x="10195560" y="2331720"/>
-            <a:ext cx="1600200" cy="1097280"/>
+            <a:ext cx="1600200" cy="1554480"/>
           </a:xfrm>
           <a:prstGeom prst="rect">
             <a:avLst/>
@@ -12243,7 +12243,7 @@
         <p:spPr>
           <a:xfrm>
             <a:off x="4617720" y="4846320"/>
-            <a:ext cx="1600200" cy="1097280"/>
+            <a:ext cx="1600200" cy="1554480"/>
           </a:xfrm>
           <a:prstGeom prst="rect">
             <a:avLst/>
@@ -12264,7 +12264,7 @@
                 </a:solidFill>
                 <a:latin typeface="Calibri"/>
               </a:rPr>
-              <a:t>Events per session: heavy-tailed, median 2</a:t>
+              <a:t>Events per session: median 2, long tail</a:t>
             </a:r>
           </a:p>
         </p:txBody>
@@ -12302,7 +12302,7 @@
         <p:spPr>
           <a:xfrm>
             <a:off x="10195560" y="4846320"/>
-            <a:ext cx="1600200" cy="1097280"/>
+            <a:ext cx="1600200" cy="1554480"/>
           </a:xfrm>
           <a:prstGeom prst="rect">
             <a:avLst/>

--- a/thesis/PPSI_Final_Presentation.pptx
+++ b/thesis/PPSI_Final_Presentation.pptx
@@ -27,6 +27,8 @@
     <p:sldId id="275" r:id="rId27"/>
     <p:sldId id="276" r:id="rId28"/>
     <p:sldId id="277" r:id="rId29"/>
+    <p:sldId id="278" r:id="rId30"/>
+    <p:sldId id="279" r:id="rId31"/>
   </p:sldIdLst>
   <p:sldSz cx="12191695" cy="6858000" type="screen4x3"/>
   <p:notesSz cx="6858000" cy="9144000"/>
@@ -523,7 +525,7 @@
           <a:lstStyle/>
           <a:p>
             <a:r>
-              <a:t>Good morning. We are presenting our MSc project on privacy-preserving shopping intelligence: can a browser recommend products from shopping behaviour without sending that behaviour to a server, and how much quality does that cost? Twenty minutes: the question, how we built a rigorous answer, the confirmatory result, what we learned after it, privacy, devices, and lessons.</a:t>
+              <a:t>Good morning. Our project asks whether a browser can recommend products from shopping behaviour without sending that behaviour to a server, and how much quality that costs. In twenty minutes: the question, how we answered it rigorously, the answer, what we learned after it, privacy, devices and lessons.</a:t>
             </a:r>
           </a:p>
         </p:txBody>
@@ -593,7 +595,7 @@
           <a:lstStyle/>
           <a:p>
             <a:r>
-              <a:t>Each round the server broadcasts the model, clients train on their own history, optional DP, quantisation and simulated secure aggregation protect the uploads, and FedAdam updates the global model. The red box is the post-hoc finding we will come back to: tau.</a:t>
+              <a:t>SASRec beat the GRU on validation and the architecture was locked. Then the protocol: register, review, pre-register the look, score once, check the inventory, then disclose. This is what makes the confirmatory numbers credible.</a:t>
             </a:r>
           </a:p>
         </p:txBody>
@@ -663,7 +665,7 @@
           <a:lstStyle/>
           <a:p>
             <a:r>
-              <a:t>The headline: the realistic edge system keeps 88.49 percent of the full-data cloud model, with a confidence interval of 87.73 to 89.18. But notice the pretrained model alone already keeps 88.77 percent. Device-only training collapses.</a:t>
+              <a:t>Each round the server sends the model, clients train on their own history, uploads can be clipped and noised, quantized and securely aggregated, and FedAdam updates the global model. The red note is the finding we will come back to: the constant tau.</a:t>
             </a:r>
           </a:p>
         </p:txBody>
@@ -733,7 +735,7 @@
           <a:lstStyle/>
           <a:p>
             <a:r>
-              <a:t>Federation on top of the 1.2-million-user pretrain changes MRR by minus 0.0005; the tuned follow-up recipe is statistically equivalent to the pretrain. On-device fine-tuning gives a small but significant gain. So why did federation add nothing?</a:t>
+              <a:t>The realistic edge system, federated training warm-started from a server-pretrained model, keeps 88.49 percent of the full-data cloud model, interval 87.73 to 89.18. But the pretrained model alone already keeps 88.77 percent. Cold federated training keeps 70 percent, and training on each device alone fails.</a:t>
             </a:r>
           </a:p>
         </p:txBody>
@@ -803,7 +805,7 @@
           <a:lstStyle/>
           <a:p>
             <a:r>
-              <a:t>On public benchmarks our central reference is competitive with published full-ranking results, and above eSASRec on MovieLens-1M. But federated arms were far below the cloud model — a hint that the recipe, not federation itself, was the problem.</a:t>
+              <a:t>On top of the 1.2-million-user pretrain, federation is slightly worse, and the tuned follow-up is statistically equivalent. On-device fine-tuning gives a small but significant gain. So why did federation add nothing?</a:t>
             </a:r>
           </a:p>
         </p:txBody>
@@ -873,7 +875,7 @@
           <a:lstStyle/>
           <a:p>
             <a:r>
-              <a:t>After the test evaluation we measured the update norms. Almost all coordinates were below tau, so the server step collapsed. This does not change the confirmatory result — it explains it. Everything from here is labelled post-hoc exploratory.</a:t>
+              <a:t>On public benchmarks our central reference matches published results, so the evaluation is sound. But the federated arms were far below it, which pointed at the recipe, not at federation itself.</a:t>
             </a:r>
           </a:p>
         </p:txBody>
@@ -943,7 +945,7 @@
           <a:lstStyle/>
           <a:p>
             <a:r>
-              <a:t>With tau 1e-6, federated models reach 75 to 92 percent of the cloud model on all six benchmarks. On REES46 the strong pretrain still leaves nothing for federation to add, so the confirmatory answer is robust.</a:t>
+              <a:t>After the test we measured the update norms. The updates were around ten to the minus seven, while tau was ten to the minus three, so the server step collapsed and the model barely moved. This does not change the confirmatory result; it explains it.</a:t>
             </a:r>
           </a:p>
         </p:txBody>
@@ -1013,7 +1015,7 @@
           <a:lstStyle/>
           <a:p>
             <a:r>
-              <a:t>This is the main scientific message: the less the server already knows, the more federation helps. With a weak pretrain federation adds a lot; with a strong one it adds almost nothing.</a:t>
+              <a:t>With tau at ten to the minus six, federated models reach 75 to 92 percent of the cloud model on all six benchmarks. On REES46 the strong pretrain still leaves nothing for federation to add, so the confirmatory answer is robust.</a:t>
             </a:r>
           </a:p>
         </p:txBody>
@@ -1083,7 +1085,7 @@
           <a:lstStyle/>
           <a:p>
             <a:r>
-              <a:t>Once federation learns, a membership attack succeeds with AUC 0.747; DP at epsilon 8 removes it, cheaply on a warm start and expensively on a cold one. Our closure audit is honest about limits: the legacy DP used a public seed, so we claim measurements, not a formal guarantee.</a:t>
+              <a:t>The less the server already knows, the more federation helps. With a weak pretrain federation adds a lot; with a strong one it adds almost nothing.</a:t>
             </a:r>
           </a:p>
         </p:txBody>
@@ -1153,7 +1155,7 @@
           <a:lstStyle/>
           <a:p>
             <a:r>
-              <a:t>The device model runs in the browser in a few milliseconds per recommendation. INT8 cuts the model four times with no measurable quality loss, which makes on-device deployment realistic.</a:t>
+              <a:t>The attacker checks whether the model fits a user much better than an unseen user. Once federation learns, the attack reaches AUC 0.747; DP at epsilon eight brings it to chance, cheaply on a warm start and expensively on a cold one. We are honest about the limits: no formal DP guarantee, and secure aggregation was simulated.</a:t>
             </a:r>
           </a:p>
         </p:txBody>
@@ -1223,7 +1225,7 @@
           <a:lstStyle/>
           <a:p>
             <a:r>
-              <a:t>The closure phase verified everything, added second-seed and fine-tuning studies and simple baselines, and documented what was stopped. Negative and incomplete results are reported, not hidden.</a:t>
+              <a:t>The model is downloaded once, the history stays in the browser, and ONNX Runtime ranks the whole catalogue in a few milliseconds. INT8 cuts the model four times with no measurable quality loss.</a:t>
             </a:r>
           </a:p>
         </p:txBody>
@@ -1293,7 +1295,7 @@
           <a:lstStyle/>
           <a:p>
             <a:r>
-              <a:t>This is the question from our original proposal. The motivation comes from Microsoft Edge: the browser already sees shopping behaviour. We split the question into five measurable parts.</a:t>
+              <a:t>This is the question from our proposal. It matters because the browser sees the shopping journey, but sending it to a server is what users and regulators resist, while learning on the device has its own limits. We split the question into four measurable parts.</a:t>
             </a:r>
           </a:p>
         </p:txBody>
@@ -1363,7 +1365,7 @@
           <a:lstStyle/>
           <a:p>
             <a:r>
-              <a:t>On the left what worked, on the right what did not. The tau lesson is general: a protocol can be perfectly controlled and still lock in a mis-scaled optimiser.</a:t>
+              <a:t>The closure verified every saved result, added second-seed and fine-tuning studies and simple baselines, and documented what was stopped. Negative and incomplete results are reported, not hidden.</a:t>
             </a:r>
           </a:p>
         </p:txBody>
@@ -1433,7 +1435,7 @@
           <a:lstStyle/>
           <a:p>
             <a:r>
-              <a:t>To answer the question: about 88.5 percent of cloud quality survives on the registered recipe. Federation is worth it when the server knows little and the optimiser is scaled correctly; on-device fine-tuning is the deployable gain.</a:t>
+              <a:t>If the server already has a strong pretrained model, ship it and fine-tune on the device; federation adds nothing measurable. If it knows little, federate from a warm start with a correctly scaled optimizer. In both cases, audit leakage and use real DP and secure aggregation.</a:t>
             </a:r>
           </a:p>
         </p:txBody>
@@ -1503,6 +1505,146 @@
           <a:lstStyle/>
           <a:p>
             <a:r>
+              <a:t>On the left what worked, on the right what did not. The tau lesson is general: a protocol can be perfectly controlled and still lock in a mis-scaled optimizer.</a:t>
+            </a:r>
+          </a:p>
+        </p:txBody>
+      </p:sp>
+      <p:sp>
+        <p:nvSpPr>
+          <p:cNvPr id="4" name="Slide Number Placeholder 3"/>
+          <p:cNvSpPr>
+            <a:spLocks noGrp="1"/>
+          </p:cNvSpPr>
+          <p:nvPr>
+            <p:ph type="sldNum" idx="5" sz="quarter"/>
+          </p:nvPr>
+        </p:nvSpPr>
+        <p:spPr/>
+      </p:sp>
+    </p:spTree>
+  </p:cSld>
+  <p:clrMapOvr>
+    <a:masterClrMapping/>
+  </p:clrMapOvr>
+</p:notes>
+</file>
+
+<file path=ppt/notesSlides/notesSlide23.xml><?xml version="1.0" encoding="utf-8"?>
+<p:notes xmlns:a="http://schemas.openxmlformats.org/drawingml/2006/main" xmlns:p="http://schemas.openxmlformats.org/presentationml/2006/main" xmlns:r="http://schemas.openxmlformats.org/officeDocument/2006/relationships">
+  <p:cSld>
+    <p:spTree>
+      <p:nvGrpSpPr>
+        <p:cNvPr id="1" name=""/>
+        <p:cNvGrpSpPr/>
+        <p:nvPr/>
+      </p:nvGrpSpPr>
+      <p:grpSpPr>
+        <a:xfrm>
+          <a:off x="0" y="0"/>
+          <a:ext cx="0" cy="0"/>
+          <a:chOff x="0" y="0"/>
+          <a:chExt cx="0" cy="0"/>
+        </a:xfrm>
+      </p:grpSpPr>
+      <p:sp>
+        <p:nvSpPr>
+          <p:cNvPr id="2" name="Slide Image Placeholder 1"/>
+          <p:cNvSpPr>
+            <a:spLocks noGrp="1"/>
+          </p:cNvSpPr>
+          <p:nvPr>
+            <p:ph type="sldImg" idx="2"/>
+          </p:nvPr>
+        </p:nvSpPr>
+        <p:spPr/>
+      </p:sp>
+      <p:sp>
+        <p:nvSpPr>
+          <p:cNvPr id="3" name="Notes Placeholder 2"/>
+          <p:cNvSpPr>
+            <a:spLocks noGrp="1"/>
+          </p:cNvSpPr>
+          <p:nvPr>
+            <p:ph type="body" idx="3" sz="quarter"/>
+          </p:nvPr>
+        </p:nvSpPr>
+        <p:spPr/>
+        <p:txBody>
+          <a:bodyPr/>
+          <a:lstStyle/>
+          <a:p>
+            <a:r>
+              <a:t>Most of the cloud quality can live on the device. Federation is worth it when the server knows little and the optimizer is scaled correctly; on-device fine-tuning is the deployable gain; and privacy has to be engineered and audited.</a:t>
+            </a:r>
+          </a:p>
+        </p:txBody>
+      </p:sp>
+      <p:sp>
+        <p:nvSpPr>
+          <p:cNvPr id="4" name="Slide Number Placeholder 3"/>
+          <p:cNvSpPr>
+            <a:spLocks noGrp="1"/>
+          </p:cNvSpPr>
+          <p:nvPr>
+            <p:ph type="sldNum" idx="5" sz="quarter"/>
+          </p:nvPr>
+        </p:nvSpPr>
+        <p:spPr/>
+      </p:sp>
+    </p:spTree>
+  </p:cSld>
+  <p:clrMapOvr>
+    <a:masterClrMapping/>
+  </p:clrMapOvr>
+</p:notes>
+</file>
+
+<file path=ppt/notesSlides/notesSlide24.xml><?xml version="1.0" encoding="utf-8"?>
+<p:notes xmlns:a="http://schemas.openxmlformats.org/drawingml/2006/main" xmlns:p="http://schemas.openxmlformats.org/presentationml/2006/main" xmlns:r="http://schemas.openxmlformats.org/officeDocument/2006/relationships">
+  <p:cSld>
+    <p:spTree>
+      <p:nvGrpSpPr>
+        <p:cNvPr id="1" name=""/>
+        <p:cNvGrpSpPr/>
+        <p:nvPr/>
+      </p:nvGrpSpPr>
+      <p:grpSpPr>
+        <a:xfrm>
+          <a:off x="0" y="0"/>
+          <a:ext cx="0" cy="0"/>
+          <a:chOff x="0" y="0"/>
+          <a:chExt cx="0" cy="0"/>
+        </a:xfrm>
+      </p:grpSpPr>
+      <p:sp>
+        <p:nvSpPr>
+          <p:cNvPr id="2" name="Slide Image Placeholder 1"/>
+          <p:cNvSpPr>
+            <a:spLocks noGrp="1"/>
+          </p:cNvSpPr>
+          <p:nvPr>
+            <p:ph type="sldImg" idx="2"/>
+          </p:nvPr>
+        </p:nvSpPr>
+        <p:spPr/>
+      </p:sp>
+      <p:sp>
+        <p:nvSpPr>
+          <p:cNvPr id="3" name="Notes Placeholder 2"/>
+          <p:cNvSpPr>
+            <a:spLocks noGrp="1"/>
+          </p:cNvSpPr>
+          <p:nvPr>
+            <p:ph type="body" idx="3" sz="quarter"/>
+          </p:nvPr>
+        </p:nvSpPr>
+        <p:spPr/>
+        <p:txBody>
+          <a:bodyPr/>
+          <a:lstStyle/>
+          <a:p>
+            <a:r>
               <a:t>Thank you. We are happy to take questions.</a:t>
             </a:r>
           </a:p>
@@ -1573,7 +1715,7 @@
           <a:lstStyle/>
           <a:p>
             <a:r>
-              <a:t>Cloud-only gives the quality ceiling but moves raw histories. Federated learning keeps raw events local and sends only model updates — which can still leak. On-device ships a model once and adapts it locally. Our answer is expressed as retention of the cloud reference.</a:t>
+              <a:t>Cloud-only gives the quality ceiling but moves raw histories. Federated learning keeps raw events on the device and sends model updates, which can still leak. On-device learning ships a model once and adapts it locally. All our numbers are retention of the cloud reference.</a:t>
             </a:r>
           </a:p>
         </p:txBody>
@@ -1643,7 +1785,7 @@
           <a:lstStyle/>
           <a:p>
             <a:r>
-              <a:t>1.35 million users. 1.2 million form the server-side band used to pretrain the shipped model; 131,072 are simulated devices. TEST is 26,254 users never touched until a single sealed test evaluation. Pre-registration matters because there are dozens of arms and many possible readings.</a:t>
+              <a:t>The prototype on GitHub built the platform; the pilot studies taught us about labels and evaluation; the main pre-registered study ended in one sealed test evaluation; after it we diagnosed why federation added little and studied privacy and devices; the closure verified everything.</a:t>
             </a:r>
           </a:p>
         </p:txBody>
@@ -1713,7 +1855,7 @@
           <a:lstStyle/>
           <a:p>
             <a:r>
-              <a:t>These four plots come straight from the data-audit notebook of our prototype stage: 42.4 million events in October alone, almost all of them views, with short sessions and a long tail. This is real shopping behaviour, not a benchmark toy.</a:t>
+              <a:t>These plots come straight from our data-audit notebook: 42.4 million events in October alone, almost all views, short sessions with a long tail. This is real shopping behaviour, not a toy benchmark.</a:t>
             </a:r>
           </a:p>
         </p:txBody>
@@ -1783,7 +1925,7 @@
           <a:lstStyle/>
           <a:p>
             <a:r>
-              <a:t>Our book tells the story in this order. First the prototype stage on GitHub, then the pilot studies, then the pre-registered main study up to the confirmatory test evaluation on 5–7 October, then the post-hoc exploratory work, and finally the technical closure and extensions.</a:t>
+              <a:t>Events are converted without loss, encoded with hashed identifiers and price bands, turned into next-product decisions with their histories, and split in time. Three disjoint populations: 1.2 million users for server pretraining, 131,072 simulated devices, and a sealed test set of 26,254 users.</a:t>
             </a:r>
           </a:p>
         </p:txBody>
@@ -1853,7 +1995,7 @@
           <a:lstStyle/>
           <a:p>
             <a:r>
-              <a:t>Four layers. The data layer produces a frozen, hashed dataset. The training layer simulates the federated clients on the Lobot A40 GPUs. The evaluation layer ranks the full catalogue and computes paired bootstrap statistics. Deployment: ONNX, INT8 and Edge WASM; governance wraps everything.</a:t>
+              <a:t>For each decision the model ranks all 158,486 products. If the product the user actually chose is at rank three, the reciprocal rank is one third. We average per user first, so heavy shoppers do not dominate. This is stricter and more realistic than the sampled metrics many papers use.</a:t>
             </a:r>
           </a:p>
         </p:txBody>
@@ -1923,7 +2065,7 @@
           <a:lstStyle/>
           <a:p>
             <a:r>
-              <a:t>The prototype stage built the platform. On the left the prototype; on the right the system, deployment and security workstream. Its main lesson was methodological: small definition errors can flip conclusions, which motivated the pre-registered main study.</a:t>
+              <a:t>The prototype built the platform: the data pipeline, three shopping tasks, the federated plumbing, privacy-motivated encodings and the ONNX and INT8 export. Its main lesson was methodological: small definition errors can flip conclusions, which motivated the pre-registered main study.</a:t>
             </a:r>
           </a:p>
         </p:txBody>
@@ -1993,7 +2135,7 @@
           <a:lstStyle/>
           <a:p>
             <a:r>
-              <a:t>In our contest SASRec scored higher than GRU on validation, and the architecture was locked. The protocol on the right: register, review, pre-register the look, score once, check the inventory, then disclose. This is what makes the confirmatory numbers credible.</a:t>
+              <a:t>We worked from our laptops through encrypted access to the group server on the Lobot cluster: two NVIDIA A40 GPUs for training and shared CPUs for tests and evaluation, on a shared workspace with the frozen dataset and hashed code trees. Code, curated results and 73 gigabytes of checkpoints are public on GitHub.</a:t>
             </a:r>
           </a:p>
         </p:txBody>
@@ -5450,7 +5592,7 @@
                 </a:solidFill>
                 <a:latin typeface="Calibri"/>
               </a:rPr>
-              <a:t>The federated recipe: warm-started FedAdam</a:t>
+              <a:t>The pre-registered main study</a:t>
             </a:r>
           </a:p>
         </p:txBody>
@@ -5498,6 +5640,41 @@
         </p:nvSpPr>
         <p:spPr>
           <a:xfrm>
+            <a:off x="502920" y="1060704"/>
+            <a:ext cx="11155680" cy="457200"/>
+          </a:xfrm>
+          <a:prstGeom prst="rect">
+            <a:avLst/>
+          </a:prstGeom>
+          <a:noFill/>
+        </p:spPr>
+        <p:txBody>
+          <a:bodyPr wrap="square" anchor="t" lIns="45720" rIns="45720">
+            <a:spAutoFit/>
+          </a:bodyPr>
+          <a:lstStyle/>
+          <a:p>
+            <a:pPr algn="l"/>
+            <a:r>
+              <a:rPr sz="1600" b="0" i="1">
+                <a:solidFill>
+                  <a:srgbClr val="595959"/>
+                </a:solidFill>
+                <a:latin typeface="Calibri"/>
+              </a:rPr>
+              <a:t>After the pilot studies: a backbone contest, then one sealed test evaluation</a:t>
+            </a:r>
+          </a:p>
+        </p:txBody>
+      </p:sp>
+      <p:sp>
+        <p:nvSpPr>
+          <p:cNvPr id="5" name="TextBox 4"/>
+          <p:cNvSpPr txBox="1"/>
+          <p:nvPr/>
+        </p:nvSpPr>
+        <p:spPr>
+          <a:xfrm>
             <a:off x="548640" y="6446520"/>
             <a:ext cx="8229600" cy="274320"/>
           </a:xfrm>
@@ -5527,7 +5704,7 @@
       </p:sp>
       <p:sp>
         <p:nvSpPr>
-          <p:cNvPr id="5" name="TextBox 4"/>
+          <p:cNvPr id="6" name="TextBox 5"/>
           <p:cNvSpPr txBox="1"/>
           <p:nvPr/>
         </p:nvSpPr>
@@ -5560,9 +5737,142 @@
           </a:p>
         </p:txBody>
       </p:sp>
+      <p:sp>
+        <p:nvSpPr>
+          <p:cNvPr id="7" name="TextBox 6"/>
+          <p:cNvSpPr txBox="1"/>
+          <p:nvPr/>
+        </p:nvSpPr>
+        <p:spPr>
+          <a:xfrm>
+            <a:off x="548640" y="1280160"/>
+            <a:ext cx="4023360" cy="411480"/>
+          </a:xfrm>
+          <a:prstGeom prst="rect">
+            <a:avLst/>
+          </a:prstGeom>
+          <a:noFill/>
+        </p:spPr>
+        <p:txBody>
+          <a:bodyPr wrap="square" anchor="t" lIns="45720" rIns="45720">
+            <a:spAutoFit/>
+          </a:bodyPr>
+          <a:lstStyle/>
+          <a:p>
+            <a:pPr algn="l"/>
+            <a:r>
+              <a:rPr sz="1700" b="1" i="0">
+                <a:solidFill>
+                  <a:srgbClr val="1F3864"/>
+                </a:solidFill>
+                <a:latin typeface="Calibri"/>
+              </a:rPr>
+              <a:t>Backbone contest (validation)</a:t>
+            </a:r>
+          </a:p>
+        </p:txBody>
+      </p:sp>
+      <p:sp>
+        <p:nvSpPr>
+          <p:cNvPr id="8" name="TextBox 7"/>
+          <p:cNvSpPr txBox="1"/>
+          <p:nvPr/>
+        </p:nvSpPr>
+        <p:spPr>
+          <a:xfrm>
+            <a:off x="548640" y="1737360"/>
+            <a:ext cx="4023360" cy="1874520"/>
+          </a:xfrm>
+          <a:prstGeom prst="rect">
+            <a:avLst/>
+          </a:prstGeom>
+          <a:noFill/>
+        </p:spPr>
+        <p:txBody>
+          <a:bodyPr wrap="square">
+            <a:spAutoFit/>
+          </a:bodyPr>
+          <a:lstStyle/>
+          <a:p>
+            <a:pPr>
+              <a:spcAft>
+                <a:spcPts val="700"/>
+              </a:spcAft>
+            </a:pPr>
+            <a:r>
+              <a:rPr sz="1500">
+                <a:solidFill>
+                  <a:srgbClr val="595959"/>
+                </a:solidFill>
+                <a:latin typeface="Calibri"/>
+              </a:rPr>
+              <a:t>•  </a:t>
+            </a:r>
+            <a:r>
+              <a:rPr sz="1500" b="0">
+                <a:solidFill>
+                  <a:srgbClr val="262626"/>
+                </a:solidFill>
+                <a:latin typeface="Calibri"/>
+              </a:rPr>
+              <a:t>GRU family mean 0.1569</a:t>
+            </a:r>
+          </a:p>
+          <a:p>
+            <a:pPr>
+              <a:spcAft>
+                <a:spcPts val="700"/>
+              </a:spcAft>
+            </a:pPr>
+            <a:r>
+              <a:rPr sz="1500">
+                <a:solidFill>
+                  <a:srgbClr val="595959"/>
+                </a:solidFill>
+                <a:latin typeface="Calibri"/>
+              </a:rPr>
+              <a:t>•  </a:t>
+            </a:r>
+            <a:r>
+              <a:rPr sz="1500" b="0">
+                <a:solidFill>
+                  <a:srgbClr val="262626"/>
+                </a:solidFill>
+                <a:latin typeface="Calibri"/>
+              </a:rPr>
+              <a:t>SASRec family mean 0.1612</a:t>
+            </a:r>
+          </a:p>
+          <a:p>
+            <a:pPr>
+              <a:spcAft>
+                <a:spcPts val="700"/>
+              </a:spcAft>
+            </a:pPr>
+            <a:r>
+              <a:rPr sz="1500">
+                <a:solidFill>
+                  <a:srgbClr val="595959"/>
+                </a:solidFill>
+                <a:latin typeface="Calibri"/>
+              </a:rPr>
+              <a:t>•  </a:t>
+            </a:r>
+            <a:r>
+              <a:rPr sz="1500" b="0">
+                <a:solidFill>
+                  <a:srgbClr val="262626"/>
+                </a:solidFill>
+                <a:latin typeface="Calibri"/>
+              </a:rPr>
+              <a:t>SASRec locked as the backbone</a:t>
+            </a:r>
+          </a:p>
+        </p:txBody>
+      </p:sp>
       <p:pic>
         <p:nvPicPr>
-          <p:cNvPr id="6" name="Picture 5" descr="d3_fl_round.png"/>
+          <p:cNvPr id="9" name="Picture 8" descr="d5_gated_protocol.png"/>
           <p:cNvPicPr>
             <a:picLocks noChangeAspect="1"/>
           </p:cNvPicPr>
@@ -5576,14 +5886,147 @@
         </p:blipFill>
         <p:spPr>
           <a:xfrm>
-            <a:off x="411480" y="1371600"/>
-            <a:ext cx="11338560" cy="4588337"/>
+            <a:off x="4754880" y="1325880"/>
+            <a:ext cx="7132320" cy="2011805"/>
           </a:xfrm>
           <a:prstGeom prst="rect">
             <a:avLst/>
           </a:prstGeom>
         </p:spPr>
       </p:pic>
+      <p:sp>
+        <p:nvSpPr>
+          <p:cNvPr id="10" name="TextBox 9"/>
+          <p:cNvSpPr txBox="1"/>
+          <p:nvPr/>
+        </p:nvSpPr>
+        <p:spPr>
+          <a:xfrm>
+            <a:off x="548640" y="3886200"/>
+            <a:ext cx="11155680" cy="411480"/>
+          </a:xfrm>
+          <a:prstGeom prst="rect">
+            <a:avLst/>
+          </a:prstGeom>
+          <a:noFill/>
+        </p:spPr>
+        <p:txBody>
+          <a:bodyPr wrap="square" anchor="t" lIns="45720" rIns="45720">
+            <a:spAutoFit/>
+          </a:bodyPr>
+          <a:lstStyle/>
+          <a:p>
+            <a:pPr algn="l"/>
+            <a:r>
+              <a:rPr sz="1700" b="1" i="0">
+                <a:solidFill>
+                  <a:srgbClr val="1F3864"/>
+                </a:solidFill>
+                <a:latin typeface="Calibri"/>
+              </a:rPr>
+              <a:t>Why so much protocol?</a:t>
+            </a:r>
+          </a:p>
+        </p:txBody>
+      </p:sp>
+      <p:sp>
+        <p:nvSpPr>
+          <p:cNvPr id="11" name="TextBox 10"/>
+          <p:cNvSpPr txBox="1"/>
+          <p:nvPr/>
+        </p:nvSpPr>
+        <p:spPr>
+          <a:xfrm>
+            <a:off x="548640" y="4343400"/>
+            <a:ext cx="11155680" cy="1783080"/>
+          </a:xfrm>
+          <a:prstGeom prst="rect">
+            <a:avLst/>
+          </a:prstGeom>
+          <a:noFill/>
+        </p:spPr>
+        <p:txBody>
+          <a:bodyPr wrap="square">
+            <a:spAutoFit/>
+          </a:bodyPr>
+          <a:lstStyle/>
+          <a:p>
+            <a:pPr>
+              <a:spcAft>
+                <a:spcPts val="700"/>
+              </a:spcAft>
+            </a:pPr>
+            <a:r>
+              <a:rPr sz="1500">
+                <a:solidFill>
+                  <a:srgbClr val="595959"/>
+                </a:solidFill>
+                <a:latin typeface="Calibri"/>
+              </a:rPr>
+              <a:t>•  </a:t>
+            </a:r>
+            <a:r>
+              <a:rPr sz="1500" b="0">
+                <a:solidFill>
+                  <a:srgbClr val="262626"/>
+                </a:solidFill>
+                <a:latin typeface="Calibri"/>
+              </a:rPr>
+              <a:t>33 main-analysis contrasts, two seeds, many arms: easy to fool ourselves</a:t>
+            </a:r>
+          </a:p>
+          <a:p>
+            <a:pPr>
+              <a:spcAft>
+                <a:spcPts val="700"/>
+              </a:spcAft>
+            </a:pPr>
+            <a:r>
+              <a:rPr sz="1500">
+                <a:solidFill>
+                  <a:srgbClr val="595959"/>
+                </a:solidFill>
+                <a:latin typeface="Calibri"/>
+              </a:rPr>
+              <a:t>•  </a:t>
+            </a:r>
+            <a:r>
+              <a:rPr sz="1500" b="0">
+                <a:solidFill>
+                  <a:srgbClr val="262626"/>
+                </a:solidFill>
+                <a:latin typeface="Calibri"/>
+              </a:rPr>
+              <a:t>Selection only on calibration data; validation read once; TEST read once, in a sealed evaluation</a:t>
+            </a:r>
+          </a:p>
+          <a:p>
+            <a:pPr>
+              <a:spcAft>
+                <a:spcPts val="700"/>
+              </a:spcAft>
+            </a:pPr>
+            <a:r>
+              <a:rPr sz="1500">
+                <a:solidFill>
+                  <a:srgbClr val="595959"/>
+                </a:solidFill>
+                <a:latin typeface="Calibri"/>
+              </a:rPr>
+              <a:t>•  </a:t>
+            </a:r>
+            <a:r>
+              <a:rPr sz="1500" b="0">
+                <a:solidFill>
+                  <a:srgbClr val="262626"/>
+                </a:solidFill>
+                <a:latin typeface="Calibri"/>
+              </a:rPr>
+              <a:t>Every later exploratory test look is a numbered, disclosed register entry</a:t>
+            </a:r>
+          </a:p>
+        </p:txBody>
+      </p:sp>
     </p:spTree>
   </p:cSld>
   <p:clrMapOvr>
@@ -5632,7 +6075,7 @@
                 </a:solidFill>
                 <a:latin typeface="Calibri"/>
               </a:rPr>
-              <a:t>Confirmatory answer: how much cloud quality survives</a:t>
+              <a:t>The federated recipe: warm-started FedAdam</a:t>
             </a:r>
           </a:p>
         </p:txBody>
@@ -5680,41 +6123,6 @@
         </p:nvSpPr>
         <p:spPr>
           <a:xfrm>
-            <a:off x="502920" y="1060704"/>
-            <a:ext cx="11155680" cy="457200"/>
-          </a:xfrm>
-          <a:prstGeom prst="rect">
-            <a:avLst/>
-          </a:prstGeom>
-          <a:noFill/>
-        </p:spPr>
-        <p:txBody>
-          <a:bodyPr wrap="square" anchor="t" lIns="45720" rIns="45720">
-            <a:spAutoFit/>
-          </a:bodyPr>
-          <a:lstStyle/>
-          <a:p>
-            <a:pPr algn="l"/>
-            <a:r>
-              <a:rPr sz="1600" b="0" i="1">
-                <a:solidFill>
-                  <a:srgbClr val="595959"/>
-                </a:solidFill>
-                <a:latin typeface="Calibri"/>
-              </a:rPr>
-              <a:t>REES46 TEST, 26,254 users, client-macro MRR@20</a:t>
-            </a:r>
-          </a:p>
-        </p:txBody>
-      </p:sp>
-      <p:sp>
-        <p:nvSpPr>
-          <p:cNvPr id="5" name="TextBox 4"/>
-          <p:cNvSpPr txBox="1"/>
-          <p:nvPr/>
-        </p:nvSpPr>
-        <p:spPr>
-          <a:xfrm>
             <a:off x="548640" y="6446520"/>
             <a:ext cx="8229600" cy="274320"/>
           </a:xfrm>
@@ -5744,7 +6152,7 @@
       </p:sp>
       <p:sp>
         <p:nvSpPr>
-          <p:cNvPr id="6" name="TextBox 5"/>
+          <p:cNvPr id="5" name="TextBox 4"/>
           <p:cNvSpPr txBox="1"/>
           <p:nvPr/>
         </p:nvSpPr>
@@ -5777,44 +6185,9 @@
           </a:p>
         </p:txBody>
       </p:sp>
-      <p:sp>
-        <p:nvSpPr>
-          <p:cNvPr id="7" name="TextBox 6"/>
-          <p:cNvSpPr txBox="1"/>
-          <p:nvPr/>
-        </p:nvSpPr>
-        <p:spPr>
-          <a:xfrm>
-            <a:off x="9601200" y="1143000"/>
-            <a:ext cx="2103120" cy="310896"/>
-          </a:xfrm>
-          <a:prstGeom prst="rect">
-            <a:avLst/>
-          </a:prstGeom>
-          <a:noFill/>
-        </p:spPr>
-        <p:txBody>
-          <a:bodyPr wrap="square" anchor="t" lIns="45720" rIns="45720">
-            <a:spAutoFit/>
-          </a:bodyPr>
-          <a:lstStyle/>
-          <a:p>
-            <a:pPr algn="r"/>
-            <a:r>
-              <a:rPr sz="1200" b="0" i="1">
-                <a:solidFill>
-                  <a:srgbClr val="595959"/>
-                </a:solidFill>
-                <a:latin typeface="Calibri"/>
-              </a:rPr>
-              <a:t>(confirmatory result)</a:t>
-            </a:r>
-          </a:p>
-        </p:txBody>
-      </p:sp>
       <p:pic>
         <p:nvPicPr>
-          <p:cNvPr id="8" name="Picture 7" descr="fig_retention_ladder.png"/>
+          <p:cNvPr id="6" name="Picture 5" descr="d3_fl_round.png"/>
           <p:cNvPicPr>
             <a:picLocks noChangeAspect="1"/>
           </p:cNvPicPr>
@@ -5828,233 +6201,14 @@
         </p:blipFill>
         <p:spPr>
           <a:xfrm>
-            <a:off x="457200" y="1600200"/>
-            <a:ext cx="7406640" cy="2868166"/>
+            <a:off x="411480" y="1441222"/>
+            <a:ext cx="11338560" cy="4615636"/>
           </a:xfrm>
           <a:prstGeom prst="rect">
             <a:avLst/>
           </a:prstGeom>
         </p:spPr>
       </p:pic>
-      <p:sp>
-        <p:nvSpPr>
-          <p:cNvPr id="9" name="TextBox 8"/>
-          <p:cNvSpPr txBox="1"/>
-          <p:nvPr/>
-        </p:nvSpPr>
-        <p:spPr>
-          <a:xfrm>
-            <a:off x="8092440" y="1645920"/>
-            <a:ext cx="3749039" cy="411480"/>
-          </a:xfrm>
-          <a:prstGeom prst="rect">
-            <a:avLst/>
-          </a:prstGeom>
-          <a:noFill/>
-        </p:spPr>
-        <p:txBody>
-          <a:bodyPr wrap="square" anchor="t" lIns="45720" rIns="45720">
-            <a:spAutoFit/>
-          </a:bodyPr>
-          <a:lstStyle/>
-          <a:p>
-            <a:pPr algn="l"/>
-            <a:r>
-              <a:rPr sz="1700" b="1" i="0">
-                <a:solidFill>
-                  <a:srgbClr val="1F3864"/>
-                </a:solidFill>
-                <a:latin typeface="Calibri"/>
-              </a:rPr>
-              <a:t>Key numbers</a:t>
-            </a:r>
-          </a:p>
-        </p:txBody>
-      </p:sp>
-      <p:sp>
-        <p:nvSpPr>
-          <p:cNvPr id="10" name="TextBox 9"/>
-          <p:cNvSpPr txBox="1"/>
-          <p:nvPr/>
-        </p:nvSpPr>
-        <p:spPr>
-          <a:xfrm>
-            <a:off x="8092440" y="2103120"/>
-            <a:ext cx="3749039" cy="4023360"/>
-          </a:xfrm>
-          <a:prstGeom prst="rect">
-            <a:avLst/>
-          </a:prstGeom>
-          <a:noFill/>
-        </p:spPr>
-        <p:txBody>
-          <a:bodyPr wrap="square">
-            <a:spAutoFit/>
-          </a:bodyPr>
-          <a:lstStyle/>
-          <a:p>
-            <a:pPr>
-              <a:spcAft>
-                <a:spcPts val="700"/>
-              </a:spcAft>
-            </a:pPr>
-            <a:r>
-              <a:rPr sz="1500">
-                <a:solidFill>
-                  <a:srgbClr val="595959"/>
-                </a:solidFill>
-                <a:latin typeface="Calibri"/>
-              </a:rPr>
-              <a:t>•  </a:t>
-            </a:r>
-            <a:r>
-              <a:rPr sz="1500" b="0">
-                <a:solidFill>
-                  <a:srgbClr val="262626"/>
-                </a:solidFill>
-                <a:latin typeface="Calibri"/>
-              </a:rPr>
-              <a:t>Realistic edge system (warm FL, frozen tables): </a:t>
-            </a:r>
-            <a:r>
-              <a:rPr sz="1500" b="1">
-                <a:solidFill>
-                  <a:srgbClr val="262626"/>
-                </a:solidFill>
-                <a:latin typeface="Calibri"/>
-              </a:rPr>
-              <a:t>88.49%</a:t>
-            </a:r>
-            <a:r>
-              <a:rPr sz="1500" b="0">
-                <a:solidFill>
-                  <a:srgbClr val="262626"/>
-                </a:solidFill>
-                <a:latin typeface="Calibri"/>
-              </a:rPr>
-              <a:t> [87.73, 89.18]</a:t>
-            </a:r>
-          </a:p>
-          <a:p>
-            <a:pPr>
-              <a:spcAft>
-                <a:spcPts val="700"/>
-              </a:spcAft>
-            </a:pPr>
-            <a:r>
-              <a:rPr sz="1500">
-                <a:solidFill>
-                  <a:srgbClr val="595959"/>
-                </a:solidFill>
-                <a:latin typeface="Calibri"/>
-              </a:rPr>
-              <a:t>•  </a:t>
-            </a:r>
-            <a:r>
-              <a:rPr sz="1500" b="0">
-                <a:solidFill>
-                  <a:srgbClr val="262626"/>
-                </a:solidFill>
-                <a:latin typeface="Calibri"/>
-              </a:rPr>
-              <a:t>Pretrained model alone: </a:t>
-            </a:r>
-            <a:r>
-              <a:rPr sz="1500" b="1">
-                <a:solidFill>
-                  <a:srgbClr val="262626"/>
-                </a:solidFill>
-                <a:latin typeface="Calibri"/>
-              </a:rPr>
-              <a:t>88.77%</a:t>
-            </a:r>
-            <a:r>
-              <a:rPr sz="1500" b="0">
-                <a:solidFill>
-                  <a:srgbClr val="262626"/>
-                </a:solidFill>
-                <a:latin typeface="Calibri"/>
-              </a:rPr>
-              <a:t/>
-            </a:r>
-          </a:p>
-          <a:p>
-            <a:pPr>
-              <a:spcAft>
-                <a:spcPts val="700"/>
-              </a:spcAft>
-            </a:pPr>
-            <a:r>
-              <a:rPr sz="1500">
-                <a:solidFill>
-                  <a:srgbClr val="595959"/>
-                </a:solidFill>
-                <a:latin typeface="Calibri"/>
-              </a:rPr>
-              <a:t>•  </a:t>
-            </a:r>
-            <a:r>
-              <a:rPr sz="1500" b="0">
-                <a:solidFill>
-                  <a:srgbClr val="262626"/>
-                </a:solidFill>
-                <a:latin typeface="Calibri"/>
-              </a:rPr>
-              <a:t>Cold federated: 70.10%</a:t>
-            </a:r>
-          </a:p>
-          <a:p>
-            <a:pPr>
-              <a:spcAft>
-                <a:spcPts val="700"/>
-              </a:spcAft>
-            </a:pPr>
-            <a:r>
-              <a:rPr sz="1500">
-                <a:solidFill>
-                  <a:srgbClr val="595959"/>
-                </a:solidFill>
-                <a:latin typeface="Calibri"/>
-              </a:rPr>
-              <a:t>•  </a:t>
-            </a:r>
-            <a:r>
-              <a:rPr sz="1500" b="0">
-                <a:solidFill>
-                  <a:srgbClr val="262626"/>
-                </a:solidFill>
-                <a:latin typeface="Calibri"/>
-              </a:rPr>
-              <a:t>Device-only training: 1.64% of C_FULL</a:t>
-            </a:r>
-          </a:p>
-          <a:p>
-            <a:pPr>
-              <a:spcAft>
-                <a:spcPts val="700"/>
-              </a:spcAft>
-            </a:pPr>
-            <a:r>
-              <a:rPr sz="1500">
-                <a:solidFill>
-                  <a:srgbClr val="595959"/>
-                </a:solidFill>
-                <a:latin typeface="Calibri"/>
-              </a:rPr>
-              <a:t>•  </a:t>
-            </a:r>
-            <a:r>
-              <a:rPr sz="1500" b="0">
-                <a:solidFill>
-                  <a:srgbClr val="262626"/>
-                </a:solidFill>
-                <a:latin typeface="Calibri"/>
-              </a:rPr>
-              <a:t>Warm start over cold FL: +0.0331 MRR@20</a:t>
-            </a:r>
-          </a:p>
-        </p:txBody>
-      </p:sp>
     </p:spTree>
   </p:cSld>
   <p:clrMapOvr>
@@ -6103,7 +6257,7 @@
                 </a:solidFill>
                 <a:latin typeface="Calibri"/>
               </a:rPr>
-              <a:t>What federation and fine-tuning add</a:t>
+              <a:t>The confirmatory answer</a:t>
             </a:r>
           </a:p>
         </p:txBody>
@@ -6173,7 +6327,7 @@
                 </a:solidFill>
                 <a:latin typeface="Calibri"/>
               </a:rPr>
-              <a:t>Differences in MRR@20 with 95% paired-bootstrap CIs</a:t>
+              <a:t>REES46 TEST, 26,254 users, client-macro MRR@20</a:t>
             </a:r>
           </a:p>
         </p:txBody>
@@ -6248,9 +6402,44 @@
           </a:p>
         </p:txBody>
       </p:sp>
+      <p:sp>
+        <p:nvSpPr>
+          <p:cNvPr id="7" name="TextBox 6"/>
+          <p:cNvSpPr txBox="1"/>
+          <p:nvPr/>
+        </p:nvSpPr>
+        <p:spPr>
+          <a:xfrm>
+            <a:off x="9601200" y="1097280"/>
+            <a:ext cx="2103120" cy="310896"/>
+          </a:xfrm>
+          <a:prstGeom prst="rect">
+            <a:avLst/>
+          </a:prstGeom>
+          <a:noFill/>
+        </p:spPr>
+        <p:txBody>
+          <a:bodyPr wrap="square" anchor="t" lIns="45720" rIns="45720">
+            <a:spAutoFit/>
+          </a:bodyPr>
+          <a:lstStyle/>
+          <a:p>
+            <a:pPr algn="r"/>
+            <a:r>
+              <a:rPr sz="1200" b="0" i="1">
+                <a:solidFill>
+                  <a:srgbClr val="595959"/>
+                </a:solidFill>
+                <a:latin typeface="Calibri"/>
+              </a:rPr>
+              <a:t>(confirmatory result)</a:t>
+            </a:r>
+          </a:p>
+        </p:txBody>
+      </p:sp>
       <p:pic>
         <p:nvPicPr>
-          <p:cNvPr id="7" name="Picture 6" descr="fig_forest_deltas.png"/>
+          <p:cNvPr id="8" name="Picture 7" descr="d13_where_models_learn.png"/>
           <p:cNvPicPr>
             <a:picLocks noChangeAspect="1"/>
           </p:cNvPicPr>
@@ -6264,226 +6453,14 @@
         </p:blipFill>
         <p:spPr>
           <a:xfrm>
-            <a:off x="457200" y="1600200"/>
-            <a:ext cx="7498079" cy="3289252"/>
+            <a:off x="1303182" y="1508760"/>
+            <a:ext cx="9555155" cy="4846320"/>
           </a:xfrm>
           <a:prstGeom prst="rect">
             <a:avLst/>
           </a:prstGeom>
         </p:spPr>
       </p:pic>
-      <p:sp>
-        <p:nvSpPr>
-          <p:cNvPr id="8" name="TextBox 7"/>
-          <p:cNvSpPr txBox="1"/>
-          <p:nvPr/>
-        </p:nvSpPr>
-        <p:spPr>
-          <a:xfrm>
-            <a:off x="8183879" y="1645920"/>
-            <a:ext cx="3657600" cy="411480"/>
-          </a:xfrm>
-          <a:prstGeom prst="rect">
-            <a:avLst/>
-          </a:prstGeom>
-          <a:noFill/>
-        </p:spPr>
-        <p:txBody>
-          <a:bodyPr wrap="square" anchor="t" lIns="45720" rIns="45720">
-            <a:spAutoFit/>
-          </a:bodyPr>
-          <a:lstStyle/>
-          <a:p>
-            <a:pPr algn="l"/>
-            <a:r>
-              <a:rPr sz="1700" b="1" i="0">
-                <a:solidFill>
-                  <a:srgbClr val="1F3864"/>
-                </a:solidFill>
-                <a:latin typeface="Calibri"/>
-              </a:rPr>
-              <a:t>Reading</a:t>
-            </a:r>
-          </a:p>
-        </p:txBody>
-      </p:sp>
-      <p:sp>
-        <p:nvSpPr>
-          <p:cNvPr id="9" name="TextBox 8"/>
-          <p:cNvSpPr txBox="1"/>
-          <p:nvPr/>
-        </p:nvSpPr>
-        <p:spPr>
-          <a:xfrm>
-            <a:off x="8183879" y="2103120"/>
-            <a:ext cx="3657600" cy="4023360"/>
-          </a:xfrm>
-          <a:prstGeom prst="rect">
-            <a:avLst/>
-          </a:prstGeom>
-          <a:noFill/>
-        </p:spPr>
-        <p:txBody>
-          <a:bodyPr wrap="square">
-            <a:spAutoFit/>
-          </a:bodyPr>
-          <a:lstStyle/>
-          <a:p>
-            <a:pPr>
-              <a:spcAft>
-                <a:spcPts val="700"/>
-              </a:spcAft>
-            </a:pPr>
-            <a:r>
-              <a:rPr sz="1500">
-                <a:solidFill>
-                  <a:srgbClr val="595959"/>
-                </a:solidFill>
-                <a:latin typeface="Calibri"/>
-              </a:rPr>
-              <a:t>•  </a:t>
-            </a:r>
-            <a:r>
-              <a:rPr sz="1500" b="0">
-                <a:solidFill>
-                  <a:srgbClr val="262626"/>
-                </a:solidFill>
-                <a:latin typeface="Calibri"/>
-              </a:rPr>
-              <a:t/>
-            </a:r>
-            <a:r>
-              <a:rPr sz="1500" b="1">
-                <a:solidFill>
-                  <a:srgbClr val="262626"/>
-                </a:solidFill>
-                <a:latin typeface="Calibri"/>
-              </a:rPr>
-              <a:t>K21</a:t>
-            </a:r>
-            <a:r>
-              <a:rPr sz="1500" b="0">
-                <a:solidFill>
-                  <a:srgbClr val="262626"/>
-                </a:solidFill>
-                <a:latin typeface="Calibri"/>
-              </a:rPr>
-              <a:t> FL − PRE: −0.000508 [−0.000933, −0.000037]: slightly worse than the pretrain alone</a:t>
-            </a:r>
-          </a:p>
-          <a:p>
-            <a:pPr>
-              <a:spcAft>
-                <a:spcPts val="700"/>
-              </a:spcAft>
-            </a:pPr>
-            <a:r>
-              <a:rPr sz="1500">
-                <a:solidFill>
-                  <a:srgbClr val="595959"/>
-                </a:solidFill>
-                <a:latin typeface="Calibri"/>
-              </a:rPr>
-              <a:t>•  </a:t>
-            </a:r>
-            <a:r>
-              <a:rPr sz="1500" b="0">
-                <a:solidFill>
-                  <a:srgbClr val="262626"/>
-                </a:solidFill>
-                <a:latin typeface="Calibri"/>
-              </a:rPr>
-              <a:t/>
-            </a:r>
-            <a:r>
-              <a:rPr sz="1500" b="1">
-                <a:solidFill>
-                  <a:srgbClr val="262626"/>
-                </a:solidFill>
-                <a:latin typeface="Calibri"/>
-              </a:rPr>
-              <a:t>Q1</a:t>
-            </a:r>
-            <a:r>
-              <a:rPr sz="1500" b="0">
-                <a:solidFill>
-                  <a:srgbClr val="262626"/>
-                </a:solidFill>
-                <a:latin typeface="Calibri"/>
-              </a:rPr>
-              <a:t> tuned warm FL − PRE: EQUIVALENT (±0.0005)</a:t>
-            </a:r>
-          </a:p>
-          <a:p>
-            <a:pPr>
-              <a:spcAft>
-                <a:spcPts val="700"/>
-              </a:spcAft>
-            </a:pPr>
-            <a:r>
-              <a:rPr sz="1500">
-                <a:solidFill>
-                  <a:srgbClr val="595959"/>
-                </a:solidFill>
-                <a:latin typeface="Calibri"/>
-              </a:rPr>
-              <a:t>•  </a:t>
-            </a:r>
-            <a:r>
-              <a:rPr sz="1500" b="0">
-                <a:solidFill>
-                  <a:srgbClr val="262626"/>
-                </a:solidFill>
-                <a:latin typeface="Calibri"/>
-              </a:rPr>
-              <a:t/>
-            </a:r>
-            <a:r>
-              <a:rPr sz="1500" b="1">
-                <a:solidFill>
-                  <a:srgbClr val="262626"/>
-                </a:solidFill>
-                <a:latin typeface="Calibri"/>
-              </a:rPr>
-              <a:t>K9c</a:t>
-            </a:r>
-            <a:r>
-              <a:rPr sz="1500" b="0">
-                <a:solidFill>
-                  <a:srgbClr val="262626"/>
-                </a:solidFill>
-                <a:latin typeface="Calibri"/>
-              </a:rPr>
-              <a:t> on-device fine-tune: +0.002283 — the deployable gain</a:t>
-            </a:r>
-          </a:p>
-          <a:p>
-            <a:pPr>
-              <a:spcAft>
-                <a:spcPts val="700"/>
-              </a:spcAft>
-            </a:pPr>
-            <a:r>
-              <a:rPr sz="1500">
-                <a:solidFill>
-                  <a:srgbClr val="595959"/>
-                </a:solidFill>
-                <a:latin typeface="Calibri"/>
-              </a:rPr>
-              <a:t>•  </a:t>
-            </a:r>
-            <a:r>
-              <a:rPr sz="1500" b="0">
-                <a:solidFill>
-                  <a:srgbClr val="262626"/>
-                </a:solidFill>
-                <a:latin typeface="Calibri"/>
-              </a:rPr>
-              <a:t>Orange: post-hoc looks (next slides)</a:t>
-            </a:r>
-          </a:p>
-        </p:txBody>
-      </p:sp>
     </p:spTree>
   </p:cSld>
   <p:clrMapOvr>
@@ -6532,7 +6509,7 @@
                 </a:solidFill>
                 <a:latin typeface="Calibri"/>
               </a:rPr>
-              <a:t>Benchmarks: our cloud reference vs published results</a:t>
+              <a:t>What federation and fine-tuning add</a:t>
             </a:r>
           </a:p>
         </p:txBody>
@@ -6602,7 +6579,7 @@
                 </a:solidFill>
                 <a:latin typeface="Calibri"/>
               </a:rPr>
-              <a:t>Full-catalogue NDCG@10 on public datasets</a:t>
+              <a:t>Differences in MRR@20 with 95% paired-bootstrap intervals</a:t>
             </a:r>
           </a:p>
         </p:txBody>
@@ -6679,7 +6656,7 @@
       </p:sp>
       <p:pic>
         <p:nvPicPr>
-          <p:cNvPr id="7" name="Picture 6" descr="fig_published_comparison.png"/>
+          <p:cNvPr id="7" name="Picture 6" descr="fig_forest_deltas.png"/>
           <p:cNvPicPr>
             <a:picLocks noChangeAspect="1"/>
           </p:cNvPicPr>
@@ -6693,8 +6670,8 @@
         </p:blipFill>
         <p:spPr>
           <a:xfrm>
-            <a:off x="457200" y="1554480"/>
-            <a:ext cx="7223760" cy="3898537"/>
+            <a:off x="457200" y="1600200"/>
+            <a:ext cx="7498079" cy="3289252"/>
           </a:xfrm>
           <a:prstGeom prst="rect">
             <a:avLst/>
@@ -6709,8 +6686,8 @@
         </p:nvSpPr>
         <p:spPr>
           <a:xfrm>
-            <a:off x="7955279" y="1600200"/>
-            <a:ext cx="3886200" cy="411480"/>
+            <a:off x="8183879" y="1645920"/>
+            <a:ext cx="3657600" cy="411480"/>
           </a:xfrm>
           <a:prstGeom prst="rect">
             <a:avLst/>
@@ -6731,7 +6708,7 @@
                 </a:solidFill>
                 <a:latin typeface="Calibri"/>
               </a:rPr>
-              <a:t>Confirmatory benchmark looks</a:t>
+              <a:t>Reading</a:t>
             </a:r>
           </a:p>
         </p:txBody>
@@ -6744,8 +6721,8 @@
         </p:nvSpPr>
         <p:spPr>
           <a:xfrm>
-            <a:off x="7955279" y="2057400"/>
-            <a:ext cx="3886200" cy="4069080"/>
+            <a:off x="8183879" y="2103120"/>
+            <a:ext cx="3657600" cy="4023360"/>
           </a:xfrm>
           <a:prstGeom prst="rect">
             <a:avLst/>
@@ -6779,7 +6756,25 @@
                 </a:solidFill>
                 <a:latin typeface="Calibri"/>
               </a:rPr>
-              <a:t>C_FULL wins on every dataset; every FL arm far below it</a:t>
+              <a:t/>
+            </a:r>
+            <a:r>
+              <a:rPr sz="1500" b="1">
+                <a:solidFill>
+                  <a:srgbClr val="262626"/>
+                </a:solidFill>
+                <a:latin typeface="Calibri"/>
+              </a:rPr>
+              <a:t>K21</a:t>
+            </a:r>
+            <a:r>
+              <a:rPr sz="1500" b="0">
+                <a:solidFill>
+                  <a:srgbClr val="262626"/>
+                </a:solidFill>
+                <a:latin typeface="Calibri"/>
+              </a:rPr>
+              <a:t> FL − PRE: −0.000508 [−0.000933, −0.000037]: slightly worse than the pretrain alone</a:t>
             </a:r>
           </a:p>
           <a:p>
@@ -6804,7 +6799,25 @@
                 </a:solidFill>
                 <a:latin typeface="Calibri"/>
               </a:rPr>
-              <a:t>ML-1M: C_FULL 0.1936 vs published eSASRec 0.1739</a:t>
+              <a:t/>
+            </a:r>
+            <a:r>
+              <a:rPr sz="1500" b="1">
+                <a:solidFill>
+                  <a:srgbClr val="262626"/>
+                </a:solidFill>
+                <a:latin typeface="Calibri"/>
+              </a:rPr>
+              <a:t>Q1</a:t>
+            </a:r>
+            <a:r>
+              <a:rPr sz="1500" b="0">
+                <a:solidFill>
+                  <a:srgbClr val="262626"/>
+                </a:solidFill>
+                <a:latin typeface="Calibri"/>
+              </a:rPr>
+              <a:t> tuned warm FL − PRE: equivalent (±0.0005)</a:t>
             </a:r>
           </a:p>
           <a:p>
@@ -6829,7 +6842,25 @@
                 </a:solidFill>
                 <a:latin typeface="Calibri"/>
               </a:rPr>
-              <a:t>Confirmatory FL retention only 13–77%</a:t>
+              <a:t/>
+            </a:r>
+            <a:r>
+              <a:rPr sz="1500" b="1">
+                <a:solidFill>
+                  <a:srgbClr val="262626"/>
+                </a:solidFill>
+                <a:latin typeface="Calibri"/>
+              </a:rPr>
+              <a:t>K9c</a:t>
+            </a:r>
+            <a:r>
+              <a:rPr sz="1500" b="0">
+                <a:solidFill>
+                  <a:srgbClr val="262626"/>
+                </a:solidFill>
+                <a:latin typeface="Calibri"/>
+              </a:rPr>
+              <a:t> on-device fine-tune: +0.002283, the deployable gain</a:t>
             </a:r>
           </a:p>
           <a:p>
@@ -6854,7 +6885,7 @@
                 </a:solidFill>
                 <a:latin typeface="Calibri"/>
               </a:rPr>
-              <a:t>→ something in the federated recipe was wrong</a:t>
+              <a:t>Orange: post-hoc looks (next slides)</a:t>
             </a:r>
           </a:p>
         </p:txBody>
@@ -6907,7 +6938,7 @@
                 </a:solidFill>
                 <a:latin typeface="Calibri"/>
               </a:rPr>
-              <a:t>Diagnosis: FedAdam's τ silently froze federated training</a:t>
+              <a:t>Benchmarks: our cloud reference against published results</a:t>
             </a:r>
           </a:p>
         </p:txBody>
@@ -6955,6 +6986,41 @@
         </p:nvSpPr>
         <p:spPr>
           <a:xfrm>
+            <a:off x="502920" y="1060704"/>
+            <a:ext cx="11155680" cy="457200"/>
+          </a:xfrm>
+          <a:prstGeom prst="rect">
+            <a:avLst/>
+          </a:prstGeom>
+          <a:noFill/>
+        </p:spPr>
+        <p:txBody>
+          <a:bodyPr wrap="square" anchor="t" lIns="45720" rIns="45720">
+            <a:spAutoFit/>
+          </a:bodyPr>
+          <a:lstStyle/>
+          <a:p>
+            <a:pPr algn="l"/>
+            <a:r>
+              <a:rPr sz="1600" b="0" i="1">
+                <a:solidFill>
+                  <a:srgbClr val="595959"/>
+                </a:solidFill>
+                <a:latin typeface="Calibri"/>
+              </a:rPr>
+              <a:t>Full-catalogue NDCG@10 on public datasets</a:t>
+            </a:r>
+          </a:p>
+        </p:txBody>
+      </p:sp>
+      <p:sp>
+        <p:nvSpPr>
+          <p:cNvPr id="5" name="TextBox 4"/>
+          <p:cNvSpPr txBox="1"/>
+          <p:nvPr/>
+        </p:nvSpPr>
+        <p:spPr>
+          <a:xfrm>
             <a:off x="548640" y="6446520"/>
             <a:ext cx="8229600" cy="274320"/>
           </a:xfrm>
@@ -6984,7 +7050,7 @@
       </p:sp>
       <p:sp>
         <p:nvSpPr>
-          <p:cNvPr id="5" name="TextBox 4"/>
+          <p:cNvPr id="6" name="TextBox 5"/>
           <p:cNvSpPr txBox="1"/>
           <p:nvPr/>
         </p:nvSpPr>
@@ -7017,44 +7083,9 @@
           </a:p>
         </p:txBody>
       </p:sp>
-      <p:sp>
-        <p:nvSpPr>
-          <p:cNvPr id="6" name="TextBox 5"/>
-          <p:cNvSpPr txBox="1"/>
-          <p:nvPr/>
-        </p:nvSpPr>
-        <p:spPr>
-          <a:xfrm>
-            <a:off x="9601200" y="1143000"/>
-            <a:ext cx="2103120" cy="310896"/>
-          </a:xfrm>
-          <a:prstGeom prst="rect">
-            <a:avLst/>
-          </a:prstGeom>
-          <a:noFill/>
-        </p:spPr>
-        <p:txBody>
-          <a:bodyPr wrap="square" anchor="t" lIns="45720" rIns="45720">
-            <a:spAutoFit/>
-          </a:bodyPr>
-          <a:lstStyle/>
-          <a:p>
-            <a:pPr algn="r"/>
-            <a:r>
-              <a:rPr sz="1200" b="0" i="1">
-                <a:solidFill>
-                  <a:srgbClr val="595959"/>
-                </a:solidFill>
-                <a:latin typeface="Calibri"/>
-              </a:rPr>
-              <a:t>(exploratory result)</a:t>
-            </a:r>
-          </a:p>
-        </p:txBody>
-      </p:sp>
       <p:pic>
         <p:nvPicPr>
-          <p:cNvPr id="7" name="Picture 6" descr="fig_tau_update_norms.png"/>
+          <p:cNvPr id="7" name="Picture 6" descr="fig_published_comparison.png"/>
           <p:cNvPicPr>
             <a:picLocks noChangeAspect="1"/>
           </p:cNvPicPr>
@@ -7068,8 +7099,8 @@
         </p:blipFill>
         <p:spPr>
           <a:xfrm>
-            <a:off x="457200" y="1600200"/>
-            <a:ext cx="7315200" cy="3160831"/>
+            <a:off x="457200" y="1554480"/>
+            <a:ext cx="7223760" cy="3898537"/>
           </a:xfrm>
           <a:prstGeom prst="rect">
             <a:avLst/>
@@ -7084,8 +7115,8 @@
         </p:nvSpPr>
         <p:spPr>
           <a:xfrm>
-            <a:off x="8001000" y="1645920"/>
-            <a:ext cx="3840480" cy="411480"/>
+            <a:off x="7955279" y="1600200"/>
+            <a:ext cx="3886200" cy="411480"/>
           </a:xfrm>
           <a:prstGeom prst="rect">
             <a:avLst/>
@@ -7106,7 +7137,7 @@
                 </a:solidFill>
                 <a:latin typeface="Calibri"/>
               </a:rPr>
-              <a:t>Mechanism</a:t>
+              <a:t>Confirmatory benchmark looks</a:t>
             </a:r>
           </a:p>
         </p:txBody>
@@ -7119,8 +7150,8 @@
         </p:nvSpPr>
         <p:spPr>
           <a:xfrm>
-            <a:off x="8001000" y="2103120"/>
-            <a:ext cx="3840480" cy="4023360"/>
+            <a:off x="7955279" y="2057400"/>
+            <a:ext cx="3886200" cy="4069080"/>
           </a:xfrm>
           <a:prstGeom prst="rect">
             <a:avLst/>
@@ -7154,7 +7185,7 @@
                 </a:solidFill>
                 <a:latin typeface="Calibri"/>
               </a:rPr>
-              <a:t>FedAdam step ∝ m / (√v + τ)</a:t>
+              <a:t>Our cloud reference is competitive with published full-ranking results</a:t>
             </a:r>
           </a:p>
           <a:p>
@@ -7179,7 +7210,7 @@
                 </a:solidFill>
                 <a:latin typeface="Calibri"/>
               </a:rPr>
-              <a:t>Client updates ≈ 10⁻⁷, registered τ = 10⁻³</a:t>
+              <a:t>MovieLens-1M: 0.1936 against 0.1739 published for eSASRec</a:t>
             </a:r>
           </a:p>
           <a:p>
@@ -7204,7 +7235,7 @@
                 </a:solidFill>
                 <a:latin typeface="Calibri"/>
               </a:rPr>
-              <a:t>→ server step 20–100× too small</a:t>
+              <a:t>Federated arms kept only 13–77% of it</a:t>
             </a:r>
           </a:p>
           <a:p>
@@ -7229,32 +7260,7 @@
                 </a:solidFill>
                 <a:latin typeface="Calibri"/>
               </a:rPr>
-              <a:t>Tuned model moved ≈ 0.06% from θ_pre in 13,654 rounds</a:t>
-            </a:r>
-          </a:p>
-          <a:p>
-            <a:pPr>
-              <a:spcAft>
-                <a:spcPts val="700"/>
-              </a:spcAft>
-            </a:pPr>
-            <a:r>
-              <a:rPr sz="1500">
-                <a:solidFill>
-                  <a:srgbClr val="595959"/>
-                </a:solidFill>
-                <a:latin typeface="Calibri"/>
-              </a:rPr>
-              <a:t>•  </a:t>
-            </a:r>
-            <a:r>
-              <a:rPr sz="1500" b="0">
-                <a:solidFill>
-                  <a:srgbClr val="262626"/>
-                </a:solidFill>
-                <a:latin typeface="Calibri"/>
-              </a:rPr>
-              <a:t>Confirmatory results stay as registered; the fix is exploratory</a:t>
+              <a:t>→ something in the federated recipe was wrong</a:t>
             </a:r>
           </a:p>
         </p:txBody>
@@ -7307,7 +7313,7 @@
                 </a:solidFill>
                 <a:latin typeface="Calibri"/>
               </a:rPr>
-              <a:t>With τ fixed, federated training learns</a:t>
+              <a:t>Diagnosis: FedAdam's τ froze federated training</a:t>
             </a:r>
           </a:p>
         </p:txBody>
@@ -7377,7 +7383,7 @@
                 </a:solidFill>
                 <a:latin typeface="Calibri"/>
               </a:rPr>
-              <a:t>Six public benchmarks, TEST (exploratory look)</a:t>
+              <a:t>Found after the test evaluation</a:t>
             </a:r>
           </a:p>
         </p:txBody>
@@ -7460,7 +7466,7 @@
         </p:nvSpPr>
         <p:spPr>
           <a:xfrm>
-            <a:off x="9601200" y="1143000"/>
+            <a:off x="9601200" y="1097280"/>
             <a:ext cx="2103120" cy="310896"/>
           </a:xfrm>
           <a:prstGeom prst="rect">
@@ -7489,7 +7495,7 @@
       </p:sp>
       <p:pic>
         <p:nvPicPr>
-          <p:cNvPr id="8" name="Picture 7" descr="fig_bench_taufix.png"/>
+          <p:cNvPr id="8" name="Picture 7" descr="d14_tau_problem.png"/>
           <p:cNvPicPr>
             <a:picLocks noChangeAspect="1"/>
           </p:cNvPicPr>
@@ -7503,24 +7509,48 @@
         </p:blipFill>
         <p:spPr>
           <a:xfrm>
-            <a:off x="457200" y="1600200"/>
-            <a:ext cx="7315200" cy="4200211"/>
+            <a:off x="457200" y="1943153"/>
+            <a:ext cx="6949440" cy="2057293"/>
           </a:xfrm>
           <a:prstGeom prst="rect">
             <a:avLst/>
           </a:prstGeom>
         </p:spPr>
       </p:pic>
-      <p:sp>
-        <p:nvSpPr>
-          <p:cNvPr id="9" name="TextBox 8"/>
+      <p:pic>
+        <p:nvPicPr>
+          <p:cNvPr id="9" name="Picture 8" descr="fig_tau_update_norms.png"/>
+          <p:cNvPicPr>
+            <a:picLocks noChangeAspect="1"/>
+          </p:cNvPicPr>
+          <p:nvPr/>
+        </p:nvPicPr>
+        <p:blipFill>
+          <a:blip r:embed="rId3"/>
+          <a:stretch>
+            <a:fillRect/>
+          </a:stretch>
+        </p:blipFill>
+        <p:spPr>
+          <a:xfrm>
+            <a:off x="548640" y="4343400"/>
+            <a:ext cx="4549876" cy="1965960"/>
+          </a:xfrm>
+          <a:prstGeom prst="rect">
+            <a:avLst/>
+          </a:prstGeom>
+        </p:spPr>
+      </p:pic>
+      <p:sp>
+        <p:nvSpPr>
+          <p:cNvPr id="10" name="TextBox 9"/>
           <p:cNvSpPr txBox="1"/>
           <p:nvPr/>
         </p:nvSpPr>
         <p:spPr>
           <a:xfrm>
-            <a:off x="8001000" y="1645920"/>
-            <a:ext cx="3840480" cy="411480"/>
+            <a:off x="7680960" y="1737360"/>
+            <a:ext cx="4114800" cy="411480"/>
           </a:xfrm>
           <a:prstGeom prst="rect">
             <a:avLst/>
@@ -7541,21 +7571,21 @@
                 </a:solidFill>
                 <a:latin typeface="Calibri"/>
               </a:rPr>
-              <a:t>What changed</a:t>
-            </a:r>
-          </a:p>
-        </p:txBody>
-      </p:sp>
-      <p:sp>
-        <p:nvSpPr>
-          <p:cNvPr id="10" name="TextBox 9"/>
+              <a:t>Mechanism</a:t>
+            </a:r>
+          </a:p>
+        </p:txBody>
+      </p:sp>
+      <p:sp>
+        <p:nvSpPr>
+          <p:cNvPr id="11" name="TextBox 10"/>
           <p:cNvSpPr txBox="1"/>
           <p:nvPr/>
         </p:nvSpPr>
         <p:spPr>
           <a:xfrm>
-            <a:off x="8001000" y="2103120"/>
-            <a:ext cx="3840480" cy="4023360"/>
+            <a:off x="7680960" y="2194560"/>
+            <a:ext cx="4114800" cy="3977640"/>
           </a:xfrm>
           <a:prstGeom prst="rect">
             <a:avLst/>
@@ -7589,7 +7619,7 @@
                 </a:solidFill>
                 <a:latin typeface="Calibri"/>
               </a:rPr>
-              <a:t>Warm FL: 75–92% of C_FULL (was 13–77%)</a:t>
+              <a:t>FedAdam step ∝ m / (√v + τ)</a:t>
             </a:r>
           </a:p>
           <a:p>
@@ -7614,7 +7644,7 @@
                 </a:solidFill>
                 <a:latin typeface="Calibri"/>
               </a:rPr>
-              <a:t>C_SMALL (device size, central) 90–110%: size is not the bottleneck</a:t>
+              <a:t>Updates ≈ 10⁻⁷, registered τ = 10⁻³</a:t>
             </a:r>
           </a:p>
           <a:p>
@@ -7639,7 +7669,7 @@
                 </a:solidFill>
                 <a:latin typeface="Calibri"/>
               </a:rPr>
-              <a:t>On REES46 the fix changes nothing (+0.00022, CI includes 0)</a:t>
+              <a:t>→ the server step was 20–100× too small</a:t>
             </a:r>
           </a:p>
           <a:p>
@@ -7664,7 +7694,32 @@
                 </a:solidFill>
                 <a:latin typeface="Calibri"/>
               </a:rPr>
-              <a:t>Caveat: τ changed together with budget / item tables</a:t>
+              <a:t>The tuned model moved ≈ 0.06% in 13,654 rounds</a:t>
+            </a:r>
+          </a:p>
+          <a:p>
+            <a:pPr>
+              <a:spcAft>
+                <a:spcPts val="700"/>
+              </a:spcAft>
+            </a:pPr>
+            <a:r>
+              <a:rPr sz="1500">
+                <a:solidFill>
+                  <a:srgbClr val="595959"/>
+                </a:solidFill>
+                <a:latin typeface="Calibri"/>
+              </a:rPr>
+              <a:t>•  </a:t>
+            </a:r>
+            <a:r>
+              <a:rPr sz="1500" b="0">
+                <a:solidFill>
+                  <a:srgbClr val="262626"/>
+                </a:solidFill>
+                <a:latin typeface="Calibri"/>
+              </a:rPr>
+              <a:t>Confirmatory results stay as registered; the fix is exploratory</a:t>
             </a:r>
           </a:p>
         </p:txBody>
@@ -7717,7 +7772,7 @@
                 </a:solidFill>
                 <a:latin typeface="Calibri"/>
               </a:rPr>
-              <a:t>The value of federation depends on the server's data</a:t>
+              <a:t>With τ fixed, federated training learns</a:t>
             </a:r>
           </a:p>
         </p:txBody>
@@ -7765,6 +7820,41 @@
         </p:nvSpPr>
         <p:spPr>
           <a:xfrm>
+            <a:off x="502920" y="1060704"/>
+            <a:ext cx="11155680" cy="457200"/>
+          </a:xfrm>
+          <a:prstGeom prst="rect">
+            <a:avLst/>
+          </a:prstGeom>
+          <a:noFill/>
+        </p:spPr>
+        <p:txBody>
+          <a:bodyPr wrap="square" anchor="t" lIns="45720" rIns="45720">
+            <a:spAutoFit/>
+          </a:bodyPr>
+          <a:lstStyle/>
+          <a:p>
+            <a:pPr algn="l"/>
+            <a:r>
+              <a:rPr sz="1600" b="0" i="1">
+                <a:solidFill>
+                  <a:srgbClr val="595959"/>
+                </a:solidFill>
+                <a:latin typeface="Calibri"/>
+              </a:rPr>
+              <a:t>Six public benchmarks, TEST (exploratory look)</a:t>
+            </a:r>
+          </a:p>
+        </p:txBody>
+      </p:sp>
+      <p:sp>
+        <p:nvSpPr>
+          <p:cNvPr id="5" name="TextBox 4"/>
+          <p:cNvSpPr txBox="1"/>
+          <p:nvPr/>
+        </p:nvSpPr>
+        <p:spPr>
+          <a:xfrm>
             <a:off x="548640" y="6446520"/>
             <a:ext cx="8229600" cy="274320"/>
           </a:xfrm>
@@ -7794,7 +7884,7 @@
       </p:sp>
       <p:sp>
         <p:nvSpPr>
-          <p:cNvPr id="5" name="TextBox 4"/>
+          <p:cNvPr id="6" name="TextBox 5"/>
           <p:cNvSpPr txBox="1"/>
           <p:nvPr/>
         </p:nvSpPr>
@@ -7829,13 +7919,13 @@
       </p:sp>
       <p:sp>
         <p:nvSpPr>
-          <p:cNvPr id="6" name="TextBox 5"/>
+          <p:cNvPr id="7" name="TextBox 6"/>
           <p:cNvSpPr txBox="1"/>
           <p:nvPr/>
         </p:nvSpPr>
         <p:spPr>
           <a:xfrm>
-            <a:off x="9601200" y="1143000"/>
+            <a:off x="9601200" y="1097280"/>
             <a:ext cx="2103120" cy="310896"/>
           </a:xfrm>
           <a:prstGeom prst="rect">
@@ -7864,7 +7954,7 @@
       </p:sp>
       <p:pic>
         <p:nvPicPr>
-          <p:cNvPr id="7" name="Picture 6" descr="fig_server_data_value.png"/>
+          <p:cNvPr id="8" name="Picture 7" descr="fig_bench_taufix.png"/>
           <p:cNvPicPr>
             <a:picLocks noChangeAspect="1"/>
           </p:cNvPicPr>
@@ -7878,8 +7968,8 @@
         </p:blipFill>
         <p:spPr>
           <a:xfrm>
-            <a:off x="457200" y="1463040"/>
-            <a:ext cx="7040880" cy="3520439"/>
+            <a:off x="457200" y="1600200"/>
+            <a:ext cx="7315200" cy="4200211"/>
           </a:xfrm>
           <a:prstGeom prst="rect">
             <a:avLst/>
@@ -7888,14 +7978,14 @@
       </p:pic>
       <p:sp>
         <p:nvSpPr>
-          <p:cNvPr id="8" name="TextBox 7"/>
+          <p:cNvPr id="9" name="TextBox 8"/>
           <p:cNvSpPr txBox="1"/>
           <p:nvPr/>
         </p:nvSpPr>
         <p:spPr>
           <a:xfrm>
-            <a:off x="7772400" y="1554480"/>
-            <a:ext cx="4069080" cy="411480"/>
+            <a:off x="8001000" y="1645920"/>
+            <a:ext cx="3840480" cy="411480"/>
           </a:xfrm>
           <a:prstGeom prst="rect">
             <a:avLst/>
@@ -7916,21 +8006,21 @@
                 </a:solidFill>
                 <a:latin typeface="Calibri"/>
               </a:rPr>
-              <a:t>Evidence</a:t>
-            </a:r>
-          </a:p>
-        </p:txBody>
-      </p:sp>
-      <p:sp>
-        <p:nvSpPr>
-          <p:cNvPr id="9" name="TextBox 8"/>
+              <a:t>What changed</a:t>
+            </a:r>
+          </a:p>
+        </p:txBody>
+      </p:sp>
+      <p:sp>
+        <p:nvSpPr>
+          <p:cNvPr id="10" name="TextBox 9"/>
           <p:cNvSpPr txBox="1"/>
           <p:nvPr/>
         </p:nvSpPr>
         <p:spPr>
           <a:xfrm>
-            <a:off x="7772400" y="2011680"/>
-            <a:ext cx="4069080" cy="4114800"/>
+            <a:off x="8001000" y="2103120"/>
+            <a:ext cx="3840480" cy="4023360"/>
           </a:xfrm>
           <a:prstGeom prst="rect">
             <a:avLst/>
@@ -7964,25 +8054,7 @@
                 </a:solidFill>
                 <a:latin typeface="Calibri"/>
               </a:rPr>
-              <a:t>100k-user pretrain: FL adds </a:t>
-            </a:r>
-            <a:r>
-              <a:rPr sz="1500" b="1">
-                <a:solidFill>
-                  <a:srgbClr val="262626"/>
-                </a:solidFill>
-                <a:latin typeface="Calibri"/>
-              </a:rPr>
-              <a:t>+0.0091</a:t>
-            </a:r>
-            <a:r>
-              <a:rPr sz="1500" b="0">
-                <a:solidFill>
-                  <a:srgbClr val="262626"/>
-                </a:solidFill>
-                <a:latin typeface="Calibri"/>
-              </a:rPr>
-              <a:t> MRR@20</a:t>
+              <a:t>Warm FL: 75–92% of the cloud model (was 13–77%)</a:t>
             </a:r>
           </a:p>
           <a:p>
@@ -8007,7 +8079,7 @@
                 </a:solidFill>
                 <a:latin typeface="Calibri"/>
               </a:rPr>
-              <a:t>1.2M-user pretrain: FL adds ≈ 0</a:t>
+              <a:t>Central device-size model 90–110%: size is not the bottleneck</a:t>
             </a:r>
           </a:p>
           <a:p>
@@ -8032,7 +8104,7 @@
                 </a:solidFill>
                 <a:latin typeface="Calibri"/>
               </a:rPr>
-              <a:t>Disjoint server data (50%): warm beats cold by 27–55% on Amazon data</a:t>
+              <a:t>On REES46 the fix changes nothing (+0.00022, interval includes 0)</a:t>
             </a:r>
           </a:p>
           <a:p>
@@ -8057,32 +8129,7 @@
                 </a:solidFill>
                 <a:latin typeface="Calibri"/>
               </a:rPr>
-              <a:t>Exception: MovieLens-1M (6,040 users)</a:t>
-            </a:r>
-          </a:p>
-          <a:p>
-            <a:pPr>
-              <a:spcAft>
-                <a:spcPts val="700"/>
-              </a:spcAft>
-            </a:pPr>
-            <a:r>
-              <a:rPr sz="1500">
-                <a:solidFill>
-                  <a:srgbClr val="595959"/>
-                </a:solidFill>
-                <a:latin typeface="Calibri"/>
-              </a:rPr>
-              <a:t>•  </a:t>
-            </a:r>
-            <a:r>
-              <a:rPr sz="1500" b="0">
-                <a:solidFill>
-                  <a:srgbClr val="262626"/>
-                </a:solidFill>
-                <a:latin typeface="Calibri"/>
-              </a:rPr>
-              <a:t>Federation cost at matched size ≈ 14–22%</a:t>
+              <a:t>Caveat: τ changed together with the budget and item tables</a:t>
             </a:r>
           </a:p>
         </p:txBody>
@@ -8135,7 +8182,7 @@
                 </a:solidFill>
                 <a:latin typeface="Calibri"/>
               </a:rPr>
-              <a:t>Privacy: learning leaks, and the guarantees need care</a:t>
+              <a:t>The value of federation depends on the server's data</a:t>
             </a:r>
           </a:p>
         </p:txBody>
@@ -8245,9 +8292,44 @@
           </a:p>
         </p:txBody>
       </p:sp>
+      <p:sp>
+        <p:nvSpPr>
+          <p:cNvPr id="6" name="TextBox 5"/>
+          <p:cNvSpPr txBox="1"/>
+          <p:nvPr/>
+        </p:nvSpPr>
+        <p:spPr>
+          <a:xfrm>
+            <a:off x="9601200" y="1097280"/>
+            <a:ext cx="2103120" cy="310896"/>
+          </a:xfrm>
+          <a:prstGeom prst="rect">
+            <a:avLst/>
+          </a:prstGeom>
+          <a:noFill/>
+        </p:spPr>
+        <p:txBody>
+          <a:bodyPr wrap="square" anchor="t" lIns="45720" rIns="45720">
+            <a:spAutoFit/>
+          </a:bodyPr>
+          <a:lstStyle/>
+          <a:p>
+            <a:pPr algn="r"/>
+            <a:r>
+              <a:rPr sz="1200" b="0" i="1">
+                <a:solidFill>
+                  <a:srgbClr val="595959"/>
+                </a:solidFill>
+                <a:latin typeface="Calibri"/>
+              </a:rPr>
+              <a:t>(exploratory result)</a:t>
+            </a:r>
+          </a:p>
+        </p:txBody>
+      </p:sp>
       <p:pic>
         <p:nvPicPr>
-          <p:cNvPr id="6" name="Picture 5" descr="fig_privacy.png"/>
+          <p:cNvPr id="7" name="Picture 6" descr="fig_server_data_value.png"/>
           <p:cNvPicPr>
             <a:picLocks noChangeAspect="1"/>
           </p:cNvPicPr>
@@ -8261,8 +8343,8 @@
         </p:blipFill>
         <p:spPr>
           <a:xfrm>
-            <a:off x="411480" y="1371600"/>
-            <a:ext cx="7406640" cy="3092666"/>
+            <a:off x="457200" y="1463040"/>
+            <a:ext cx="7040880" cy="3520439"/>
           </a:xfrm>
           <a:prstGeom prst="rect">
             <a:avLst/>
@@ -8271,14 +8353,14 @@
       </p:pic>
       <p:sp>
         <p:nvSpPr>
-          <p:cNvPr id="7" name="TextBox 6"/>
+          <p:cNvPr id="8" name="TextBox 7"/>
           <p:cNvSpPr txBox="1"/>
           <p:nvPr/>
         </p:nvSpPr>
         <p:spPr>
           <a:xfrm>
-            <a:off x="8046720" y="1463040"/>
-            <a:ext cx="3794760" cy="411480"/>
+            <a:off x="7772400" y="1554480"/>
+            <a:ext cx="4069080" cy="411480"/>
           </a:xfrm>
           <a:prstGeom prst="rect">
             <a:avLst/>
@@ -8293,27 +8375,27 @@
           <a:p>
             <a:pPr algn="l"/>
             <a:r>
-              <a:rPr sz="1600" b="1" i="0">
+              <a:rPr sz="1700" b="1" i="0">
                 <a:solidFill>
                   <a:srgbClr val="1F3864"/>
                 </a:solidFill>
                 <a:latin typeface="Calibri"/>
               </a:rPr>
-              <a:t>Findings</a:t>
-            </a:r>
-          </a:p>
-        </p:txBody>
-      </p:sp>
-      <p:sp>
-        <p:nvSpPr>
-          <p:cNvPr id="8" name="TextBox 7"/>
+              <a:t>Evidence</a:t>
+            </a:r>
+          </a:p>
+        </p:txBody>
+      </p:sp>
+      <p:sp>
+        <p:nvSpPr>
+          <p:cNvPr id="9" name="TextBox 8"/>
           <p:cNvSpPr txBox="1"/>
           <p:nvPr/>
         </p:nvSpPr>
         <p:spPr>
           <a:xfrm>
-            <a:off x="8046720" y="1920240"/>
-            <a:ext cx="3794760" cy="4206240"/>
+            <a:off x="7772400" y="2011680"/>
+            <a:ext cx="4069080" cy="4114800"/>
           </a:xfrm>
           <a:prstGeom prst="rect">
             <a:avLst/>
@@ -8332,7 +8414,7 @@
               </a:spcAft>
             </a:pPr>
             <a:r>
-              <a:rPr sz="1400">
+              <a:rPr sz="1500">
                 <a:solidFill>
                   <a:srgbClr val="595959"/>
                 </a:solidFill>
@@ -8341,13 +8423,31 @@
               <a:t>•  </a:t>
             </a:r>
             <a:r>
-              <a:rPr sz="1400" b="0">
+              <a:rPr sz="1500" b="0">
                 <a:solidFill>
                   <a:srgbClr val="262626"/>
                 </a:solidFill>
                 <a:latin typeface="Calibri"/>
               </a:rPr>
-              <a:t>FL that really learns leaks membership (AUC 0.747)</a:t>
+              <a:t>100k-user pretrain: federation adds </a:t>
+            </a:r>
+            <a:r>
+              <a:rPr sz="1500" b="1">
+                <a:solidFill>
+                  <a:srgbClr val="262626"/>
+                </a:solidFill>
+                <a:latin typeface="Calibri"/>
+              </a:rPr>
+              <a:t>+0.0091</a:t>
+            </a:r>
+            <a:r>
+              <a:rPr sz="1500" b="0">
+                <a:solidFill>
+                  <a:srgbClr val="262626"/>
+                </a:solidFill>
+                <a:latin typeface="Calibri"/>
+              </a:rPr>
+              <a:t> MRR@20</a:t>
             </a:r>
           </a:p>
           <a:p>
@@ -8357,7 +8457,7 @@
               </a:spcAft>
             </a:pPr>
             <a:r>
-              <a:rPr sz="1400">
+              <a:rPr sz="1500">
                 <a:solidFill>
                   <a:srgbClr val="595959"/>
                 </a:solidFill>
@@ -8366,13 +8466,13 @@
               <a:t>•  </a:t>
             </a:r>
             <a:r>
-              <a:rPr sz="1400" b="0">
+              <a:rPr sz="1500" b="0">
                 <a:solidFill>
                   <a:srgbClr val="262626"/>
                 </a:solidFill>
                 <a:latin typeface="Calibri"/>
               </a:rPr>
-              <a:t>DP at ε = 8 removes the measured leak; cost small on warm, large on cold</a:t>
+              <a:t>1.2M-user pretrain: federation adds ≈ 0</a:t>
             </a:r>
           </a:p>
           <a:p>
@@ -8382,7 +8482,7 @@
               </a:spcAft>
             </a:pPr>
             <a:r>
-              <a:rPr sz="1400">
+              <a:rPr sz="1500">
                 <a:solidFill>
                   <a:srgbClr val="595959"/>
                 </a:solidFill>
@@ -8391,31 +8491,13 @@
               <a:t>•  </a:t>
             </a:r>
             <a:r>
-              <a:rPr sz="1400" b="0">
+              <a:rPr sz="1500" b="0">
                 <a:solidFill>
                   <a:srgbClr val="262626"/>
                 </a:solidFill>
                 <a:latin typeface="Calibri"/>
               </a:rPr>
-              <a:t/>
-            </a:r>
-            <a:r>
-              <a:rPr sz="1400" b="1">
-                <a:solidFill>
-                  <a:srgbClr val="262626"/>
-                </a:solidFill>
-                <a:latin typeface="Calibri"/>
-              </a:rPr>
-              <a:t>Audit corrections:</a:t>
-            </a:r>
-            <a:r>
-              <a:rPr sz="1400" b="0">
-                <a:solidFill>
-                  <a:srgbClr val="262626"/>
-                </a:solidFill>
-                <a:latin typeface="Calibri"/>
-              </a:rPr>
-              <a:t> legacy DP seed was public → no formal DP guarantee</a:t>
+              <a:t>Disjoint server data (50%): warm beats cold by 27–55% on Amazon data</a:t>
             </a:r>
           </a:p>
           <a:p>
@@ -8425,7 +8507,7 @@
               </a:spcAft>
             </a:pPr>
             <a:r>
-              <a:rPr sz="1400">
+              <a:rPr sz="1500">
                 <a:solidFill>
                   <a:srgbClr val="595959"/>
                 </a:solidFill>
@@ -8434,38 +8516,13 @@
               <a:t>•  </a:t>
             </a:r>
             <a:r>
-              <a:rPr sz="1400" b="0">
+              <a:rPr sz="1500" b="0">
                 <a:solidFill>
                   <a:srgbClr val="262626"/>
                 </a:solidFill>
                 <a:latin typeface="Calibri"/>
               </a:rPr>
-              <a:t>Update-leakage attack: 2.625 pp &gt; 2 pp threshold (negative)</a:t>
-            </a:r>
-          </a:p>
-          <a:p>
-            <a:pPr>
-              <a:spcAft>
-                <a:spcPts val="700"/>
-              </a:spcAft>
-            </a:pPr>
-            <a:r>
-              <a:rPr sz="1400">
-                <a:solidFill>
-                  <a:srgbClr val="595959"/>
-                </a:solidFill>
-                <a:latin typeface="Calibri"/>
-              </a:rPr>
-              <a:t>•  </a:t>
-            </a:r>
-            <a:r>
-              <a:rPr sz="1400" b="0">
-                <a:solidFill>
-                  <a:srgbClr val="262626"/>
-                </a:solidFill>
-                <a:latin typeface="Calibri"/>
-              </a:rPr>
-              <a:t>Secure aggregation: simulation only (&lt; 1% upload overhead)</a:t>
+              <a:t>Exception: MovieLens-1M (6,040 users)</a:t>
             </a:r>
           </a:p>
         </p:txBody>
@@ -8518,7 +8575,7 @@
                 </a:solidFill>
                 <a:latin typeface="Calibri"/>
               </a:rPr>
-              <a:t>On-device feasibility in Microsoft Edge</a:t>
+              <a:t>Privacy: learning leaks, and guarantees need care</a:t>
             </a:r>
           </a:p>
         </p:txBody>
@@ -8566,41 +8623,6 @@
         </p:nvSpPr>
         <p:spPr>
           <a:xfrm>
-            <a:off x="502920" y="1060704"/>
-            <a:ext cx="11155680" cy="457200"/>
-          </a:xfrm>
-          <a:prstGeom prst="rect">
-            <a:avLst/>
-          </a:prstGeom>
-          <a:noFill/>
-        </p:spPr>
-        <p:txBody>
-          <a:bodyPr wrap="square" anchor="t" lIns="45720" rIns="45720">
-            <a:spAutoFit/>
-          </a:bodyPr>
-          <a:lstStyle/>
-          <a:p>
-            <a:pPr algn="l"/>
-            <a:r>
-              <a:rPr sz="1600" b="0" i="1">
-                <a:solidFill>
-                  <a:srgbClr val="595959"/>
-                </a:solidFill>
-                <a:latin typeface="Calibri"/>
-              </a:rPr>
-              <a:t>ONNX Runtime WebAssembly, laptop / phone / server CPU</a:t>
-            </a:r>
-          </a:p>
-        </p:txBody>
-      </p:sp>
-      <p:sp>
-        <p:nvSpPr>
-          <p:cNvPr id="5" name="TextBox 4"/>
-          <p:cNvSpPr txBox="1"/>
-          <p:nvPr/>
-        </p:nvSpPr>
-        <p:spPr>
-          <a:xfrm>
             <a:off x="548640" y="6446520"/>
             <a:ext cx="8229600" cy="274320"/>
           </a:xfrm>
@@ -8630,7 +8652,7 @@
       </p:sp>
       <p:sp>
         <p:nvSpPr>
-          <p:cNvPr id="6" name="TextBox 5"/>
+          <p:cNvPr id="5" name="TextBox 4"/>
           <p:cNvSpPr txBox="1"/>
           <p:nvPr/>
         </p:nvSpPr>
@@ -8665,7 +8687,7 @@
       </p:sp>
       <p:pic>
         <p:nvPicPr>
-          <p:cNvPr id="7" name="Picture 6" descr="fig_device_latency.png"/>
+          <p:cNvPr id="6" name="Picture 5" descr="d16_membership_attack.png"/>
           <p:cNvPicPr>
             <a:picLocks noChangeAspect="1"/>
           </p:cNvPicPr>
@@ -8679,8 +8701,8 @@
         </p:blipFill>
         <p:spPr>
           <a:xfrm>
-            <a:off x="457200" y="1691640"/>
-            <a:ext cx="7498079" cy="3013334"/>
+            <a:off x="457200" y="1415516"/>
+            <a:ext cx="11247120" cy="2655367"/>
           </a:xfrm>
           <a:prstGeom prst="rect">
             <a:avLst/>
@@ -8689,14 +8711,14 @@
       </p:pic>
       <p:sp>
         <p:nvSpPr>
-          <p:cNvPr id="8" name="TextBox 7"/>
+          <p:cNvPr id="7" name="TextBox 6"/>
           <p:cNvSpPr txBox="1"/>
           <p:nvPr/>
         </p:nvSpPr>
         <p:spPr>
           <a:xfrm>
-            <a:off x="8183879" y="1737360"/>
-            <a:ext cx="3657600" cy="411480"/>
+            <a:off x="548640" y="4251960"/>
+            <a:ext cx="11155680" cy="411480"/>
           </a:xfrm>
           <a:prstGeom prst="rect">
             <a:avLst/>
@@ -8717,21 +8739,21 @@
                 </a:solidFill>
                 <a:latin typeface="Calibri"/>
               </a:rPr>
-              <a:t>Deployability</a:t>
-            </a:r>
-          </a:p>
-        </p:txBody>
-      </p:sp>
-      <p:sp>
-        <p:nvSpPr>
-          <p:cNvPr id="9" name="TextBox 8"/>
+              <a:t>Findings</a:t>
+            </a:r>
+          </a:p>
+        </p:txBody>
+      </p:sp>
+      <p:sp>
+        <p:nvSpPr>
+          <p:cNvPr id="8" name="TextBox 7"/>
           <p:cNvSpPr txBox="1"/>
           <p:nvPr/>
         </p:nvSpPr>
         <p:spPr>
           <a:xfrm>
-            <a:off x="8183879" y="2194560"/>
-            <a:ext cx="3657600" cy="3931920"/>
+            <a:off x="548640" y="4709160"/>
+            <a:ext cx="11155680" cy="1600200"/>
           </a:xfrm>
           <a:prstGeom prst="rect">
             <a:avLst/>
@@ -8765,7 +8787,7 @@
                 </a:solidFill>
                 <a:latin typeface="Calibri"/>
               </a:rPr>
-              <a:t>INT8 model: 82.9 MB → 21.2 MB</a:t>
+              <a:t>A federated model that really learns leaks membership (AUC 0.747); DP at ε = 8 removes the measured leak</a:t>
             </a:r>
           </a:p>
           <a:p>
@@ -8790,7 +8812,7 @@
                 </a:solidFill>
                 <a:latin typeface="Calibri"/>
               </a:rPr>
-              <a:t>INT8 and 8-bit uploads: no measurable quality cost (K16, K14)</a:t>
+              <a:t>DP costs little on the warm system (94.71% kept) and a lot on the cold one (31.30%)</a:t>
             </a:r>
           </a:p>
           <a:p>
@@ -8815,32 +8837,7 @@
                 </a:solidFill>
                 <a:latin typeface="Calibri"/>
               </a:rPr>
-              <a:t>Warm median latency 1.7–5.1 ms per query</a:t>
-            </a:r>
-          </a:p>
-          <a:p>
-            <a:pPr>
-              <a:spcAft>
-                <a:spcPts val="700"/>
-              </a:spcAft>
-            </a:pPr>
-            <a:r>
-              <a:rPr sz="1500">
-                <a:solidFill>
-                  <a:srgbClr val="595959"/>
-                </a:solidFill>
-                <a:latin typeface="Calibri"/>
-              </a:rPr>
-              <a:t>•  </a:t>
-            </a:r>
-            <a:r>
-              <a:rPr sz="1500" b="0">
-                <a:solidFill>
-                  <a:srgbClr val="262626"/>
-                </a:solidFill>
-                <a:latin typeface="Calibri"/>
-              </a:rPr>
-              <a:t>Phone cold start ≈ 2.5 s with INT8</a:t>
+              <a:t>Audit: the legacy DP randomness gives no formal guarantee; secure aggregation was simulated only</a:t>
             </a:r>
           </a:p>
         </p:txBody>
@@ -8893,7 +8890,7 @@
                 </a:solidFill>
                 <a:latin typeface="Calibri"/>
               </a:rPr>
-              <a:t>Closure experiments</a:t>
+              <a:t>On-device feasibility in Microsoft Edge</a:t>
             </a:r>
           </a:p>
         </p:txBody>
@@ -8963,7 +8960,7 @@
                 </a:solidFill>
                 <a:latin typeface="Calibri"/>
               </a:rPr>
-              <a:t>Technical closure and extensions, 12–17 October</a:t>
+              <a:t>ONNX Runtime WebAssembly on a laptop, a phone and a server CPU</a:t>
             </a:r>
           </a:p>
         </p:txBody>
@@ -9040,7 +9037,7 @@
       </p:sp>
       <p:pic>
         <p:nvPicPr>
-          <p:cNvPr id="7" name="Picture 6" descr="fig_closure_extensions.png"/>
+          <p:cNvPr id="7" name="Picture 6" descr="d10_ondevice_inference.png"/>
           <p:cNvPicPr>
             <a:picLocks noChangeAspect="1"/>
           </p:cNvPicPr>
@@ -9054,24 +9051,48 @@
         </p:blipFill>
         <p:spPr>
           <a:xfrm>
-            <a:off x="411480" y="1600200"/>
-            <a:ext cx="6949440" cy="2541270"/>
+            <a:off x="477329" y="1463040"/>
+            <a:ext cx="7183501" cy="3108960"/>
           </a:xfrm>
           <a:prstGeom prst="rect">
             <a:avLst/>
           </a:prstGeom>
         </p:spPr>
       </p:pic>
-      <p:sp>
-        <p:nvSpPr>
-          <p:cNvPr id="8" name="TextBox 7"/>
+      <p:pic>
+        <p:nvPicPr>
+          <p:cNvPr id="8" name="Picture 7" descr="fig_device_latency.png"/>
+          <p:cNvPicPr>
+            <a:picLocks noChangeAspect="1"/>
+          </p:cNvPicPr>
+          <p:nvPr/>
+        </p:nvPicPr>
+        <p:blipFill>
+          <a:blip r:embed="rId3"/>
+          <a:stretch>
+            <a:fillRect/>
+          </a:stretch>
+        </p:blipFill>
+        <p:spPr>
+          <a:xfrm>
+            <a:off x="548640" y="4572000"/>
+            <a:ext cx="4436837" cy="1783080"/>
+          </a:xfrm>
+          <a:prstGeom prst="rect">
+            <a:avLst/>
+          </a:prstGeom>
+        </p:spPr>
+      </p:pic>
+      <p:sp>
+        <p:nvSpPr>
+          <p:cNvPr id="9" name="TextBox 8"/>
           <p:cNvSpPr txBox="1"/>
           <p:nvPr/>
         </p:nvSpPr>
         <p:spPr>
           <a:xfrm>
-            <a:off x="7589520" y="1645920"/>
-            <a:ext cx="4251960" cy="411480"/>
+            <a:off x="7955279" y="1645920"/>
+            <a:ext cx="3886200" cy="411480"/>
           </a:xfrm>
           <a:prstGeom prst="rect">
             <a:avLst/>
@@ -9092,21 +9113,21 @@
                 </a:solidFill>
                 <a:latin typeface="Calibri"/>
               </a:rPr>
-              <a:t>What closure added</a:t>
-            </a:r>
-          </a:p>
-        </p:txBody>
-      </p:sp>
-      <p:sp>
-        <p:nvSpPr>
-          <p:cNvPr id="9" name="TextBox 8"/>
+              <a:t>Deployability</a:t>
+            </a:r>
+          </a:p>
+        </p:txBody>
+      </p:sp>
+      <p:sp>
+        <p:nvSpPr>
+          <p:cNvPr id="10" name="TextBox 9"/>
           <p:cNvSpPr txBox="1"/>
           <p:nvPr/>
         </p:nvSpPr>
         <p:spPr>
           <a:xfrm>
-            <a:off x="7589520" y="2103120"/>
-            <a:ext cx="4251960" cy="4023360"/>
+            <a:off x="7955279" y="2103120"/>
+            <a:ext cx="3886200" cy="4023360"/>
           </a:xfrm>
           <a:prstGeom prst="rect">
             <a:avLst/>
@@ -9140,7 +9161,7 @@
                 </a:solidFill>
                 <a:latin typeface="Calibri"/>
               </a:rPr>
-              <a:t>Second pretrain seed: small negative shift (−0.10 pts)</a:t>
+              <a:t>INT8 model: 82.9 MB → 21.2 MB</a:t>
             </a:r>
           </a:p>
           <a:p>
@@ -9165,7 +9186,7 @@
                 </a:solidFill>
                 <a:latin typeface="Calibri"/>
               </a:rPr>
-              <a:t>Fine-tuning moving FL models: +3–6%</a:t>
+              <a:t>INT8 and 8-bit uploads: no measurable quality cost</a:t>
             </a:r>
           </a:p>
           <a:p>
@@ -9190,7 +9211,7 @@
                 </a:solidFill>
                 <a:latin typeface="Calibri"/>
               </a:rPr>
-              <a:t>Training-free baselines: best MC 0.1366 (validation)</a:t>
+              <a:t>Warm median latency 1.7–5.1 ms per query</a:t>
             </a:r>
           </a:p>
           <a:p>
@@ -9215,32 +9236,7 @@
                 </a:solidFill>
                 <a:latin typeface="Calibri"/>
               </a:rPr>
-              <a:t>Stopped / not run: DP-FTRL, canary restart, TEST2</a:t>
-            </a:r>
-          </a:p>
-          <a:p>
-            <a:pPr>
-              <a:spcAft>
-                <a:spcPts val="700"/>
-              </a:spcAft>
-            </a:pPr>
-            <a:r>
-              <a:rPr sz="1500">
-                <a:solidFill>
-                  <a:srgbClr val="595959"/>
-                </a:solidFill>
-                <a:latin typeface="Calibri"/>
-              </a:rPr>
-              <a:t>•  </a:t>
-            </a:r>
-            <a:r>
-              <a:rPr sz="1500" b="0">
-                <a:solidFill>
-                  <a:srgbClr val="262626"/>
-                </a:solidFill>
-                <a:latin typeface="Calibri"/>
-              </a:rPr>
-              <a:t>All results labelled; nothing re-scored</a:t>
+              <a:t>Phone cold start ≈ 2.5 s with INT8</a:t>
             </a:r>
           </a:p>
         </p:txBody>
@@ -9516,7 +9512,7 @@
                 </a:solidFill>
                 <a:latin typeface="Calibri"/>
               </a:rPr>
-              <a:t>A browser (Microsoft Edge) sees shopping behaviour on the device</a:t>
+              <a:t>A browser sees shopping behaviour on the user's own device</a:t>
             </a:r>
           </a:p>
           <a:p>
@@ -9541,7 +9537,7 @@
                 </a:solidFill>
                 <a:latin typeface="Calibri"/>
               </a:rPr>
-              <a:t>Cloud training needs that history on a server, which users and regulators resist</a:t>
+              <a:t>Cloud training copies that history to a server, which users and regulation resist</a:t>
             </a:r>
           </a:p>
           <a:p>
@@ -9566,7 +9562,7 @@
                 </a:solidFill>
                 <a:latin typeface="Calibri"/>
               </a:rPr>
-              <a:t>Most federated-recommendation papers use small datasets and sampled metrics, not real shopping logs</a:t>
+              <a:t>Learning on the device is constrained: little compute, one short history, and updates can leak</a:t>
             </a:r>
           </a:p>
         </p:txBody>
@@ -9601,7 +9597,7 @@
                 </a:solidFill>
                 <a:latin typeface="Calibri"/>
               </a:rPr>
-              <a:t>What we answer</a:t>
+              <a:t>What we measure</a:t>
             </a:r>
           </a:p>
         </p:txBody>
@@ -9667,7 +9663,7 @@
                 </a:solidFill>
                 <a:latin typeface="Calibri"/>
               </a:rPr>
-              <a:t>: cloud → federated → on-device</a:t>
+              <a:t> of cloud quality: federated and on-device systems</a:t>
             </a:r>
           </a:p>
           <a:p>
@@ -9701,7 +9697,7 @@
                 </a:solidFill>
                 <a:latin typeface="Calibri"/>
               </a:rPr>
-              <a:t>Value of server pretraining</a:t>
+              <a:t>Server pretraining</a:t>
             </a:r>
             <a:r>
               <a:rPr sz="1500" b="0">
@@ -9719,7 +9715,7 @@
                 </a:solidFill>
                 <a:latin typeface="Calibri"/>
               </a:rPr>
-              <a:t>on-device adaptation</a:t>
+              <a:t>on-device fine-tuning</a:t>
             </a:r>
             <a:r>
               <a:rPr sz="1500" b="0">
@@ -9814,7 +9810,7 @@
                 </a:solidFill>
                 <a:latin typeface="Calibri"/>
               </a:rPr>
-              <a:t>: INT8, latency, upload bytes</a:t>
+              <a:t>: INT8 size, browser latency, upload bytes</a:t>
             </a:r>
           </a:p>
         </p:txBody>
@@ -9926,7 +9922,7 @@
                 </a:solidFill>
                 <a:latin typeface="Calibri"/>
               </a:rPr>
-              <a:t>What we learned</a:t>
+              <a:t>Closure experiments</a:t>
             </a:r>
           </a:p>
         </p:txBody>
@@ -9974,6 +9970,41 @@
         </p:nvSpPr>
         <p:spPr>
           <a:xfrm>
+            <a:off x="502920" y="1060704"/>
+            <a:ext cx="11155680" cy="457200"/>
+          </a:xfrm>
+          <a:prstGeom prst="rect">
+            <a:avLst/>
+          </a:prstGeom>
+          <a:noFill/>
+        </p:spPr>
+        <p:txBody>
+          <a:bodyPr wrap="square" anchor="t" lIns="45720" rIns="45720">
+            <a:spAutoFit/>
+          </a:bodyPr>
+          <a:lstStyle/>
+          <a:p>
+            <a:pPr algn="l"/>
+            <a:r>
+              <a:rPr sz="1600" b="0" i="1">
+                <a:solidFill>
+                  <a:srgbClr val="595959"/>
+                </a:solidFill>
+                <a:latin typeface="Calibri"/>
+              </a:rPr>
+              <a:t>Technical closure and extensions, 12–17 October</a:t>
+            </a:r>
+          </a:p>
+        </p:txBody>
+      </p:sp>
+      <p:sp>
+        <p:nvSpPr>
+          <p:cNvPr id="5" name="TextBox 4"/>
+          <p:cNvSpPr txBox="1"/>
+          <p:nvPr/>
+        </p:nvSpPr>
+        <p:spPr>
+          <a:xfrm>
             <a:off x="548640" y="6446520"/>
             <a:ext cx="8229600" cy="274320"/>
           </a:xfrm>
@@ -10003,7 +10034,7 @@
       </p:sp>
       <p:sp>
         <p:nvSpPr>
-          <p:cNvPr id="5" name="TextBox 4"/>
+          <p:cNvPr id="6" name="TextBox 5"/>
           <p:cNvSpPr txBox="1"/>
           <p:nvPr/>
         </p:nvSpPr>
@@ -10036,16 +10067,40 @@
           </a:p>
         </p:txBody>
       </p:sp>
-      <p:sp>
-        <p:nvSpPr>
-          <p:cNvPr id="6" name="TextBox 5"/>
+      <p:pic>
+        <p:nvPicPr>
+          <p:cNvPr id="7" name="Picture 6" descr="fig_closure_extensions.png"/>
+          <p:cNvPicPr>
+            <a:picLocks noChangeAspect="1"/>
+          </p:cNvPicPr>
+          <p:nvPr/>
+        </p:nvPicPr>
+        <p:blipFill>
+          <a:blip r:embed="rId2"/>
+          <a:stretch>
+            <a:fillRect/>
+          </a:stretch>
+        </p:blipFill>
+        <p:spPr>
+          <a:xfrm>
+            <a:off x="411480" y="1600200"/>
+            <a:ext cx="6949440" cy="2541270"/>
+          </a:xfrm>
+          <a:prstGeom prst="rect">
+            <a:avLst/>
+          </a:prstGeom>
+        </p:spPr>
+      </p:pic>
+      <p:sp>
+        <p:nvSpPr>
+          <p:cNvPr id="8" name="TextBox 7"/>
           <p:cNvSpPr txBox="1"/>
           <p:nvPr/>
         </p:nvSpPr>
         <p:spPr>
           <a:xfrm>
-            <a:off x="548640" y="1280160"/>
-            <a:ext cx="5486400" cy="411480"/>
+            <a:off x="7589520" y="1645920"/>
+            <a:ext cx="4251960" cy="411480"/>
           </a:xfrm>
           <a:prstGeom prst="rect">
             <a:avLst/>
@@ -10060,27 +10115,27 @@
           <a:p>
             <a:pPr algn="l"/>
             <a:r>
-              <a:rPr sz="2100" b="1" i="0">
+              <a:rPr sz="1700" b="1" i="0">
                 <a:solidFill>
                   <a:srgbClr val="1F3864"/>
                 </a:solidFill>
                 <a:latin typeface="Calibri"/>
               </a:rPr>
-              <a:t>What worked</a:t>
-            </a:r>
-          </a:p>
-        </p:txBody>
-      </p:sp>
-      <p:sp>
-        <p:nvSpPr>
-          <p:cNvPr id="7" name="TextBox 6"/>
+              <a:t>What closure added</a:t>
+            </a:r>
+          </a:p>
+        </p:txBody>
+      </p:sp>
+      <p:sp>
+        <p:nvSpPr>
+          <p:cNvPr id="9" name="TextBox 8"/>
           <p:cNvSpPr txBox="1"/>
           <p:nvPr/>
         </p:nvSpPr>
         <p:spPr>
           <a:xfrm>
-            <a:off x="548640" y="1737360"/>
-            <a:ext cx="5486400" cy="4389120"/>
+            <a:off x="7589520" y="2103120"/>
+            <a:ext cx="4251960" cy="4023360"/>
           </a:xfrm>
           <a:prstGeom prst="rect">
             <a:avLst/>
@@ -10099,7 +10154,7 @@
               </a:spcAft>
             </a:pPr>
             <a:r>
-              <a:rPr sz="1900">
+              <a:rPr sz="1500">
                 <a:solidFill>
                   <a:srgbClr val="595959"/>
                 </a:solidFill>
@@ -10108,13 +10163,13 @@
               <a:t>•  </a:t>
             </a:r>
             <a:r>
-              <a:rPr sz="1900" b="0">
+              <a:rPr sz="1500" b="0">
                 <a:solidFill>
                   <a:srgbClr val="262626"/>
                 </a:solidFill>
                 <a:latin typeface="Calibri"/>
               </a:rPr>
-              <a:t>Warm start from a server pretrain: biggest single gain</a:t>
+              <a:t>Second pretrain seed: small negative shift (−0.10 pts)</a:t>
             </a:r>
           </a:p>
           <a:p>
@@ -10124,7 +10179,7 @@
               </a:spcAft>
             </a:pPr>
             <a:r>
-              <a:rPr sz="1900">
+              <a:rPr sz="1500">
                 <a:solidFill>
                   <a:srgbClr val="595959"/>
                 </a:solidFill>
@@ -10133,13 +10188,13 @@
               <a:t>•  </a:t>
             </a:r>
             <a:r>
-              <a:rPr sz="1900" b="0">
+              <a:rPr sz="1500" b="0">
                 <a:solidFill>
                   <a:srgbClr val="262626"/>
                 </a:solidFill>
                 <a:latin typeface="Calibri"/>
               </a:rPr>
-              <a:t>On-device fine-tuning: small, significant, cheap</a:t>
+              <a:t>Fine-tuning moving FL models: +3–6%</a:t>
             </a:r>
           </a:p>
           <a:p>
@@ -10149,7 +10204,7 @@
               </a:spcAft>
             </a:pPr>
             <a:r>
-              <a:rPr sz="1900">
+              <a:rPr sz="1500">
                 <a:solidFill>
                   <a:srgbClr val="595959"/>
                 </a:solidFill>
@@ -10158,13 +10213,13 @@
               <a:t>•  </a:t>
             </a:r>
             <a:r>
-              <a:rPr sz="1900" b="0">
+              <a:rPr sz="1500" b="0">
                 <a:solidFill>
                   <a:srgbClr val="262626"/>
                 </a:solidFill>
                 <a:latin typeface="Calibri"/>
               </a:rPr>
-              <a:t>INT8 / 8-bit uploads: free compression</a:t>
+              <a:t>Training-free baselines: best Markov chain 0.1366 (validation)</a:t>
             </a:r>
           </a:p>
           <a:p>
@@ -10174,7 +10229,7 @@
               </a:spcAft>
             </a:pPr>
             <a:r>
-              <a:rPr sz="1900">
+              <a:rPr sz="1500">
                 <a:solidFill>
                   <a:srgbClr val="595959"/>
                 </a:solidFill>
@@ -10183,13 +10238,13 @@
               <a:t>•  </a:t>
             </a:r>
             <a:r>
-              <a:rPr sz="1900" b="0">
+              <a:rPr sz="1500" b="0">
                 <a:solidFill>
                   <a:srgbClr val="262626"/>
                 </a:solidFill>
                 <a:latin typeface="Calibri"/>
               </a:rPr>
-              <a:t>Pre-registration: kept the main answer honest</a:t>
+              <a:t>Stopped or not run: DP-FTRL, canary restart, December replication</a:t>
             </a:r>
           </a:p>
           <a:p>
@@ -10199,7 +10254,7 @@
               </a:spcAft>
             </a:pPr>
             <a:r>
-              <a:rPr sz="1900">
+              <a:rPr sz="1500">
                 <a:solidFill>
                   <a:srgbClr val="595959"/>
                 </a:solidFill>
@@ -10208,196 +10263,13 @@
               <a:t>•  </a:t>
             </a:r>
             <a:r>
-              <a:rPr sz="1900" b="0">
+              <a:rPr sz="1500" b="0">
                 <a:solidFill>
                   <a:srgbClr val="262626"/>
                 </a:solidFill>
                 <a:latin typeface="Calibri"/>
               </a:rPr>
-              <a:t>Full-catalogue evaluation: comparable with published work</a:t>
-            </a:r>
-          </a:p>
-        </p:txBody>
-      </p:sp>
-      <p:sp>
-        <p:nvSpPr>
-          <p:cNvPr id="8" name="TextBox 7"/>
-          <p:cNvSpPr txBox="1"/>
-          <p:nvPr/>
-        </p:nvSpPr>
-        <p:spPr>
-          <a:xfrm>
-            <a:off x="6217920" y="1280160"/>
-            <a:ext cx="5440680" cy="411480"/>
-          </a:xfrm>
-          <a:prstGeom prst="rect">
-            <a:avLst/>
-          </a:prstGeom>
-          <a:noFill/>
-        </p:spPr>
-        <p:txBody>
-          <a:bodyPr wrap="square" anchor="t" lIns="45720" rIns="45720">
-            <a:spAutoFit/>
-          </a:bodyPr>
-          <a:lstStyle/>
-          <a:p>
-            <a:pPr algn="l"/>
-            <a:r>
-              <a:rPr sz="2100" b="1" i="0">
-                <a:solidFill>
-                  <a:srgbClr val="1F3864"/>
-                </a:solidFill>
-                <a:latin typeface="Calibri"/>
-              </a:rPr>
-              <a:t>What did not</a:t>
-            </a:r>
-          </a:p>
-        </p:txBody>
-      </p:sp>
-      <p:sp>
-        <p:nvSpPr>
-          <p:cNvPr id="9" name="TextBox 8"/>
-          <p:cNvSpPr txBox="1"/>
-          <p:nvPr/>
-        </p:nvSpPr>
-        <p:spPr>
-          <a:xfrm>
-            <a:off x="6217920" y="1737360"/>
-            <a:ext cx="5440680" cy="4389120"/>
-          </a:xfrm>
-          <a:prstGeom prst="rect">
-            <a:avLst/>
-          </a:prstGeom>
-          <a:noFill/>
-        </p:spPr>
-        <p:txBody>
-          <a:bodyPr wrap="square">
-            <a:spAutoFit/>
-          </a:bodyPr>
-          <a:lstStyle/>
-          <a:p>
-            <a:pPr>
-              <a:spcAft>
-                <a:spcPts val="700"/>
-              </a:spcAft>
-            </a:pPr>
-            <a:r>
-              <a:rPr sz="1900">
-                <a:solidFill>
-                  <a:srgbClr val="595959"/>
-                </a:solidFill>
-                <a:latin typeface="Calibri"/>
-              </a:rPr>
-              <a:t>•  </a:t>
-            </a:r>
-            <a:r>
-              <a:rPr sz="1900" b="0">
-                <a:solidFill>
-                  <a:srgbClr val="262626"/>
-                </a:solidFill>
-                <a:latin typeface="Calibri"/>
-              </a:rPr>
-              <a:t>A badly scaled τ froze FL — invisible in the protocol</a:t>
-            </a:r>
-          </a:p>
-          <a:p>
-            <a:pPr>
-              <a:spcAft>
-                <a:spcPts val="700"/>
-              </a:spcAft>
-            </a:pPr>
-            <a:r>
-              <a:rPr sz="1900">
-                <a:solidFill>
-                  <a:srgbClr val="595959"/>
-                </a:solidFill>
-                <a:latin typeface="Calibri"/>
-              </a:rPr>
-              <a:t>•  </a:t>
-            </a:r>
-            <a:r>
-              <a:rPr sz="1900" b="0">
-                <a:solidFill>
-                  <a:srgbClr val="262626"/>
-                </a:solidFill>
-                <a:latin typeface="Calibri"/>
-              </a:rPr>
-              <a:t>FL over a strong pretrain: no added value</a:t>
-            </a:r>
-          </a:p>
-          <a:p>
-            <a:pPr>
-              <a:spcAft>
-                <a:spcPts val="700"/>
-              </a:spcAft>
-            </a:pPr>
-            <a:r>
-              <a:rPr sz="1900">
-                <a:solidFill>
-                  <a:srgbClr val="595959"/>
-                </a:solidFill>
-                <a:latin typeface="Calibri"/>
-              </a:rPr>
-              <a:t>•  </a:t>
-            </a:r>
-            <a:r>
-              <a:rPr sz="1900" b="0">
-                <a:solidFill>
-                  <a:srgbClr val="262626"/>
-                </a:solidFill>
-                <a:latin typeface="Calibri"/>
-              </a:rPr>
-              <a:t>Device-only training: unusable</a:t>
-            </a:r>
-          </a:p>
-          <a:p>
-            <a:pPr>
-              <a:spcAft>
-                <a:spcPts val="700"/>
-              </a:spcAft>
-            </a:pPr>
-            <a:r>
-              <a:rPr sz="1900">
-                <a:solidFill>
-                  <a:srgbClr val="595959"/>
-                </a:solidFill>
-                <a:latin typeface="Calibri"/>
-              </a:rPr>
-              <a:t>•  </a:t>
-            </a:r>
-            <a:r>
-              <a:rPr sz="1900" b="0">
-                <a:solidFill>
-                  <a:srgbClr val="262626"/>
-                </a:solidFill>
-                <a:latin typeface="Calibri"/>
-              </a:rPr>
-              <a:t>Legacy DP randomness: no formal guarantee</a:t>
-            </a:r>
-          </a:p>
-          <a:p>
-            <a:pPr>
-              <a:spcAft>
-                <a:spcPts val="700"/>
-              </a:spcAft>
-            </a:pPr>
-            <a:r>
-              <a:rPr sz="1900">
-                <a:solidFill>
-                  <a:srgbClr val="595959"/>
-                </a:solidFill>
-                <a:latin typeface="Calibri"/>
-              </a:rPr>
-              <a:t>•  </a:t>
-            </a:r>
-            <a:r>
-              <a:rPr sz="1900" b="0">
-                <a:solidFill>
-                  <a:srgbClr val="262626"/>
-                </a:solidFill>
-                <a:latin typeface="Calibri"/>
-              </a:rPr>
-              <a:t>Several studies stopped for time (DP-FTRL, TEST2)</a:t>
+              <a:t>All results labelled; nothing re-scored</a:t>
             </a:r>
           </a:p>
         </p:txBody>
@@ -10450,7 +10322,7 @@
                 </a:solidFill>
                 <a:latin typeface="Calibri"/>
               </a:rPr>
-              <a:t>Conclusion and future work</a:t>
+              <a:t>What this means for a browser shopping assistant</a:t>
             </a:r>
           </a:p>
         </p:txBody>
@@ -10560,368 +10432,9 @@
           </a:p>
         </p:txBody>
       </p:sp>
-      <p:sp>
-        <p:nvSpPr>
-          <p:cNvPr id="6" name="TextBox 5"/>
-          <p:cNvSpPr txBox="1"/>
-          <p:nvPr/>
-        </p:nvSpPr>
-        <p:spPr>
-          <a:xfrm>
-            <a:off x="548640" y="1280160"/>
-            <a:ext cx="6400800" cy="411480"/>
-          </a:xfrm>
-          <a:prstGeom prst="rect">
-            <a:avLst/>
-          </a:prstGeom>
-          <a:noFill/>
-        </p:spPr>
-        <p:txBody>
-          <a:bodyPr wrap="square" anchor="t" lIns="45720" rIns="45720">
-            <a:spAutoFit/>
-          </a:bodyPr>
-          <a:lstStyle/>
-          <a:p>
-            <a:pPr algn="l"/>
-            <a:r>
-              <a:rPr sz="2100" b="1" i="0">
-                <a:solidFill>
-                  <a:srgbClr val="1F3864"/>
-                </a:solidFill>
-                <a:latin typeface="Calibri"/>
-              </a:rPr>
-              <a:t>Answer</a:t>
-            </a:r>
-          </a:p>
-        </p:txBody>
-      </p:sp>
-      <p:sp>
-        <p:nvSpPr>
-          <p:cNvPr id="7" name="TextBox 6"/>
-          <p:cNvSpPr txBox="1"/>
-          <p:nvPr/>
-        </p:nvSpPr>
-        <p:spPr>
-          <a:xfrm>
-            <a:off x="548640" y="1737360"/>
-            <a:ext cx="6400800" cy="4389120"/>
-          </a:xfrm>
-          <a:prstGeom prst="rect">
-            <a:avLst/>
-          </a:prstGeom>
-          <a:noFill/>
-        </p:spPr>
-        <p:txBody>
-          <a:bodyPr wrap="square">
-            <a:spAutoFit/>
-          </a:bodyPr>
-          <a:lstStyle/>
-          <a:p>
-            <a:pPr>
-              <a:spcAft>
-                <a:spcPts val="700"/>
-              </a:spcAft>
-            </a:pPr>
-            <a:r>
-              <a:rPr sz="1900">
-                <a:solidFill>
-                  <a:srgbClr val="595959"/>
-                </a:solidFill>
-                <a:latin typeface="Calibri"/>
-              </a:rPr>
-              <a:t>•  </a:t>
-            </a:r>
-            <a:r>
-              <a:rPr sz="1900" b="0">
-                <a:solidFill>
-                  <a:srgbClr val="262626"/>
-                </a:solidFill>
-                <a:latin typeface="Calibri"/>
-              </a:rPr>
-              <a:t>A warm-started on-device/federated system retains </a:t>
-            </a:r>
-            <a:r>
-              <a:rPr sz="1900" b="1">
-                <a:solidFill>
-                  <a:srgbClr val="262626"/>
-                </a:solidFill>
-                <a:latin typeface="Calibri"/>
-              </a:rPr>
-              <a:t>88.49%</a:t>
-            </a:r>
-            <a:r>
-              <a:rPr sz="1900" b="0">
-                <a:solidFill>
-                  <a:srgbClr val="262626"/>
-                </a:solidFill>
-                <a:latin typeface="Calibri"/>
-              </a:rPr>
-              <a:t> of the cloud model</a:t>
-            </a:r>
-          </a:p>
-          <a:p>
-            <a:pPr>
-              <a:spcAft>
-                <a:spcPts val="700"/>
-              </a:spcAft>
-            </a:pPr>
-            <a:r>
-              <a:rPr sz="1900">
-                <a:solidFill>
-                  <a:srgbClr val="595959"/>
-                </a:solidFill>
-                <a:latin typeface="Calibri"/>
-              </a:rPr>
-              <a:t>•  </a:t>
-            </a:r>
-            <a:r>
-              <a:rPr sz="1900" b="0">
-                <a:solidFill>
-                  <a:srgbClr val="262626"/>
-                </a:solidFill>
-                <a:latin typeface="Calibri"/>
-              </a:rPr>
-              <a:t>Whether federation pays off depends on the server-side pretrain and a correctly scaled optimiser</a:t>
-            </a:r>
-          </a:p>
-          <a:p>
-            <a:pPr>
-              <a:spcAft>
-                <a:spcPts val="700"/>
-              </a:spcAft>
-            </a:pPr>
-            <a:r>
-              <a:rPr sz="1900">
-                <a:solidFill>
-                  <a:srgbClr val="595959"/>
-                </a:solidFill>
-                <a:latin typeface="Calibri"/>
-              </a:rPr>
-              <a:t>•  </a:t>
-            </a:r>
-            <a:r>
-              <a:rPr sz="1900" b="0">
-                <a:solidFill>
-                  <a:srgbClr val="262626"/>
-                </a:solidFill>
-                <a:latin typeface="Calibri"/>
-              </a:rPr>
-              <a:t>Fine-tune on the device; federate when the server knows little</a:t>
-            </a:r>
-          </a:p>
-          <a:p>
-            <a:pPr>
-              <a:spcAft>
-                <a:spcPts val="700"/>
-              </a:spcAft>
-            </a:pPr>
-            <a:r>
-              <a:rPr sz="1900">
-                <a:solidFill>
-                  <a:srgbClr val="595959"/>
-                </a:solidFill>
-                <a:latin typeface="Calibri"/>
-              </a:rPr>
-              <a:t>•  </a:t>
-            </a:r>
-            <a:r>
-              <a:rPr sz="1900" b="0">
-                <a:solidFill>
-                  <a:srgbClr val="262626"/>
-                </a:solidFill>
-                <a:latin typeface="Calibri"/>
-              </a:rPr>
-              <a:t>Privacy must be engineered and audited, not assumed</a:t>
-            </a:r>
-          </a:p>
-        </p:txBody>
-      </p:sp>
-      <p:sp>
-        <p:nvSpPr>
-          <p:cNvPr id="8" name="TextBox 7"/>
-          <p:cNvSpPr txBox="1"/>
-          <p:nvPr/>
-        </p:nvSpPr>
-        <p:spPr>
-          <a:xfrm>
-            <a:off x="7132320" y="1280160"/>
-            <a:ext cx="4526280" cy="411480"/>
-          </a:xfrm>
-          <a:prstGeom prst="rect">
-            <a:avLst/>
-          </a:prstGeom>
-          <a:noFill/>
-        </p:spPr>
-        <p:txBody>
-          <a:bodyPr wrap="square" anchor="t" lIns="45720" rIns="45720">
-            <a:spAutoFit/>
-          </a:bodyPr>
-          <a:lstStyle/>
-          <a:p>
-            <a:pPr algn="l"/>
-            <a:r>
-              <a:rPr sz="2100" b="1" i="0">
-                <a:solidFill>
-                  <a:srgbClr val="1F3864"/>
-                </a:solidFill>
-                <a:latin typeface="Calibri"/>
-              </a:rPr>
-              <a:t>Future work</a:t>
-            </a:r>
-          </a:p>
-        </p:txBody>
-      </p:sp>
-      <p:sp>
-        <p:nvSpPr>
-          <p:cNvPr id="9" name="TextBox 8"/>
-          <p:cNvSpPr txBox="1"/>
-          <p:nvPr/>
-        </p:nvSpPr>
-        <p:spPr>
-          <a:xfrm>
-            <a:off x="7132320" y="1737360"/>
-            <a:ext cx="4526280" cy="4389120"/>
-          </a:xfrm>
-          <a:prstGeom prst="rect">
-            <a:avLst/>
-          </a:prstGeom>
-          <a:noFill/>
-        </p:spPr>
-        <p:txBody>
-          <a:bodyPr wrap="square">
-            <a:spAutoFit/>
-          </a:bodyPr>
-          <a:lstStyle/>
-          <a:p>
-            <a:pPr>
-              <a:spcAft>
-                <a:spcPts val="700"/>
-              </a:spcAft>
-            </a:pPr>
-            <a:r>
-              <a:rPr sz="1900">
-                <a:solidFill>
-                  <a:srgbClr val="595959"/>
-                </a:solidFill>
-                <a:latin typeface="Calibri"/>
-              </a:rPr>
-              <a:t>•  </a:t>
-            </a:r>
-            <a:r>
-              <a:rPr sz="1900" b="0">
-                <a:solidFill>
-                  <a:srgbClr val="262626"/>
-                </a:solidFill>
-                <a:latin typeface="Calibri"/>
-              </a:rPr>
-              <a:t>Distil a large teacher into the device model</a:t>
-            </a:r>
-          </a:p>
-          <a:p>
-            <a:pPr>
-              <a:spcAft>
-                <a:spcPts val="700"/>
-              </a:spcAft>
-            </a:pPr>
-            <a:r>
-              <a:rPr sz="1900">
-                <a:solidFill>
-                  <a:srgbClr val="595959"/>
-                </a:solidFill>
-                <a:latin typeface="Calibri"/>
-              </a:rPr>
-              <a:t>•  </a:t>
-            </a:r>
-            <a:r>
-              <a:rPr sz="1900" b="0">
-                <a:solidFill>
-                  <a:srgbClr val="262626"/>
-                </a:solidFill>
-                <a:latin typeface="Calibri"/>
-              </a:rPr>
-              <a:t>DP with secret randomness at full scale</a:t>
-            </a:r>
-          </a:p>
-          <a:p>
-            <a:pPr>
-              <a:spcAft>
-                <a:spcPts val="700"/>
-              </a:spcAft>
-            </a:pPr>
-            <a:r>
-              <a:rPr sz="1900">
-                <a:solidFill>
-                  <a:srgbClr val="595959"/>
-                </a:solidFill>
-                <a:latin typeface="Calibri"/>
-              </a:rPr>
-              <a:t>•  </a:t>
-            </a:r>
-            <a:r>
-              <a:rPr sz="1900" b="0">
-                <a:solidFill>
-                  <a:srgbClr val="262626"/>
-                </a:solidFill>
-                <a:latin typeface="Calibri"/>
-              </a:rPr>
-              <a:t>Real secure aggregation</a:t>
-            </a:r>
-          </a:p>
-          <a:p>
-            <a:pPr>
-              <a:spcAft>
-                <a:spcPts val="700"/>
-              </a:spcAft>
-            </a:pPr>
-            <a:r>
-              <a:rPr sz="1900">
-                <a:solidFill>
-                  <a:srgbClr val="595959"/>
-                </a:solidFill>
-                <a:latin typeface="Calibri"/>
-              </a:rPr>
-              <a:t>•  </a:t>
-            </a:r>
-            <a:r>
-              <a:rPr sz="1900" b="0">
-                <a:solidFill>
-                  <a:srgbClr val="262626"/>
-                </a:solidFill>
-                <a:latin typeface="Calibri"/>
-              </a:rPr>
-              <a:t>December-2019 replication (TEST2)</a:t>
-            </a:r>
-          </a:p>
-          <a:p>
-            <a:pPr>
-              <a:spcAft>
-                <a:spcPts val="700"/>
-              </a:spcAft>
-            </a:pPr>
-            <a:r>
-              <a:rPr sz="1900">
-                <a:solidFill>
-                  <a:srgbClr val="595959"/>
-                </a:solidFill>
-                <a:latin typeface="Calibri"/>
-              </a:rPr>
-              <a:t>•  </a:t>
-            </a:r>
-            <a:r>
-              <a:rPr sz="1900" b="0">
-                <a:solidFill>
-                  <a:srgbClr val="262626"/>
-                </a:solidFill>
-                <a:latin typeface="Calibri"/>
-              </a:rPr>
-              <a:t>Real-device field trial in Edge</a:t>
-            </a:r>
-          </a:p>
-        </p:txBody>
-      </p:sp>
       <p:pic>
         <p:nvPicPr>
-          <p:cNvPr id="10" name="Picture 9" descr="shopping_laptop_phone.jpg"/>
+          <p:cNvPr id="6" name="Picture 5" descr="d19_decision_guide.png"/>
           <p:cNvPicPr>
             <a:picLocks noChangeAspect="1"/>
           </p:cNvPicPr>
@@ -10935,49 +10448,14 @@
         </p:blipFill>
         <p:spPr>
           <a:xfrm>
-            <a:off x="7178040" y="4114800"/>
-            <a:ext cx="3291840" cy="2194560"/>
+            <a:off x="894973" y="1325880"/>
+            <a:ext cx="10371573" cy="5029200"/>
           </a:xfrm>
           <a:prstGeom prst="rect">
             <a:avLst/>
           </a:prstGeom>
         </p:spPr>
       </p:pic>
-      <p:sp>
-        <p:nvSpPr>
-          <p:cNvPr id="11" name="TextBox 10"/>
-          <p:cNvSpPr txBox="1"/>
-          <p:nvPr/>
-        </p:nvSpPr>
-        <p:spPr>
-          <a:xfrm>
-            <a:off x="7178040" y="6327648"/>
-            <a:ext cx="3291840" cy="274320"/>
-          </a:xfrm>
-          <a:prstGeom prst="rect">
-            <a:avLst/>
-          </a:prstGeom>
-          <a:noFill/>
-        </p:spPr>
-        <p:txBody>
-          <a:bodyPr wrap="square" anchor="t" lIns="45720" rIns="45720">
-            <a:spAutoFit/>
-          </a:bodyPr>
-          <a:lstStyle/>
-          <a:p>
-            <a:pPr algn="l"/>
-            <a:r>
-              <a:rPr sz="900" b="0" i="1">
-                <a:solidFill>
-                  <a:srgbClr val="595959"/>
-                </a:solidFill>
-                <a:latin typeface="Calibri"/>
-              </a:rPr>
-              <a:t>Photo: European Commission, CC BY 4.0, Wikimedia Commons</a:t>
-            </a:r>
-          </a:p>
-        </p:txBody>
-      </p:sp>
     </p:spTree>
   </p:cSld>
   <p:clrMapOvr>
@@ -10996,41 +10474,16 @@
         <p:nvPr/>
       </p:nvGrpSpPr>
       <p:grpSpPr/>
-      <p:pic>
-        <p:nvPicPr>
-          <p:cNvPr id="2" name="Picture 1" descr="grant_hall.jpg"/>
-          <p:cNvPicPr>
-            <a:picLocks noChangeAspect="1"/>
-          </p:cNvPicPr>
-          <p:nvPr/>
-        </p:nvPicPr>
-        <p:blipFill>
-          <a:blip r:embed="rId2"/>
-          <a:srcRect l="29876" r="13876"/>
-          <a:stretch>
-            <a:fillRect/>
-          </a:stretch>
-        </p:blipFill>
-        <p:spPr>
-          <a:xfrm>
-            <a:off x="0" y="0"/>
-            <a:ext cx="5120640" cy="6858000"/>
-          </a:xfrm>
-          <a:prstGeom prst="rect">
-            <a:avLst/>
-          </a:prstGeom>
-        </p:spPr>
-      </p:pic>
-      <p:sp>
-        <p:nvSpPr>
-          <p:cNvPr id="3" name="TextBox 2"/>
+      <p:sp>
+        <p:nvSpPr>
+          <p:cNvPr id="2" name="TextBox 1"/>
           <p:cNvSpPr txBox="1"/>
           <p:nvPr/>
         </p:nvSpPr>
         <p:spPr>
           <a:xfrm>
-            <a:off x="109728" y="6565392"/>
-            <a:ext cx="4937760" cy="274320"/>
+            <a:off x="502920" y="256032"/>
+            <a:ext cx="11155680" cy="685800"/>
           </a:xfrm>
           <a:prstGeom prst="rect">
             <a:avLst/>
@@ -11038,104 +10491,34 @@
           <a:noFill/>
         </p:spPr>
         <p:txBody>
-          <a:bodyPr wrap="square" anchor="t" lIns="45720" rIns="45720">
+          <a:bodyPr wrap="square" anchor="b" lIns="45720" rIns="45720">
             <a:spAutoFit/>
           </a:bodyPr>
           <a:lstStyle/>
           <a:p>
             <a:pPr algn="l"/>
             <a:r>
-              <a:rPr sz="800" b="0" i="1">
-                <a:solidFill>
-                  <a:srgbClr val="FFFFFF"/>
-                </a:solidFill>
-                <a:latin typeface="Calibri"/>
-              </a:rPr>
-              <a:t>Photo: Takipoint123, CC BY-SA 4.0, Wikimedia Commons</a:t>
-            </a:r>
-          </a:p>
-        </p:txBody>
-      </p:sp>
-      <p:sp>
-        <p:nvSpPr>
-          <p:cNvPr id="4" name="TextBox 3"/>
-          <p:cNvSpPr txBox="1"/>
-          <p:nvPr/>
-        </p:nvSpPr>
-        <p:spPr>
-          <a:xfrm>
-            <a:off x="5760720" y="2103120"/>
-            <a:ext cx="5943600" cy="914400"/>
-          </a:xfrm>
-          <a:prstGeom prst="rect">
-            <a:avLst/>
-          </a:prstGeom>
-          <a:noFill/>
-        </p:spPr>
-        <p:txBody>
-          <a:bodyPr wrap="square" anchor="t" lIns="45720" rIns="45720">
-            <a:spAutoFit/>
-          </a:bodyPr>
-          <a:lstStyle/>
-          <a:p>
-            <a:pPr algn="l"/>
-            <a:r>
-              <a:rPr sz="4800" b="1" i="0">
+              <a:rPr sz="3000" b="1" i="0">
                 <a:solidFill>
                   <a:srgbClr val="1F3864"/>
                 </a:solidFill>
                 <a:latin typeface="Calibri"/>
               </a:rPr>
-              <a:t>Thank you</a:t>
-            </a:r>
-          </a:p>
-        </p:txBody>
-      </p:sp>
-      <p:sp>
-        <p:nvSpPr>
-          <p:cNvPr id="5" name="TextBox 4"/>
-          <p:cNvSpPr txBox="1"/>
-          <p:nvPr/>
-        </p:nvSpPr>
-        <p:spPr>
-          <a:xfrm>
-            <a:off x="5760720" y="3017520"/>
-            <a:ext cx="5943600" cy="548640"/>
-          </a:xfrm>
-          <a:prstGeom prst="rect">
-            <a:avLst/>
-          </a:prstGeom>
-          <a:noFill/>
-        </p:spPr>
-        <p:txBody>
-          <a:bodyPr wrap="square" anchor="t" lIns="45720" rIns="45720">
-            <a:spAutoFit/>
-          </a:bodyPr>
-          <a:lstStyle/>
-          <a:p>
-            <a:pPr algn="l"/>
-            <a:r>
-              <a:rPr sz="2200" b="0" i="0">
-                <a:solidFill>
-                  <a:srgbClr val="595959"/>
-                </a:solidFill>
-                <a:latin typeface="Calibri"/>
-              </a:rPr>
-              <a:t>Questions and discussion</a:t>
+              <a:t>What we learned</a:t>
             </a:r>
           </a:p>
         </p:txBody>
       </p:sp>
       <p:cxnSp>
         <p:nvCxnSpPr>
-          <p:cNvPr id="6" name="Connector 5"/>
+          <p:cNvPr id="3" name="Connector 2"/>
           <p:cNvCxnSpPr/>
           <p:nvPr/>
         </p:nvCxnSpPr>
         <p:spPr>
           <a:xfrm>
-            <a:off x="5806440" y="3840480"/>
-            <a:ext cx="5669280" cy="0"/>
+            <a:off x="548640" y="1005840"/>
+            <a:ext cx="11094415" cy="0"/>
           </a:xfrm>
           <a:prstGeom prst="line">
             <a:avLst/>
@@ -11163,14 +10546,84 @@
       </p:cxnSp>
       <p:sp>
         <p:nvSpPr>
-          <p:cNvPr id="7" name="TextBox 6"/>
+          <p:cNvPr id="4" name="TextBox 3"/>
           <p:cNvSpPr txBox="1"/>
           <p:nvPr/>
         </p:nvSpPr>
         <p:spPr>
           <a:xfrm>
-            <a:off x="5760720" y="4023360"/>
-            <a:ext cx="6035040" cy="1280160"/>
+            <a:off x="548640" y="6446520"/>
+            <a:ext cx="8229600" cy="274320"/>
+          </a:xfrm>
+          <a:prstGeom prst="rect">
+            <a:avLst/>
+          </a:prstGeom>
+          <a:noFill/>
+        </p:spPr>
+        <p:txBody>
+          <a:bodyPr wrap="square" anchor="ctr" lIns="45720" rIns="45720">
+            <a:spAutoFit/>
+          </a:bodyPr>
+          <a:lstStyle/>
+          <a:p>
+            <a:pPr algn="l"/>
+            <a:r>
+              <a:rPr sz="1000" b="0" i="0">
+                <a:solidFill>
+                  <a:srgbClr val="595959"/>
+                </a:solidFill>
+                <a:latin typeface="Calibri"/>
+              </a:rPr>
+              <a:t>Privacy-Preserving Shopping Intelligence  |  MSc Final Presentation, Queen's University</a:t>
+            </a:r>
+          </a:p>
+        </p:txBody>
+      </p:sp>
+      <p:sp>
+        <p:nvSpPr>
+          <p:cNvPr id="5" name="TextBox 4"/>
+          <p:cNvSpPr txBox="1"/>
+          <p:nvPr/>
+        </p:nvSpPr>
+        <p:spPr>
+          <a:xfrm>
+            <a:off x="10728655" y="6446520"/>
+            <a:ext cx="914400" cy="274320"/>
+          </a:xfrm>
+          <a:prstGeom prst="rect">
+            <a:avLst/>
+          </a:prstGeom>
+          <a:noFill/>
+        </p:spPr>
+        <p:txBody>
+          <a:bodyPr wrap="square" anchor="ctr" lIns="45720" rIns="45720">
+            <a:spAutoFit/>
+          </a:bodyPr>
+          <a:lstStyle/>
+          <a:p>
+            <a:pPr algn="r"/>
+            <a:r>
+              <a:rPr sz="1100" b="0" i="0">
+                <a:solidFill>
+                  <a:srgbClr val="595959"/>
+                </a:solidFill>
+                <a:latin typeface="Calibri"/>
+              </a:rPr>
+              <a:t>22</a:t>
+            </a:r>
+          </a:p>
+        </p:txBody>
+      </p:sp>
+      <p:sp>
+        <p:nvSpPr>
+          <p:cNvPr id="6" name="TextBox 5"/>
+          <p:cNvSpPr txBox="1"/>
+          <p:nvPr/>
+        </p:nvSpPr>
+        <p:spPr>
+          <a:xfrm>
+            <a:off x="548640" y="1280160"/>
+            <a:ext cx="5486400" cy="411480"/>
           </a:xfrm>
           <a:prstGeom prst="rect">
             <a:avLst/>
@@ -11185,13 +10638,1138 @@
           <a:p>
             <a:pPr algn="l"/>
             <a:r>
+              <a:rPr sz="2100" b="1" i="0">
+                <a:solidFill>
+                  <a:srgbClr val="1F3864"/>
+                </a:solidFill>
+                <a:latin typeface="Calibri"/>
+              </a:rPr>
+              <a:t>What worked</a:t>
+            </a:r>
+          </a:p>
+        </p:txBody>
+      </p:sp>
+      <p:sp>
+        <p:nvSpPr>
+          <p:cNvPr id="7" name="TextBox 6"/>
+          <p:cNvSpPr txBox="1"/>
+          <p:nvPr/>
+        </p:nvSpPr>
+        <p:spPr>
+          <a:xfrm>
+            <a:off x="548640" y="1737360"/>
+            <a:ext cx="5486400" cy="4389120"/>
+          </a:xfrm>
+          <a:prstGeom prst="rect">
+            <a:avLst/>
+          </a:prstGeom>
+          <a:noFill/>
+        </p:spPr>
+        <p:txBody>
+          <a:bodyPr wrap="square">
+            <a:spAutoFit/>
+          </a:bodyPr>
+          <a:lstStyle/>
+          <a:p>
+            <a:pPr>
+              <a:spcAft>
+                <a:spcPts val="700"/>
+              </a:spcAft>
+            </a:pPr>
+            <a:r>
+              <a:rPr sz="1900">
+                <a:solidFill>
+                  <a:srgbClr val="595959"/>
+                </a:solidFill>
+                <a:latin typeface="Calibri"/>
+              </a:rPr>
+              <a:t>•  </a:t>
+            </a:r>
+            <a:r>
+              <a:rPr sz="1900" b="0">
+                <a:solidFill>
+                  <a:srgbClr val="262626"/>
+                </a:solidFill>
+                <a:latin typeface="Calibri"/>
+              </a:rPr>
+              <a:t>Warm start from a server pretrain: the biggest single gain</a:t>
+            </a:r>
+          </a:p>
+          <a:p>
+            <a:pPr>
+              <a:spcAft>
+                <a:spcPts val="700"/>
+              </a:spcAft>
+            </a:pPr>
+            <a:r>
+              <a:rPr sz="1900">
+                <a:solidFill>
+                  <a:srgbClr val="595959"/>
+                </a:solidFill>
+                <a:latin typeface="Calibri"/>
+              </a:rPr>
+              <a:t>•  </a:t>
+            </a:r>
+            <a:r>
+              <a:rPr sz="1900" b="0">
+                <a:solidFill>
+                  <a:srgbClr val="262626"/>
+                </a:solidFill>
+                <a:latin typeface="Calibri"/>
+              </a:rPr>
+              <a:t>On-device fine-tuning: small, significant, cheap</a:t>
+            </a:r>
+          </a:p>
+          <a:p>
+            <a:pPr>
+              <a:spcAft>
+                <a:spcPts val="700"/>
+              </a:spcAft>
+            </a:pPr>
+            <a:r>
+              <a:rPr sz="1900">
+                <a:solidFill>
+                  <a:srgbClr val="595959"/>
+                </a:solidFill>
+                <a:latin typeface="Calibri"/>
+              </a:rPr>
+              <a:t>•  </a:t>
+            </a:r>
+            <a:r>
+              <a:rPr sz="1900" b="0">
+                <a:solidFill>
+                  <a:srgbClr val="262626"/>
+                </a:solidFill>
+                <a:latin typeface="Calibri"/>
+              </a:rPr>
+              <a:t>INT8 and 8-bit uploads: free compression</a:t>
+            </a:r>
+          </a:p>
+          <a:p>
+            <a:pPr>
+              <a:spcAft>
+                <a:spcPts val="700"/>
+              </a:spcAft>
+            </a:pPr>
+            <a:r>
+              <a:rPr sz="1900">
+                <a:solidFill>
+                  <a:srgbClr val="595959"/>
+                </a:solidFill>
+                <a:latin typeface="Calibri"/>
+              </a:rPr>
+              <a:t>•  </a:t>
+            </a:r>
+            <a:r>
+              <a:rPr sz="1900" b="0">
+                <a:solidFill>
+                  <a:srgbClr val="262626"/>
+                </a:solidFill>
+                <a:latin typeface="Calibri"/>
+              </a:rPr>
+              <a:t>Pre-registration kept the main answer honest</a:t>
+            </a:r>
+          </a:p>
+          <a:p>
+            <a:pPr>
+              <a:spcAft>
+                <a:spcPts val="700"/>
+              </a:spcAft>
+            </a:pPr>
+            <a:r>
+              <a:rPr sz="1900">
+                <a:solidFill>
+                  <a:srgbClr val="595959"/>
+                </a:solidFill>
+                <a:latin typeface="Calibri"/>
+              </a:rPr>
+              <a:t>•  </a:t>
+            </a:r>
+            <a:r>
+              <a:rPr sz="1900" b="0">
+                <a:solidFill>
+                  <a:srgbClr val="262626"/>
+                </a:solidFill>
+                <a:latin typeface="Calibri"/>
+              </a:rPr>
+              <a:t>Full-catalogue evaluation: comparable with published work</a:t>
+            </a:r>
+          </a:p>
+        </p:txBody>
+      </p:sp>
+      <p:sp>
+        <p:nvSpPr>
+          <p:cNvPr id="8" name="TextBox 7"/>
+          <p:cNvSpPr txBox="1"/>
+          <p:nvPr/>
+        </p:nvSpPr>
+        <p:spPr>
+          <a:xfrm>
+            <a:off x="6217920" y="1280160"/>
+            <a:ext cx="5440680" cy="411480"/>
+          </a:xfrm>
+          <a:prstGeom prst="rect">
+            <a:avLst/>
+          </a:prstGeom>
+          <a:noFill/>
+        </p:spPr>
+        <p:txBody>
+          <a:bodyPr wrap="square" anchor="t" lIns="45720" rIns="45720">
+            <a:spAutoFit/>
+          </a:bodyPr>
+          <a:lstStyle/>
+          <a:p>
+            <a:pPr algn="l"/>
+            <a:r>
+              <a:rPr sz="2100" b="1" i="0">
+                <a:solidFill>
+                  <a:srgbClr val="1F3864"/>
+                </a:solidFill>
+                <a:latin typeface="Calibri"/>
+              </a:rPr>
+              <a:t>What did not</a:t>
+            </a:r>
+          </a:p>
+        </p:txBody>
+      </p:sp>
+      <p:sp>
+        <p:nvSpPr>
+          <p:cNvPr id="9" name="TextBox 8"/>
+          <p:cNvSpPr txBox="1"/>
+          <p:nvPr/>
+        </p:nvSpPr>
+        <p:spPr>
+          <a:xfrm>
+            <a:off x="6217920" y="1737360"/>
+            <a:ext cx="5440680" cy="4389120"/>
+          </a:xfrm>
+          <a:prstGeom prst="rect">
+            <a:avLst/>
+          </a:prstGeom>
+          <a:noFill/>
+        </p:spPr>
+        <p:txBody>
+          <a:bodyPr wrap="square">
+            <a:spAutoFit/>
+          </a:bodyPr>
+          <a:lstStyle/>
+          <a:p>
+            <a:pPr>
+              <a:spcAft>
+                <a:spcPts val="700"/>
+              </a:spcAft>
+            </a:pPr>
+            <a:r>
+              <a:rPr sz="1900">
+                <a:solidFill>
+                  <a:srgbClr val="595959"/>
+                </a:solidFill>
+                <a:latin typeface="Calibri"/>
+              </a:rPr>
+              <a:t>•  </a:t>
+            </a:r>
+            <a:r>
+              <a:rPr sz="1900" b="0">
+                <a:solidFill>
+                  <a:srgbClr val="262626"/>
+                </a:solidFill>
+                <a:latin typeface="Calibri"/>
+              </a:rPr>
+              <a:t>A badly scaled τ froze FL, invisible to the protocol</a:t>
+            </a:r>
+          </a:p>
+          <a:p>
+            <a:pPr>
+              <a:spcAft>
+                <a:spcPts val="700"/>
+              </a:spcAft>
+            </a:pPr>
+            <a:r>
+              <a:rPr sz="1900">
+                <a:solidFill>
+                  <a:srgbClr val="595959"/>
+                </a:solidFill>
+                <a:latin typeface="Calibri"/>
+              </a:rPr>
+              <a:t>•  </a:t>
+            </a:r>
+            <a:r>
+              <a:rPr sz="1900" b="0">
+                <a:solidFill>
+                  <a:srgbClr val="262626"/>
+                </a:solidFill>
+                <a:latin typeface="Calibri"/>
+              </a:rPr>
+              <a:t>Federation over a strong pretrain: no added value</a:t>
+            </a:r>
+          </a:p>
+          <a:p>
+            <a:pPr>
+              <a:spcAft>
+                <a:spcPts val="700"/>
+              </a:spcAft>
+            </a:pPr>
+            <a:r>
+              <a:rPr sz="1900">
+                <a:solidFill>
+                  <a:srgbClr val="595959"/>
+                </a:solidFill>
+                <a:latin typeface="Calibri"/>
+              </a:rPr>
+              <a:t>•  </a:t>
+            </a:r>
+            <a:r>
+              <a:rPr sz="1900" b="0">
+                <a:solidFill>
+                  <a:srgbClr val="262626"/>
+                </a:solidFill>
+                <a:latin typeface="Calibri"/>
+              </a:rPr>
+              <a:t>Device-only training: unusable</a:t>
+            </a:r>
+          </a:p>
+          <a:p>
+            <a:pPr>
+              <a:spcAft>
+                <a:spcPts val="700"/>
+              </a:spcAft>
+            </a:pPr>
+            <a:r>
+              <a:rPr sz="1900">
+                <a:solidFill>
+                  <a:srgbClr val="595959"/>
+                </a:solidFill>
+                <a:latin typeface="Calibri"/>
+              </a:rPr>
+              <a:t>•  </a:t>
+            </a:r>
+            <a:r>
+              <a:rPr sz="1900" b="0">
+                <a:solidFill>
+                  <a:srgbClr val="262626"/>
+                </a:solidFill>
+                <a:latin typeface="Calibri"/>
+              </a:rPr>
+              <a:t>Legacy DP randomness: no formal guarantee</a:t>
+            </a:r>
+          </a:p>
+          <a:p>
+            <a:pPr>
+              <a:spcAft>
+                <a:spcPts val="700"/>
+              </a:spcAft>
+            </a:pPr>
+            <a:r>
+              <a:rPr sz="1900">
+                <a:solidFill>
+                  <a:srgbClr val="595959"/>
+                </a:solidFill>
+                <a:latin typeface="Calibri"/>
+              </a:rPr>
+              <a:t>•  </a:t>
+            </a:r>
+            <a:r>
+              <a:rPr sz="1900" b="0">
+                <a:solidFill>
+                  <a:srgbClr val="262626"/>
+                </a:solidFill>
+                <a:latin typeface="Calibri"/>
+              </a:rPr>
+              <a:t>Some studies stopped for time (DP-FTRL, December replication)</a:t>
+            </a:r>
+          </a:p>
+        </p:txBody>
+      </p:sp>
+    </p:spTree>
+  </p:cSld>
+  <p:clrMapOvr>
+    <a:masterClrMapping/>
+  </p:clrMapOvr>
+</p:sld>
+</file>
+
+<file path=ppt/slides/slide23.xml><?xml version="1.0" encoding="utf-8"?>
+<p:sld xmlns:a="http://schemas.openxmlformats.org/drawingml/2006/main" xmlns:p="http://schemas.openxmlformats.org/presentationml/2006/main" xmlns:r="http://schemas.openxmlformats.org/officeDocument/2006/relationships">
+  <p:cSld>
+    <p:spTree>
+      <p:nvGrpSpPr>
+        <p:cNvPr id="1" name=""/>
+        <p:cNvGrpSpPr/>
+        <p:nvPr/>
+      </p:nvGrpSpPr>
+      <p:grpSpPr/>
+      <p:sp>
+        <p:nvSpPr>
+          <p:cNvPr id="2" name="TextBox 1"/>
+          <p:cNvSpPr txBox="1"/>
+          <p:nvPr/>
+        </p:nvSpPr>
+        <p:spPr>
+          <a:xfrm>
+            <a:off x="502920" y="256032"/>
+            <a:ext cx="11155680" cy="685800"/>
+          </a:xfrm>
+          <a:prstGeom prst="rect">
+            <a:avLst/>
+          </a:prstGeom>
+          <a:noFill/>
+        </p:spPr>
+        <p:txBody>
+          <a:bodyPr wrap="square" anchor="b" lIns="45720" rIns="45720">
+            <a:spAutoFit/>
+          </a:bodyPr>
+          <a:lstStyle/>
+          <a:p>
+            <a:pPr algn="l"/>
+            <a:r>
+              <a:rPr sz="3000" b="1" i="0">
+                <a:solidFill>
+                  <a:srgbClr val="1F3864"/>
+                </a:solidFill>
+                <a:latin typeface="Calibri"/>
+              </a:rPr>
+              <a:t>Conclusion and future work</a:t>
+            </a:r>
+          </a:p>
+        </p:txBody>
+      </p:sp>
+      <p:cxnSp>
+        <p:nvCxnSpPr>
+          <p:cNvPr id="3" name="Connector 2"/>
+          <p:cNvCxnSpPr/>
+          <p:nvPr/>
+        </p:nvCxnSpPr>
+        <p:spPr>
+          <a:xfrm>
+            <a:off x="548640" y="1005840"/>
+            <a:ext cx="11094415" cy="0"/>
+          </a:xfrm>
+          <a:prstGeom prst="line">
+            <a:avLst/>
+          </a:prstGeom>
+          <a:ln w="12700">
+            <a:solidFill>
+              <a:srgbClr val="BFBFBF"/>
+            </a:solidFill>
+          </a:ln>
+        </p:spPr>
+        <p:style>
+          <a:lnRef idx="2">
+            <a:schemeClr val="accent1"/>
+          </a:lnRef>
+          <a:fillRef idx="0">
+            <a:schemeClr val="accent1"/>
+          </a:fillRef>
+          <a:effectRef idx="1">
+            <a:schemeClr val="accent1"/>
+          </a:effectRef>
+          <a:fontRef idx="minor">
+            <a:schemeClr val="tx1"/>
+          </a:fontRef>
+        </p:style>
+      </p:cxnSp>
+      <p:sp>
+        <p:nvSpPr>
+          <p:cNvPr id="4" name="TextBox 3"/>
+          <p:cNvSpPr txBox="1"/>
+          <p:nvPr/>
+        </p:nvSpPr>
+        <p:spPr>
+          <a:xfrm>
+            <a:off x="548640" y="6446520"/>
+            <a:ext cx="8229600" cy="274320"/>
+          </a:xfrm>
+          <a:prstGeom prst="rect">
+            <a:avLst/>
+          </a:prstGeom>
+          <a:noFill/>
+        </p:spPr>
+        <p:txBody>
+          <a:bodyPr wrap="square" anchor="ctr" lIns="45720" rIns="45720">
+            <a:spAutoFit/>
+          </a:bodyPr>
+          <a:lstStyle/>
+          <a:p>
+            <a:pPr algn="l"/>
+            <a:r>
+              <a:rPr sz="1000" b="0" i="0">
+                <a:solidFill>
+                  <a:srgbClr val="595959"/>
+                </a:solidFill>
+                <a:latin typeface="Calibri"/>
+              </a:rPr>
+              <a:t>Privacy-Preserving Shopping Intelligence  |  MSc Final Presentation, Queen's University</a:t>
+            </a:r>
+          </a:p>
+        </p:txBody>
+      </p:sp>
+      <p:sp>
+        <p:nvSpPr>
+          <p:cNvPr id="5" name="TextBox 4"/>
+          <p:cNvSpPr txBox="1"/>
+          <p:nvPr/>
+        </p:nvSpPr>
+        <p:spPr>
+          <a:xfrm>
+            <a:off x="10728655" y="6446520"/>
+            <a:ext cx="914400" cy="274320"/>
+          </a:xfrm>
+          <a:prstGeom prst="rect">
+            <a:avLst/>
+          </a:prstGeom>
+          <a:noFill/>
+        </p:spPr>
+        <p:txBody>
+          <a:bodyPr wrap="square" anchor="ctr" lIns="45720" rIns="45720">
+            <a:spAutoFit/>
+          </a:bodyPr>
+          <a:lstStyle/>
+          <a:p>
+            <a:pPr algn="r"/>
+            <a:r>
+              <a:rPr sz="1100" b="0" i="0">
+                <a:solidFill>
+                  <a:srgbClr val="595959"/>
+                </a:solidFill>
+                <a:latin typeface="Calibri"/>
+              </a:rPr>
+              <a:t>23</a:t>
+            </a:r>
+          </a:p>
+        </p:txBody>
+      </p:sp>
+      <p:sp>
+        <p:nvSpPr>
+          <p:cNvPr id="6" name="TextBox 5"/>
+          <p:cNvSpPr txBox="1"/>
+          <p:nvPr/>
+        </p:nvSpPr>
+        <p:spPr>
+          <a:xfrm>
+            <a:off x="548640" y="1280160"/>
+            <a:ext cx="6400800" cy="411480"/>
+          </a:xfrm>
+          <a:prstGeom prst="rect">
+            <a:avLst/>
+          </a:prstGeom>
+          <a:noFill/>
+        </p:spPr>
+        <p:txBody>
+          <a:bodyPr wrap="square" anchor="t" lIns="45720" rIns="45720">
+            <a:spAutoFit/>
+          </a:bodyPr>
+          <a:lstStyle/>
+          <a:p>
+            <a:pPr algn="l"/>
+            <a:r>
+              <a:rPr sz="2100" b="1" i="0">
+                <a:solidFill>
+                  <a:srgbClr val="1F3864"/>
+                </a:solidFill>
+                <a:latin typeface="Calibri"/>
+              </a:rPr>
+              <a:t>Answer</a:t>
+            </a:r>
+          </a:p>
+        </p:txBody>
+      </p:sp>
+      <p:sp>
+        <p:nvSpPr>
+          <p:cNvPr id="7" name="TextBox 6"/>
+          <p:cNvSpPr txBox="1"/>
+          <p:nvPr/>
+        </p:nvSpPr>
+        <p:spPr>
+          <a:xfrm>
+            <a:off x="548640" y="1737360"/>
+            <a:ext cx="6400800" cy="4389120"/>
+          </a:xfrm>
+          <a:prstGeom prst="rect">
+            <a:avLst/>
+          </a:prstGeom>
+          <a:noFill/>
+        </p:spPr>
+        <p:txBody>
+          <a:bodyPr wrap="square">
+            <a:spAutoFit/>
+          </a:bodyPr>
+          <a:lstStyle/>
+          <a:p>
+            <a:pPr>
+              <a:spcAft>
+                <a:spcPts val="700"/>
+              </a:spcAft>
+            </a:pPr>
+            <a:r>
+              <a:rPr sz="1900">
+                <a:solidFill>
+                  <a:srgbClr val="595959"/>
+                </a:solidFill>
+                <a:latin typeface="Calibri"/>
+              </a:rPr>
+              <a:t>•  </a:t>
+            </a:r>
+            <a:r>
+              <a:rPr sz="1900" b="0">
+                <a:solidFill>
+                  <a:srgbClr val="262626"/>
+                </a:solidFill>
+                <a:latin typeface="Calibri"/>
+              </a:rPr>
+              <a:t>A warm-started on-device or federated system keeps </a:t>
+            </a:r>
+            <a:r>
+              <a:rPr sz="1900" b="1">
+                <a:solidFill>
+                  <a:srgbClr val="262626"/>
+                </a:solidFill>
+                <a:latin typeface="Calibri"/>
+              </a:rPr>
+              <a:t>88.49%</a:t>
+            </a:r>
+            <a:r>
+              <a:rPr sz="1900" b="0">
+                <a:solidFill>
+                  <a:srgbClr val="262626"/>
+                </a:solidFill>
+                <a:latin typeface="Calibri"/>
+              </a:rPr>
+              <a:t> of the cloud model</a:t>
+            </a:r>
+          </a:p>
+          <a:p>
+            <a:pPr>
+              <a:spcAft>
+                <a:spcPts val="700"/>
+              </a:spcAft>
+            </a:pPr>
+            <a:r>
+              <a:rPr sz="1900">
+                <a:solidFill>
+                  <a:srgbClr val="595959"/>
+                </a:solidFill>
+                <a:latin typeface="Calibri"/>
+              </a:rPr>
+              <a:t>•  </a:t>
+            </a:r>
+            <a:r>
+              <a:rPr sz="1900" b="0">
+                <a:solidFill>
+                  <a:srgbClr val="262626"/>
+                </a:solidFill>
+                <a:latin typeface="Calibri"/>
+              </a:rPr>
+              <a:t>Whether federation pays off depends on the server-side pretrain and a correctly scaled optimizer</a:t>
+            </a:r>
+          </a:p>
+          <a:p>
+            <a:pPr>
+              <a:spcAft>
+                <a:spcPts val="700"/>
+              </a:spcAft>
+            </a:pPr>
+            <a:r>
+              <a:rPr sz="1900">
+                <a:solidFill>
+                  <a:srgbClr val="595959"/>
+                </a:solidFill>
+                <a:latin typeface="Calibri"/>
+              </a:rPr>
+              <a:t>•  </a:t>
+            </a:r>
+            <a:r>
+              <a:rPr sz="1900" b="0">
+                <a:solidFill>
+                  <a:srgbClr val="262626"/>
+                </a:solidFill>
+                <a:latin typeface="Calibri"/>
+              </a:rPr>
+              <a:t>Fine-tune on the device; federate when the server knows little</a:t>
+            </a:r>
+          </a:p>
+          <a:p>
+            <a:pPr>
+              <a:spcAft>
+                <a:spcPts val="700"/>
+              </a:spcAft>
+            </a:pPr>
+            <a:r>
+              <a:rPr sz="1900">
+                <a:solidFill>
+                  <a:srgbClr val="595959"/>
+                </a:solidFill>
+                <a:latin typeface="Calibri"/>
+              </a:rPr>
+              <a:t>•  </a:t>
+            </a:r>
+            <a:r>
+              <a:rPr sz="1900" b="0">
+                <a:solidFill>
+                  <a:srgbClr val="262626"/>
+                </a:solidFill>
+                <a:latin typeface="Calibri"/>
+              </a:rPr>
+              <a:t>Privacy must be engineered and audited, not assumed</a:t>
+            </a:r>
+          </a:p>
+        </p:txBody>
+      </p:sp>
+      <p:sp>
+        <p:nvSpPr>
+          <p:cNvPr id="8" name="TextBox 7"/>
+          <p:cNvSpPr txBox="1"/>
+          <p:nvPr/>
+        </p:nvSpPr>
+        <p:spPr>
+          <a:xfrm>
+            <a:off x="7132320" y="1280160"/>
+            <a:ext cx="4526280" cy="411480"/>
+          </a:xfrm>
+          <a:prstGeom prst="rect">
+            <a:avLst/>
+          </a:prstGeom>
+          <a:noFill/>
+        </p:spPr>
+        <p:txBody>
+          <a:bodyPr wrap="square" anchor="t" lIns="45720" rIns="45720">
+            <a:spAutoFit/>
+          </a:bodyPr>
+          <a:lstStyle/>
+          <a:p>
+            <a:pPr algn="l"/>
+            <a:r>
+              <a:rPr sz="2100" b="1" i="0">
+                <a:solidFill>
+                  <a:srgbClr val="1F3864"/>
+                </a:solidFill>
+                <a:latin typeface="Calibri"/>
+              </a:rPr>
+              <a:t>Future work</a:t>
+            </a:r>
+          </a:p>
+        </p:txBody>
+      </p:sp>
+      <p:sp>
+        <p:nvSpPr>
+          <p:cNvPr id="9" name="TextBox 8"/>
+          <p:cNvSpPr txBox="1"/>
+          <p:nvPr/>
+        </p:nvSpPr>
+        <p:spPr>
+          <a:xfrm>
+            <a:off x="7132320" y="1737360"/>
+            <a:ext cx="4526280" cy="4389120"/>
+          </a:xfrm>
+          <a:prstGeom prst="rect">
+            <a:avLst/>
+          </a:prstGeom>
+          <a:noFill/>
+        </p:spPr>
+        <p:txBody>
+          <a:bodyPr wrap="square">
+            <a:spAutoFit/>
+          </a:bodyPr>
+          <a:lstStyle/>
+          <a:p>
+            <a:pPr>
+              <a:spcAft>
+                <a:spcPts val="700"/>
+              </a:spcAft>
+            </a:pPr>
+            <a:r>
+              <a:rPr sz="1900">
+                <a:solidFill>
+                  <a:srgbClr val="595959"/>
+                </a:solidFill>
+                <a:latin typeface="Calibri"/>
+              </a:rPr>
+              <a:t>•  </a:t>
+            </a:r>
+            <a:r>
+              <a:rPr sz="1900" b="0">
+                <a:solidFill>
+                  <a:srgbClr val="262626"/>
+                </a:solidFill>
+                <a:latin typeface="Calibri"/>
+              </a:rPr>
+              <a:t>Distil a large teacher into the device model</a:t>
+            </a:r>
+          </a:p>
+          <a:p>
+            <a:pPr>
+              <a:spcAft>
+                <a:spcPts val="700"/>
+              </a:spcAft>
+            </a:pPr>
+            <a:r>
+              <a:rPr sz="1900">
+                <a:solidFill>
+                  <a:srgbClr val="595959"/>
+                </a:solidFill>
+                <a:latin typeface="Calibri"/>
+              </a:rPr>
+              <a:t>•  </a:t>
+            </a:r>
+            <a:r>
+              <a:rPr sz="1900" b="0">
+                <a:solidFill>
+                  <a:srgbClr val="262626"/>
+                </a:solidFill>
+                <a:latin typeface="Calibri"/>
+              </a:rPr>
+              <a:t>DP with secret randomness at full scale</a:t>
+            </a:r>
+          </a:p>
+          <a:p>
+            <a:pPr>
+              <a:spcAft>
+                <a:spcPts val="700"/>
+              </a:spcAft>
+            </a:pPr>
+            <a:r>
+              <a:rPr sz="1900">
+                <a:solidFill>
+                  <a:srgbClr val="595959"/>
+                </a:solidFill>
+                <a:latin typeface="Calibri"/>
+              </a:rPr>
+              <a:t>•  </a:t>
+            </a:r>
+            <a:r>
+              <a:rPr sz="1900" b="0">
+                <a:solidFill>
+                  <a:srgbClr val="262626"/>
+                </a:solidFill>
+                <a:latin typeface="Calibri"/>
+              </a:rPr>
+              <a:t>Real secure aggregation</a:t>
+            </a:r>
+          </a:p>
+          <a:p>
+            <a:pPr>
+              <a:spcAft>
+                <a:spcPts val="700"/>
+              </a:spcAft>
+            </a:pPr>
+            <a:r>
+              <a:rPr sz="1900">
+                <a:solidFill>
+                  <a:srgbClr val="595959"/>
+                </a:solidFill>
+                <a:latin typeface="Calibri"/>
+              </a:rPr>
+              <a:t>•  </a:t>
+            </a:r>
+            <a:r>
+              <a:rPr sz="1900" b="0">
+                <a:solidFill>
+                  <a:srgbClr val="262626"/>
+                </a:solidFill>
+                <a:latin typeface="Calibri"/>
+              </a:rPr>
+              <a:t>Replication on December 2019 data</a:t>
+            </a:r>
+          </a:p>
+          <a:p>
+            <a:pPr>
+              <a:spcAft>
+                <a:spcPts val="700"/>
+              </a:spcAft>
+            </a:pPr>
+            <a:r>
+              <a:rPr sz="1900">
+                <a:solidFill>
+                  <a:srgbClr val="595959"/>
+                </a:solidFill>
+                <a:latin typeface="Calibri"/>
+              </a:rPr>
+              <a:t>•  </a:t>
+            </a:r>
+            <a:r>
+              <a:rPr sz="1900" b="0">
+                <a:solidFill>
+                  <a:srgbClr val="262626"/>
+                </a:solidFill>
+                <a:latin typeface="Calibri"/>
+              </a:rPr>
+              <a:t>A field trial in the browser</a:t>
+            </a:r>
+          </a:p>
+        </p:txBody>
+      </p:sp>
+      <p:pic>
+        <p:nvPicPr>
+          <p:cNvPr id="10" name="Picture 9" descr="shopping_laptop_phone.jpg"/>
+          <p:cNvPicPr>
+            <a:picLocks noChangeAspect="1"/>
+          </p:cNvPicPr>
+          <p:nvPr/>
+        </p:nvPicPr>
+        <p:blipFill>
+          <a:blip r:embed="rId2"/>
+          <a:stretch>
+            <a:fillRect/>
+          </a:stretch>
+        </p:blipFill>
+        <p:spPr>
+          <a:xfrm>
+            <a:off x="7178040" y="4114800"/>
+            <a:ext cx="3291840" cy="2194560"/>
+          </a:xfrm>
+          <a:prstGeom prst="rect">
+            <a:avLst/>
+          </a:prstGeom>
+        </p:spPr>
+      </p:pic>
+      <p:sp>
+        <p:nvSpPr>
+          <p:cNvPr id="11" name="TextBox 10"/>
+          <p:cNvSpPr txBox="1"/>
+          <p:nvPr/>
+        </p:nvSpPr>
+        <p:spPr>
+          <a:xfrm>
+            <a:off x="7178040" y="6327648"/>
+            <a:ext cx="3291840" cy="274320"/>
+          </a:xfrm>
+          <a:prstGeom prst="rect">
+            <a:avLst/>
+          </a:prstGeom>
+          <a:noFill/>
+        </p:spPr>
+        <p:txBody>
+          <a:bodyPr wrap="square" anchor="t" lIns="45720" rIns="45720">
+            <a:spAutoFit/>
+          </a:bodyPr>
+          <a:lstStyle/>
+          <a:p>
+            <a:pPr algn="l"/>
+            <a:r>
+              <a:rPr sz="900" b="0" i="1">
+                <a:solidFill>
+                  <a:srgbClr val="595959"/>
+                </a:solidFill>
+                <a:latin typeface="Calibri"/>
+              </a:rPr>
+              <a:t>Photo: European Commission, CC BY 4.0, Wikimedia Commons</a:t>
+            </a:r>
+          </a:p>
+        </p:txBody>
+      </p:sp>
+    </p:spTree>
+  </p:cSld>
+  <p:clrMapOvr>
+    <a:masterClrMapping/>
+  </p:clrMapOvr>
+</p:sld>
+</file>
+
+<file path=ppt/slides/slide24.xml><?xml version="1.0" encoding="utf-8"?>
+<p:sld xmlns:a="http://schemas.openxmlformats.org/drawingml/2006/main" xmlns:p="http://schemas.openxmlformats.org/presentationml/2006/main" xmlns:r="http://schemas.openxmlformats.org/officeDocument/2006/relationships">
+  <p:cSld>
+    <p:spTree>
+      <p:nvGrpSpPr>
+        <p:cNvPr id="1" name=""/>
+        <p:cNvGrpSpPr/>
+        <p:nvPr/>
+      </p:nvGrpSpPr>
+      <p:grpSpPr/>
+      <p:pic>
+        <p:nvPicPr>
+          <p:cNvPr id="2" name="Picture 1" descr="grant_hall.jpg"/>
+          <p:cNvPicPr>
+            <a:picLocks noChangeAspect="1"/>
+          </p:cNvPicPr>
+          <p:nvPr/>
+        </p:nvPicPr>
+        <p:blipFill>
+          <a:blip r:embed="rId2"/>
+          <a:srcRect l="29876" r="13876"/>
+          <a:stretch>
+            <a:fillRect/>
+          </a:stretch>
+        </p:blipFill>
+        <p:spPr>
+          <a:xfrm>
+            <a:off x="0" y="0"/>
+            <a:ext cx="5120640" cy="6858000"/>
+          </a:xfrm>
+          <a:prstGeom prst="rect">
+            <a:avLst/>
+          </a:prstGeom>
+        </p:spPr>
+      </p:pic>
+      <p:sp>
+        <p:nvSpPr>
+          <p:cNvPr id="3" name="TextBox 2"/>
+          <p:cNvSpPr txBox="1"/>
+          <p:nvPr/>
+        </p:nvSpPr>
+        <p:spPr>
+          <a:xfrm>
+            <a:off x="109728" y="6565392"/>
+            <a:ext cx="4937760" cy="274320"/>
+          </a:xfrm>
+          <a:prstGeom prst="rect">
+            <a:avLst/>
+          </a:prstGeom>
+          <a:noFill/>
+        </p:spPr>
+        <p:txBody>
+          <a:bodyPr wrap="square" anchor="t" lIns="45720" rIns="45720">
+            <a:spAutoFit/>
+          </a:bodyPr>
+          <a:lstStyle/>
+          <a:p>
+            <a:pPr algn="l"/>
+            <a:r>
+              <a:rPr sz="800" b="0" i="1">
+                <a:solidFill>
+                  <a:srgbClr val="FFFFFF"/>
+                </a:solidFill>
+                <a:latin typeface="Calibri"/>
+              </a:rPr>
+              <a:t>Photo: Takipoint123, CC BY-SA 4.0, Wikimedia Commons</a:t>
+            </a:r>
+          </a:p>
+        </p:txBody>
+      </p:sp>
+      <p:sp>
+        <p:nvSpPr>
+          <p:cNvPr id="4" name="TextBox 3"/>
+          <p:cNvSpPr txBox="1"/>
+          <p:nvPr/>
+        </p:nvSpPr>
+        <p:spPr>
+          <a:xfrm>
+            <a:off x="5760720" y="2103120"/>
+            <a:ext cx="5943600" cy="914400"/>
+          </a:xfrm>
+          <a:prstGeom prst="rect">
+            <a:avLst/>
+          </a:prstGeom>
+          <a:noFill/>
+        </p:spPr>
+        <p:txBody>
+          <a:bodyPr wrap="square" anchor="t" lIns="45720" rIns="45720">
+            <a:spAutoFit/>
+          </a:bodyPr>
+          <a:lstStyle/>
+          <a:p>
+            <a:pPr algn="l"/>
+            <a:r>
+              <a:rPr sz="4800" b="1" i="0">
+                <a:solidFill>
+                  <a:srgbClr val="1F3864"/>
+                </a:solidFill>
+                <a:latin typeface="Calibri"/>
+              </a:rPr>
+              <a:t>Thank you</a:t>
+            </a:r>
+          </a:p>
+        </p:txBody>
+      </p:sp>
+      <p:sp>
+        <p:nvSpPr>
+          <p:cNvPr id="5" name="TextBox 4"/>
+          <p:cNvSpPr txBox="1"/>
+          <p:nvPr/>
+        </p:nvSpPr>
+        <p:spPr>
+          <a:xfrm>
+            <a:off x="5760720" y="3017520"/>
+            <a:ext cx="5943600" cy="548640"/>
+          </a:xfrm>
+          <a:prstGeom prst="rect">
+            <a:avLst/>
+          </a:prstGeom>
+          <a:noFill/>
+        </p:spPr>
+        <p:txBody>
+          <a:bodyPr wrap="square" anchor="t" lIns="45720" rIns="45720">
+            <a:spAutoFit/>
+          </a:bodyPr>
+          <a:lstStyle/>
+          <a:p>
+            <a:pPr algn="l"/>
+            <a:r>
+              <a:rPr sz="2200" b="0" i="0">
+                <a:solidFill>
+                  <a:srgbClr val="595959"/>
+                </a:solidFill>
+                <a:latin typeface="Calibri"/>
+              </a:rPr>
+              <a:t>Questions and discussion</a:t>
+            </a:r>
+          </a:p>
+        </p:txBody>
+      </p:sp>
+      <p:cxnSp>
+        <p:nvCxnSpPr>
+          <p:cNvPr id="6" name="Connector 5"/>
+          <p:cNvCxnSpPr/>
+          <p:nvPr/>
+        </p:nvCxnSpPr>
+        <p:spPr>
+          <a:xfrm>
+            <a:off x="5806440" y="3840480"/>
+            <a:ext cx="5669280" cy="0"/>
+          </a:xfrm>
+          <a:prstGeom prst="line">
+            <a:avLst/>
+          </a:prstGeom>
+          <a:ln w="12700">
+            <a:solidFill>
+              <a:srgbClr val="BFBFBF"/>
+            </a:solidFill>
+          </a:ln>
+        </p:spPr>
+        <p:style>
+          <a:lnRef idx="2">
+            <a:schemeClr val="accent1"/>
+          </a:lnRef>
+          <a:fillRef idx="0">
+            <a:schemeClr val="accent1"/>
+          </a:fillRef>
+          <a:effectRef idx="1">
+            <a:schemeClr val="accent1"/>
+          </a:effectRef>
+          <a:fontRef idx="minor">
+            <a:schemeClr val="tx1"/>
+          </a:fontRef>
+        </p:style>
+      </p:cxnSp>
+      <p:sp>
+        <p:nvSpPr>
+          <p:cNvPr id="7" name="TextBox 6"/>
+          <p:cNvSpPr txBox="1"/>
+          <p:nvPr/>
+        </p:nvSpPr>
+        <p:spPr>
+          <a:xfrm>
+            <a:off x="5760720" y="4023360"/>
+            <a:ext cx="6035040" cy="1463040"/>
+          </a:xfrm>
+          <a:prstGeom prst="rect">
+            <a:avLst/>
+          </a:prstGeom>
+          <a:noFill/>
+        </p:spPr>
+        <p:txBody>
+          <a:bodyPr wrap="square" anchor="t" lIns="45720" rIns="45720">
+            <a:spAutoFit/>
+          </a:bodyPr>
+          <a:lstStyle/>
+          <a:p>
+            <a:pPr algn="l"/>
+            <a:r>
               <a:rPr sz="1500" b="0" i="0">
                 <a:solidFill>
                   <a:srgbClr val="262626"/>
                 </a:solidFill>
                 <a:latin typeface="Calibri"/>
               </a:rPr>
-              <a:t>Digilians 2026, Group 8, Queen's University</a:t>
+              <a:t>Code, results and checkpoints:</a:t>
             </a:r>
           </a:p>
           <a:p>
@@ -11203,7 +11781,7 @@
                 </a:solidFill>
                 <a:latin typeface="Calibri"/>
               </a:rPr>
-              <a:t>Code: github.com/microsoftproject26/</a:t>
+              <a:t>github.com/microsoftproject26/</a:t>
             </a:r>
           </a:p>
           <a:p>
@@ -11268,7 +11846,7 @@
                 </a:solidFill>
                 <a:latin typeface="Calibri"/>
               </a:rPr>
-              <a:t>Three ways to deploy a shopping recommender</a:t>
+              <a:t>Three ways to build a shopping recommender</a:t>
             </a:r>
           </a:p>
         </p:txBody>
@@ -11338,7 +11916,7 @@
                 </a:solidFill>
                 <a:latin typeface="Calibri"/>
               </a:rPr>
-              <a:t>Every comparison in this project is between these three architectures</a:t>
+              <a:t>Every result is expressed as retention of the cloud reference</a:t>
             </a:r>
           </a:p>
         </p:txBody>
@@ -11429,8 +12007,8 @@
         </p:blipFill>
         <p:spPr>
           <a:xfrm>
-            <a:off x="822960" y="1737360"/>
-            <a:ext cx="10515600" cy="3585045"/>
+            <a:off x="548640" y="2000163"/>
+            <a:ext cx="11064240" cy="3772073"/>
           </a:xfrm>
           <a:prstGeom prst="rect">
             <a:avLst/>
@@ -11485,7 +12063,7 @@
                 </a:solidFill>
                 <a:latin typeface="Calibri"/>
               </a:rPr>
-              <a:t>How we built a rigorous answer</a:t>
+              <a:t>The project at a glance</a:t>
             </a:r>
           </a:p>
         </p:txBody>
@@ -11533,6 +12111,41 @@
         </p:nvSpPr>
         <p:spPr>
           <a:xfrm>
+            <a:off x="502920" y="1060704"/>
+            <a:ext cx="11155680" cy="457200"/>
+          </a:xfrm>
+          <a:prstGeom prst="rect">
+            <a:avLst/>
+          </a:prstGeom>
+          <a:noFill/>
+        </p:spPr>
+        <p:txBody>
+          <a:bodyPr wrap="square" anchor="t" lIns="45720" rIns="45720">
+            <a:spAutoFit/>
+          </a:bodyPr>
+          <a:lstStyle/>
+          <a:p>
+            <a:pPr algn="l"/>
+            <a:r>
+              <a:rPr sz="1600" b="0" i="1">
+                <a:solidFill>
+                  <a:srgbClr val="595959"/>
+                </a:solidFill>
+                <a:latin typeface="Calibri"/>
+              </a:rPr>
+              <a:t>Each stage answered a question raised by the previous one</a:t>
+            </a:r>
+          </a:p>
+        </p:txBody>
+      </p:sp>
+      <p:sp>
+        <p:nvSpPr>
+          <p:cNvPr id="5" name="TextBox 4"/>
+          <p:cNvSpPr txBox="1"/>
+          <p:nvPr/>
+        </p:nvSpPr>
+        <p:spPr>
+          <a:xfrm>
             <a:off x="548640" y="6446520"/>
             <a:ext cx="8229600" cy="274320"/>
           </a:xfrm>
@@ -11562,7 +12175,7 @@
       </p:sp>
       <p:sp>
         <p:nvSpPr>
-          <p:cNvPr id="5" name="TextBox 4"/>
+          <p:cNvPr id="6" name="TextBox 5"/>
           <p:cNvSpPr txBox="1"/>
           <p:nvPr/>
         </p:nvSpPr>
@@ -11597,7 +12210,7 @@
       </p:sp>
       <p:pic>
         <p:nvPicPr>
-          <p:cNvPr id="6" name="Picture 5" descr="d4_populations.png"/>
+          <p:cNvPr id="7" name="Picture 6" descr="d17_project_stages.png"/>
           <p:cNvPicPr>
             <a:picLocks noChangeAspect="1"/>
           </p:cNvPicPr>
@@ -11611,294 +12224,14 @@
         </p:blipFill>
         <p:spPr>
           <a:xfrm>
-            <a:off x="365760" y="1234440"/>
-            <a:ext cx="6949440" cy="2590200"/>
+            <a:off x="457200" y="2575729"/>
+            <a:ext cx="11247120" cy="2529502"/>
           </a:xfrm>
           <a:prstGeom prst="rect">
             <a:avLst/>
           </a:prstGeom>
         </p:spPr>
       </p:pic>
-      <p:sp>
-        <p:nvSpPr>
-          <p:cNvPr id="7" name="TextBox 6"/>
-          <p:cNvSpPr txBox="1"/>
-          <p:nvPr/>
-        </p:nvSpPr>
-        <p:spPr>
-          <a:xfrm>
-            <a:off x="7543800" y="1280160"/>
-            <a:ext cx="4297680" cy="411480"/>
-          </a:xfrm>
-          <a:prstGeom prst="rect">
-            <a:avLst/>
-          </a:prstGeom>
-          <a:noFill/>
-        </p:spPr>
-        <p:txBody>
-          <a:bodyPr wrap="square" anchor="t" lIns="45720" rIns="45720">
-            <a:spAutoFit/>
-          </a:bodyPr>
-          <a:lstStyle/>
-          <a:p>
-            <a:pPr algn="l"/>
-            <a:r>
-              <a:rPr sz="1700" b="1" i="0">
-                <a:solidFill>
-                  <a:srgbClr val="1F3864"/>
-                </a:solidFill>
-                <a:latin typeface="Calibri"/>
-              </a:rPr>
-              <a:t>Design choices</a:t>
-            </a:r>
-          </a:p>
-        </p:txBody>
-      </p:sp>
-      <p:sp>
-        <p:nvSpPr>
-          <p:cNvPr id="8" name="TextBox 7"/>
-          <p:cNvSpPr txBox="1"/>
-          <p:nvPr/>
-        </p:nvSpPr>
-        <p:spPr>
-          <a:xfrm>
-            <a:off x="7543800" y="1737360"/>
-            <a:ext cx="4297680" cy="4343400"/>
-          </a:xfrm>
-          <a:prstGeom prst="rect">
-            <a:avLst/>
-          </a:prstGeom>
-          <a:noFill/>
-        </p:spPr>
-        <p:txBody>
-          <a:bodyPr wrap="square">
-            <a:spAutoFit/>
-          </a:bodyPr>
-          <a:lstStyle/>
-          <a:p>
-            <a:pPr>
-              <a:spcAft>
-                <a:spcPts val="700"/>
-              </a:spcAft>
-            </a:pPr>
-            <a:r>
-              <a:rPr sz="1500">
-                <a:solidFill>
-                  <a:srgbClr val="595959"/>
-                </a:solidFill>
-                <a:latin typeface="Calibri"/>
-              </a:rPr>
-              <a:t>•  </a:t>
-            </a:r>
-            <a:r>
-              <a:rPr sz="1500" b="0">
-                <a:solidFill>
-                  <a:srgbClr val="262626"/>
-                </a:solidFill>
-                <a:latin typeface="Calibri"/>
-              </a:rPr>
-              <a:t>REES46 e-commerce log, Oct–Nov 2019</a:t>
-            </a:r>
-          </a:p>
-          <a:p>
-            <a:pPr>
-              <a:spcAft>
-                <a:spcPts val="700"/>
-              </a:spcAft>
-            </a:pPr>
-            <a:r>
-              <a:rPr sz="1500">
-                <a:solidFill>
-                  <a:srgbClr val="595959"/>
-                </a:solidFill>
-                <a:latin typeface="Calibri"/>
-              </a:rPr>
-              <a:t>•  </a:t>
-            </a:r>
-            <a:r>
-              <a:rPr sz="1500" b="0">
-                <a:solidFill>
-                  <a:srgbClr val="262626"/>
-                </a:solidFill>
-                <a:latin typeface="Calibri"/>
-              </a:rPr>
-              <a:t>Rank the </a:t>
-            </a:r>
-            <a:r>
-              <a:rPr sz="1500" b="1">
-                <a:solidFill>
-                  <a:srgbClr val="262626"/>
-                </a:solidFill>
-                <a:latin typeface="Calibri"/>
-              </a:rPr>
-              <a:t>full catalogue</a:t>
-            </a:r>
-            <a:r>
-              <a:rPr sz="1500" b="0">
-                <a:solidFill>
-                  <a:srgbClr val="262626"/>
-                </a:solidFill>
-                <a:latin typeface="Calibri"/>
-              </a:rPr>
-              <a:t> (158,486 products) — no sampled negatives</a:t>
-            </a:r>
-          </a:p>
-          <a:p>
-            <a:pPr>
-              <a:spcAft>
-                <a:spcPts val="700"/>
-              </a:spcAft>
-            </a:pPr>
-            <a:r>
-              <a:rPr sz="1500">
-                <a:solidFill>
-                  <a:srgbClr val="595959"/>
-                </a:solidFill>
-                <a:latin typeface="Calibri"/>
-              </a:rPr>
-              <a:t>•  </a:t>
-            </a:r>
-            <a:r>
-              <a:rPr sz="1500" b="0">
-                <a:solidFill>
-                  <a:srgbClr val="262626"/>
-                </a:solidFill>
-                <a:latin typeface="Calibri"/>
-              </a:rPr>
-              <a:t>Client-macro </a:t>
-            </a:r>
-            <a:r>
-              <a:rPr sz="1500" b="1">
-                <a:solidFill>
-                  <a:srgbClr val="262626"/>
-                </a:solidFill>
-                <a:latin typeface="Calibri"/>
-              </a:rPr>
-              <a:t>MRR@20</a:t>
-            </a:r>
-            <a:r>
-              <a:rPr sz="1500" b="0">
-                <a:solidFill>
-                  <a:srgbClr val="262626"/>
-                </a:solidFill>
-                <a:latin typeface="Calibri"/>
-              </a:rPr>
-              <a:t>; retention = model / cloud reference</a:t>
-            </a:r>
-          </a:p>
-          <a:p>
-            <a:pPr>
-              <a:spcAft>
-                <a:spcPts val="700"/>
-              </a:spcAft>
-            </a:pPr>
-            <a:r>
-              <a:rPr sz="1500">
-                <a:solidFill>
-                  <a:srgbClr val="595959"/>
-                </a:solidFill>
-                <a:latin typeface="Calibri"/>
-              </a:rPr>
-              <a:t>•  </a:t>
-            </a:r>
-            <a:r>
-              <a:rPr sz="1500" b="0">
-                <a:solidFill>
-                  <a:srgbClr val="262626"/>
-                </a:solidFill>
-                <a:latin typeface="Calibri"/>
-              </a:rPr>
-              <a:t>SASRec: device d=64 (20.7M) · cloud d=256 (83.9M)</a:t>
-            </a:r>
-          </a:p>
-          <a:p>
-            <a:pPr>
-              <a:spcAft>
-                <a:spcPts val="700"/>
-              </a:spcAft>
-            </a:pPr>
-            <a:r>
-              <a:rPr sz="1500">
-                <a:solidFill>
-                  <a:srgbClr val="595959"/>
-                </a:solidFill>
-                <a:latin typeface="Calibri"/>
-              </a:rPr>
-              <a:t>•  </a:t>
-            </a:r>
-            <a:r>
-              <a:rPr sz="1500" b="0">
-                <a:solidFill>
-                  <a:srgbClr val="262626"/>
-                </a:solidFill>
-                <a:latin typeface="Calibri"/>
-              </a:rPr>
-              <a:t/>
-            </a:r>
-            <a:r>
-              <a:rPr sz="1500" b="1">
-                <a:solidFill>
-                  <a:srgbClr val="262626"/>
-                </a:solidFill>
-                <a:latin typeface="Calibri"/>
-              </a:rPr>
-              <a:t>Pre-registered</a:t>
-            </a:r>
-            <a:r>
-              <a:rPr sz="1500" b="0">
-                <a:solidFill>
-                  <a:srgbClr val="262626"/>
-                </a:solidFill>
-                <a:latin typeface="Calibri"/>
-              </a:rPr>
-              <a:t>: every decision locked before </a:t>
-            </a:r>
-            <a:r>
-              <a:rPr sz="1500" b="1">
-                <a:solidFill>
-                  <a:srgbClr val="262626"/>
-                </a:solidFill>
-                <a:latin typeface="Calibri"/>
-              </a:rPr>
-              <a:t>one</a:t>
-            </a:r>
-            <a:r>
-              <a:rPr sz="1500" b="0">
-                <a:solidFill>
-                  <a:srgbClr val="262626"/>
-                </a:solidFill>
-                <a:latin typeface="Calibri"/>
-              </a:rPr>
-              <a:t> TEST look</a:t>
-            </a:r>
-          </a:p>
-          <a:p>
-            <a:pPr>
-              <a:spcAft>
-                <a:spcPts val="700"/>
-              </a:spcAft>
-            </a:pPr>
-            <a:r>
-              <a:rPr sz="1500">
-                <a:solidFill>
-                  <a:srgbClr val="595959"/>
-                </a:solidFill>
-                <a:latin typeface="Calibri"/>
-              </a:rPr>
-              <a:t>•  </a:t>
-            </a:r>
-            <a:r>
-              <a:rPr sz="1500" b="0">
-                <a:solidFill>
-                  <a:srgbClr val="262626"/>
-                </a:solidFill>
-                <a:latin typeface="Calibri"/>
-              </a:rPr>
-              <a:t>6 public benchmarks as a second check</a:t>
-            </a:r>
-          </a:p>
-        </p:txBody>
-      </p:sp>
     </p:spTree>
   </p:cSld>
   <p:clrMapOvr>
@@ -12017,7 +12350,7 @@
                 </a:solidFill>
                 <a:latin typeface="Calibri"/>
               </a:rPr>
-              <a:t>REES46, October 2019 month, as plotted by our data-audit notebook</a:t>
+              <a:t>REES46, October 2019, as plotted by our data-audit notebook</a:t>
             </a:r>
           </a:p>
         </p:txBody>
@@ -12376,7 +12709,7 @@
                 </a:solidFill>
                 <a:latin typeface="Calibri"/>
               </a:rPr>
-              <a:t>The research journey: 14 phases in five months</a:t>
+              <a:t>From the raw log to the frozen dataset</a:t>
             </a:r>
           </a:p>
         </p:txBody>
@@ -12446,7 +12779,7 @@
                 </a:solidFill>
                 <a:latin typeface="Calibri"/>
               </a:rPr>
-              <a:t>From the proposal to the final consolidation</a:t>
+              <a:t>Oct–Nov 2019 · full catalogue of 158,486 products · one frozen, hashed dataset</a:t>
             </a:r>
           </a:p>
         </p:txBody>
@@ -12523,7 +12856,7 @@
       </p:sp>
       <p:pic>
         <p:nvPicPr>
-          <p:cNvPr id="7" name="Picture 6" descr="d6_journey.png"/>
+          <p:cNvPr id="7" name="Picture 6" descr="d9_data_pipeline.png"/>
           <p:cNvPicPr>
             <a:picLocks noChangeAspect="1"/>
           </p:cNvPicPr>
@@ -12537,8 +12870,8 @@
         </p:blipFill>
         <p:spPr>
           <a:xfrm>
-            <a:off x="320040" y="1828800"/>
-            <a:ext cx="11521440" cy="1975293"/>
+            <a:off x="457200" y="1802464"/>
+            <a:ext cx="7589520" cy="4258912"/>
           </a:xfrm>
           <a:prstGeom prst="rect">
             <a:avLst/>
@@ -12553,8 +12886,8 @@
         </p:nvSpPr>
         <p:spPr>
           <a:xfrm>
-            <a:off x="548640" y="5120640"/>
-            <a:ext cx="11064240" cy="1097280"/>
+            <a:off x="8321040" y="1737360"/>
+            <a:ext cx="3474720" cy="411480"/>
           </a:xfrm>
           <a:prstGeom prst="rect">
             <a:avLst/>
@@ -12569,13 +12902,172 @@
           <a:p>
             <a:pPr algn="l"/>
             <a:r>
-              <a:rPr sz="1600" b="0" i="1">
+              <a:rPr sz="1600" b="1" i="0">
+                <a:solidFill>
+                  <a:srgbClr val="1F3864"/>
+                </a:solidFill>
+                <a:latin typeface="Calibri"/>
+              </a:rPr>
+              <a:t>Design choices</a:t>
+            </a:r>
+          </a:p>
+        </p:txBody>
+      </p:sp>
+      <p:sp>
+        <p:nvSpPr>
+          <p:cNvPr id="9" name="TextBox 8"/>
+          <p:cNvSpPr txBox="1"/>
+          <p:nvPr/>
+        </p:nvSpPr>
+        <p:spPr>
+          <a:xfrm>
+            <a:off x="8321040" y="2194560"/>
+            <a:ext cx="3474720" cy="3886200"/>
+          </a:xfrm>
+          <a:prstGeom prst="rect">
+            <a:avLst/>
+          </a:prstGeom>
+          <a:noFill/>
+        </p:spPr>
+        <p:txBody>
+          <a:bodyPr wrap="square">
+            <a:spAutoFit/>
+          </a:bodyPr>
+          <a:lstStyle/>
+          <a:p>
+            <a:pPr>
+              <a:spcAft>
+                <a:spcPts val="700"/>
+              </a:spcAft>
+            </a:pPr>
+            <a:r>
+              <a:rPr sz="1400">
                 <a:solidFill>
                   <a:srgbClr val="595959"/>
                 </a:solidFill>
                 <a:latin typeface="Calibri"/>
               </a:rPr>
-              <a:t>Each phase answered a question raised by the previous one: prototype → stronger backbone → tuned federated recipe → sealed confirmatory test → diagnosis of why federation added nothing → fixed recipe, privacy and device studies → closure.</a:t>
+              <a:t>•  </a:t>
+            </a:r>
+            <a:r>
+              <a:rPr sz="1400" b="0">
+                <a:solidFill>
+                  <a:srgbClr val="262626"/>
+                </a:solidFill>
+                <a:latin typeface="Calibri"/>
+              </a:rPr>
+              <a:t>Rank the </a:t>
+            </a:r>
+            <a:r>
+              <a:rPr sz="1400" b="1">
+                <a:solidFill>
+                  <a:srgbClr val="262626"/>
+                </a:solidFill>
+                <a:latin typeface="Calibri"/>
+              </a:rPr>
+              <a:t>full catalogue</a:t>
+            </a:r>
+            <a:r>
+              <a:rPr sz="1400" b="0">
+                <a:solidFill>
+                  <a:srgbClr val="262626"/>
+                </a:solidFill>
+                <a:latin typeface="Calibri"/>
+              </a:rPr>
+              <a:t>, no sampled negatives</a:t>
+            </a:r>
+          </a:p>
+          <a:p>
+            <a:pPr>
+              <a:spcAft>
+                <a:spcPts val="700"/>
+              </a:spcAft>
+            </a:pPr>
+            <a:r>
+              <a:rPr sz="1400">
+                <a:solidFill>
+                  <a:srgbClr val="595959"/>
+                </a:solidFill>
+                <a:latin typeface="Calibri"/>
+              </a:rPr>
+              <a:t>•  </a:t>
+            </a:r>
+            <a:r>
+              <a:rPr sz="1400" b="0">
+                <a:solidFill>
+                  <a:srgbClr val="262626"/>
+                </a:solidFill>
+                <a:latin typeface="Calibri"/>
+              </a:rPr>
+              <a:t>Three disjoint populations: server band, devices, sealed TEST</a:t>
+            </a:r>
+          </a:p>
+          <a:p>
+            <a:pPr>
+              <a:spcAft>
+                <a:spcPts val="700"/>
+              </a:spcAft>
+            </a:pPr>
+            <a:r>
+              <a:rPr sz="1400">
+                <a:solidFill>
+                  <a:srgbClr val="595959"/>
+                </a:solidFill>
+                <a:latin typeface="Calibri"/>
+              </a:rPr>
+              <a:t>•  </a:t>
+            </a:r>
+            <a:r>
+              <a:rPr sz="1400" b="0">
+                <a:solidFill>
+                  <a:srgbClr val="262626"/>
+                </a:solidFill>
+                <a:latin typeface="Calibri"/>
+              </a:rPr>
+              <a:t>SASRec: device d=64 (20.7M) · cloud d=256 (83.9M)</a:t>
+            </a:r>
+          </a:p>
+          <a:p>
+            <a:pPr>
+              <a:spcAft>
+                <a:spcPts val="700"/>
+              </a:spcAft>
+            </a:pPr>
+            <a:r>
+              <a:rPr sz="1400">
+                <a:solidFill>
+                  <a:srgbClr val="595959"/>
+                </a:solidFill>
+                <a:latin typeface="Calibri"/>
+              </a:rPr>
+              <a:t>•  </a:t>
+            </a:r>
+            <a:r>
+              <a:rPr sz="1400" b="0">
+                <a:solidFill>
+                  <a:srgbClr val="262626"/>
+                </a:solidFill>
+                <a:latin typeface="Calibri"/>
+              </a:rPr>
+              <a:t>Every decision locked before </a:t>
+            </a:r>
+            <a:r>
+              <a:rPr sz="1400" b="1">
+                <a:solidFill>
+                  <a:srgbClr val="262626"/>
+                </a:solidFill>
+                <a:latin typeface="Calibri"/>
+              </a:rPr>
+              <a:t>one</a:t>
+            </a:r>
+            <a:r>
+              <a:rPr sz="1400" b="0">
+                <a:solidFill>
+                  <a:srgbClr val="262626"/>
+                </a:solidFill>
+                <a:latin typeface="Calibri"/>
+              </a:rPr>
+              <a:t> TEST look</a:t>
             </a:r>
           </a:p>
         </p:txBody>
@@ -12628,7 +13120,7 @@
                 </a:solidFill>
                 <a:latin typeface="Calibri"/>
               </a:rPr>
-              <a:t>System architecture</a:t>
+              <a:t>How one recommendation is scored</a:t>
             </a:r>
           </a:p>
         </p:txBody>
@@ -12698,7 +13190,7 @@
                 </a:solidFill>
                 <a:latin typeface="Calibri"/>
               </a:rPr>
-              <a:t>Data → training → evaluation → deployment and governance</a:t>
+              <a:t>Mean reciprocal rank (MRR@20), averaged per user, then over users</a:t>
             </a:r>
           </a:p>
         </p:txBody>
@@ -12775,7 +13267,7 @@
       </p:sp>
       <p:pic>
         <p:nvPicPr>
-          <p:cNvPr id="7" name="Picture 6" descr="d2_system_architecture.png"/>
+          <p:cNvPr id="7" name="Picture 6" descr="d12_ranking_metric.png"/>
           <p:cNvPicPr>
             <a:picLocks noChangeAspect="1"/>
           </p:cNvPicPr>
@@ -12789,8 +13281,8 @@
         </p:blipFill>
         <p:spPr>
           <a:xfrm>
-            <a:off x="1463040" y="1600200"/>
-            <a:ext cx="7971639" cy="4800600"/>
+            <a:off x="457200" y="2016515"/>
+            <a:ext cx="11247120" cy="3647930"/>
           </a:xfrm>
           <a:prstGeom prst="rect">
             <a:avLst/>
@@ -12845,7 +13337,7 @@
                 </a:solidFill>
                 <a:latin typeface="Calibri"/>
               </a:rPr>
-              <a:t>The prototype stage and the system workstream</a:t>
+              <a:t>The prototype platform</a:t>
             </a:r>
           </a:p>
         </p:txBody>
@@ -12893,6 +13385,41 @@
         </p:nvSpPr>
         <p:spPr>
           <a:xfrm>
+            <a:off x="502920" y="1060704"/>
+            <a:ext cx="11155680" cy="457200"/>
+          </a:xfrm>
+          <a:prstGeom prst="rect">
+            <a:avLst/>
+          </a:prstGeom>
+          <a:noFill/>
+        </p:spPr>
+        <p:txBody>
+          <a:bodyPr wrap="square" anchor="t" lIns="45720" rIns="45720">
+            <a:spAutoFit/>
+          </a:bodyPr>
+          <a:lstStyle/>
+          <a:p>
+            <a:pPr algn="l"/>
+            <a:r>
+              <a:rPr sz="1600" b="0" i="1">
+                <a:solidFill>
+                  <a:srgbClr val="595959"/>
+                </a:solidFill>
+                <a:latin typeface="Calibri"/>
+              </a:rPr>
+              <a:t>August–September 2026, on GitHub</a:t>
+            </a:r>
+          </a:p>
+        </p:txBody>
+      </p:sp>
+      <p:sp>
+        <p:nvSpPr>
+          <p:cNvPr id="5" name="TextBox 4"/>
+          <p:cNvSpPr txBox="1"/>
+          <p:nvPr/>
+        </p:nvSpPr>
+        <p:spPr>
+          <a:xfrm>
             <a:off x="548640" y="6446520"/>
             <a:ext cx="8229600" cy="274320"/>
           </a:xfrm>
@@ -12922,7 +13449,7 @@
       </p:sp>
       <p:sp>
         <p:nvSpPr>
-          <p:cNvPr id="5" name="TextBox 4"/>
+          <p:cNvPr id="6" name="TextBox 5"/>
           <p:cNvSpPr txBox="1"/>
           <p:nvPr/>
         </p:nvSpPr>
@@ -12955,16 +13482,40 @@
           </a:p>
         </p:txBody>
       </p:sp>
-      <p:sp>
-        <p:nvSpPr>
-          <p:cNvPr id="6" name="TextBox 5"/>
+      <p:pic>
+        <p:nvPicPr>
+          <p:cNvPr id="7" name="Picture 6" descr="d15_prototype_tasks.png"/>
+          <p:cNvPicPr>
+            <a:picLocks noChangeAspect="1"/>
+          </p:cNvPicPr>
+          <p:nvPr/>
+        </p:nvPicPr>
+        <p:blipFill>
+          <a:blip r:embed="rId2"/>
+          <a:stretch>
+            <a:fillRect/>
+          </a:stretch>
+        </p:blipFill>
+        <p:spPr>
+          <a:xfrm>
+            <a:off x="457200" y="2093402"/>
+            <a:ext cx="6035040" cy="3585595"/>
+          </a:xfrm>
+          <a:prstGeom prst="rect">
+            <a:avLst/>
+          </a:prstGeom>
+        </p:spPr>
+      </p:pic>
+      <p:sp>
+        <p:nvSpPr>
+          <p:cNvPr id="8" name="TextBox 7"/>
           <p:cNvSpPr txBox="1"/>
           <p:nvPr/>
         </p:nvSpPr>
         <p:spPr>
           <a:xfrm>
-            <a:off x="548640" y="1325880"/>
-            <a:ext cx="5486400" cy="411480"/>
+            <a:off x="6766560" y="1554480"/>
+            <a:ext cx="5029200" cy="411480"/>
           </a:xfrm>
           <a:prstGeom prst="rect">
             <a:avLst/>
@@ -12979,27 +13530,27 @@
           <a:p>
             <a:pPr algn="l"/>
             <a:r>
-              <a:rPr sz="1700" b="1" i="0">
+              <a:rPr sz="1600" b="1" i="0">
                 <a:solidFill>
                   <a:srgbClr val="1F3864"/>
                 </a:solidFill>
                 <a:latin typeface="Calibri"/>
               </a:rPr>
-              <a:t>Prototype stage (Aug–Sep 2026)</a:t>
-            </a:r>
-          </a:p>
-        </p:txBody>
-      </p:sp>
-      <p:sp>
-        <p:nvSpPr>
-          <p:cNvPr id="7" name="TextBox 6"/>
+              <a:t>What the prototype delivered</a:t>
+            </a:r>
+          </a:p>
+        </p:txBody>
+      </p:sp>
+      <p:sp>
+        <p:nvSpPr>
+          <p:cNvPr id="9" name="TextBox 8"/>
           <p:cNvSpPr txBox="1"/>
           <p:nvPr/>
         </p:nvSpPr>
         <p:spPr>
           <a:xfrm>
-            <a:off x="548640" y="1783080"/>
-            <a:ext cx="5486400" cy="4343400"/>
+            <a:off x="6766560" y="2011680"/>
+            <a:ext cx="5029200" cy="4160520"/>
           </a:xfrm>
           <a:prstGeom prst="rect">
             <a:avLst/>
@@ -13018,7 +13569,7 @@
               </a:spcAft>
             </a:pPr>
             <a:r>
-              <a:rPr sz="1500">
+              <a:rPr sz="1400">
                 <a:solidFill>
                   <a:srgbClr val="595959"/>
                 </a:solidFill>
@@ -13027,13 +13578,13 @@
               <a:t>•  </a:t>
             </a:r>
             <a:r>
-              <a:rPr sz="1500" b="0">
+              <a:rPr sz="1400" b="0">
                 <a:solidFill>
                   <a:srgbClr val="262626"/>
                 </a:solidFill>
                 <a:latin typeface="Calibri"/>
               </a:rPr>
-              <a:t>Raw October log: 42.4M events → Parquet → canonical events</a:t>
+              <a:t>Data pipeline: 42.4M events → canonical events, sealed TEST window</a:t>
             </a:r>
           </a:p>
           <a:p>
@@ -13043,7 +13594,7 @@
               </a:spcAft>
             </a:pPr>
             <a:r>
-              <a:rPr sz="1500">
+              <a:rPr sz="1400">
                 <a:solidFill>
                   <a:srgbClr val="595959"/>
                 </a:solidFill>
@@ -13052,13 +13603,13 @@
               <a:t>•  </a:t>
             </a:r>
             <a:r>
-              <a:rPr sz="1500" b="0">
+              <a:rPr sz="1400" b="0">
                 <a:solidFill>
                   <a:srgbClr val="262626"/>
                 </a:solidFill>
                 <a:latin typeface="Calibri"/>
               </a:rPr>
-              <a:t>Cohort of 388,789 clients; sealed TEST window</a:t>
+              <a:t>Three tasks; GRU beats the transition-table baseline</a:t>
             </a:r>
           </a:p>
           <a:p>
@@ -13068,7 +13619,7 @@
               </a:spcAft>
             </a:pPr>
             <a:r>
-              <a:rPr sz="1500">
+              <a:rPr sz="1400">
                 <a:solidFill>
                   <a:srgbClr val="595959"/>
                 </a:solidFill>
@@ -13077,13 +13628,13 @@
               <a:t>•  </a:t>
             </a:r>
             <a:r>
-              <a:rPr sz="1500" b="0">
+              <a:rPr sz="1400" b="0">
                 <a:solidFill>
                   <a:srgbClr val="262626"/>
                 </a:solidFill>
                 <a:latin typeface="Calibri"/>
               </a:rPr>
-              <a:t>Three tasks (next category, purchase, re-rank)</a:t>
+              <a:t>Federated plumbing with Flower; pilot retention 88.38% (validation)</a:t>
             </a:r>
           </a:p>
           <a:p>
@@ -13093,7 +13644,7 @@
               </a:spcAft>
             </a:pPr>
             <a:r>
-              <a:rPr sz="1500">
+              <a:rPr sz="1400">
                 <a:solidFill>
                   <a:srgbClr val="595959"/>
                 </a:solidFill>
@@ -13102,13 +13653,13 @@
               <a:t>•  </a:t>
             </a:r>
             <a:r>
-              <a:rPr sz="1500" b="0">
+              <a:rPr sz="1400" b="0">
                 <a:solidFill>
                   <a:srgbClr val="262626"/>
                 </a:solidFill>
                 <a:latin typeface="Calibri"/>
               </a:rPr>
-              <a:t>The GRU model beat the transition-table baseline</a:t>
+              <a:t>Hashed identifiers, price bands, ONNX and INT8 export, byte ledger, CI</a:t>
             </a:r>
           </a:p>
           <a:p>
@@ -13118,7 +13669,7 @@
               </a:spcAft>
             </a:pPr>
             <a:r>
-              <a:rPr sz="1500">
+              <a:rPr sz="1400">
                 <a:solidFill>
                   <a:srgbClr val="595959"/>
                 </a:solidFill>
@@ -13127,264 +13678,13 @@
               <a:t>•  </a:t>
             </a:r>
             <a:r>
-              <a:rPr sz="1500" b="0">
+              <a:rPr sz="1400" b="0">
                 <a:solidFill>
                   <a:srgbClr val="262626"/>
                 </a:solidFill>
                 <a:latin typeface="Calibri"/>
               </a:rPr>
-              <a:t>Federated plumbing with Flower; pilot retention </a:t>
-            </a:r>
-            <a:r>
-              <a:rPr sz="1500" b="1">
-                <a:solidFill>
-                  <a:srgbClr val="262626"/>
-                </a:solidFill>
-                <a:latin typeface="Calibri"/>
-              </a:rPr>
-              <a:t>88.38%</a:t>
-            </a:r>
-            <a:r>
-              <a:rPr sz="1500" b="0">
-                <a:solidFill>
-                  <a:srgbClr val="262626"/>
-                </a:solidFill>
-                <a:latin typeface="Calibri"/>
-              </a:rPr>
-              <a:t> (validation)</a:t>
-            </a:r>
-          </a:p>
-          <a:p>
-            <a:pPr>
-              <a:spcAft>
-                <a:spcPts val="700"/>
-              </a:spcAft>
-            </a:pPr>
-            <a:r>
-              <a:rPr sz="1500">
-                <a:solidFill>
-                  <a:srgbClr val="595959"/>
-                </a:solidFill>
-                <a:latin typeface="Calibri"/>
-              </a:rPr>
-              <a:t>•  </a:t>
-            </a:r>
-            <a:r>
-              <a:rPr sz="1500" b="0">
-                <a:solidFill>
-                  <a:srgbClr val="262626"/>
-                </a:solidFill>
-                <a:latin typeface="Calibri"/>
-              </a:rPr>
-              <a:t>Lesson: a label defect and evaluator conventions → need a stronger protocol</a:t>
-            </a:r>
-          </a:p>
-        </p:txBody>
-      </p:sp>
-      <p:sp>
-        <p:nvSpPr>
-          <p:cNvPr id="8" name="TextBox 7"/>
-          <p:cNvSpPr txBox="1"/>
-          <p:nvPr/>
-        </p:nvSpPr>
-        <p:spPr>
-          <a:xfrm>
-            <a:off x="6217920" y="1325880"/>
-            <a:ext cx="5440680" cy="411480"/>
-          </a:xfrm>
-          <a:prstGeom prst="rect">
-            <a:avLst/>
-          </a:prstGeom>
-          <a:noFill/>
-        </p:spPr>
-        <p:txBody>
-          <a:bodyPr wrap="square" anchor="t" lIns="45720" rIns="45720">
-            <a:spAutoFit/>
-          </a:bodyPr>
-          <a:lstStyle/>
-          <a:p>
-            <a:pPr algn="l"/>
-            <a:r>
-              <a:rPr sz="1700" b="1" i="0">
-                <a:solidFill>
-                  <a:srgbClr val="1F3864"/>
-                </a:solidFill>
-                <a:latin typeface="Calibri"/>
-              </a:rPr>
-              <a:t>System, deployment &amp; security workstream</a:t>
-            </a:r>
-          </a:p>
-        </p:txBody>
-      </p:sp>
-      <p:sp>
-        <p:nvSpPr>
-          <p:cNvPr id="9" name="TextBox 8"/>
-          <p:cNvSpPr txBox="1"/>
-          <p:nvPr/>
-        </p:nvSpPr>
-        <p:spPr>
-          <a:xfrm>
-            <a:off x="6217920" y="1783080"/>
-            <a:ext cx="5440680" cy="4343400"/>
-          </a:xfrm>
-          <a:prstGeom prst="rect">
-            <a:avLst/>
-          </a:prstGeom>
-          <a:noFill/>
-        </p:spPr>
-        <p:txBody>
-          <a:bodyPr wrap="square">
-            <a:spAutoFit/>
-          </a:bodyPr>
-          <a:lstStyle/>
-          <a:p>
-            <a:pPr>
-              <a:spcAft>
-                <a:spcPts val="700"/>
-              </a:spcAft>
-            </a:pPr>
-            <a:r>
-              <a:rPr sz="1500">
-                <a:solidFill>
-                  <a:srgbClr val="595959"/>
-                </a:solidFill>
-                <a:latin typeface="Calibri"/>
-              </a:rPr>
-              <a:t>•  </a:t>
-            </a:r>
-            <a:r>
-              <a:rPr sz="1500" b="0">
-                <a:solidFill>
-                  <a:srgbClr val="262626"/>
-                </a:solidFill>
-                <a:latin typeface="Calibri"/>
-              </a:rPr>
-              <a:t>blake2b-64 hashed identifiers; price bands; capped log time gaps</a:t>
-            </a:r>
-          </a:p>
-          <a:p>
-            <a:pPr>
-              <a:spcAft>
-                <a:spcPts val="700"/>
-              </a:spcAft>
-            </a:pPr>
-            <a:r>
-              <a:rPr sz="1500">
-                <a:solidFill>
-                  <a:srgbClr val="595959"/>
-                </a:solidFill>
-                <a:latin typeface="Calibri"/>
-              </a:rPr>
-              <a:t>•  </a:t>
-            </a:r>
-            <a:r>
-              <a:rPr sz="1500" b="0">
-                <a:solidFill>
-                  <a:srgbClr val="262626"/>
-                </a:solidFill>
-                <a:latin typeface="Calibri"/>
-              </a:rPr>
-              <a:t>ONNX export (opset 17) with a dynamic-batch fix</a:t>
-            </a:r>
-          </a:p>
-          <a:p>
-            <a:pPr>
-              <a:spcAft>
-                <a:spcPts val="700"/>
-              </a:spcAft>
-            </a:pPr>
-            <a:r>
-              <a:rPr sz="1500">
-                <a:solidFill>
-                  <a:srgbClr val="595959"/>
-                </a:solidFill>
-                <a:latin typeface="Calibri"/>
-              </a:rPr>
-              <a:t>•  </a:t>
-            </a:r>
-            <a:r>
-              <a:rPr sz="1500" b="0">
-                <a:solidFill>
-                  <a:srgbClr val="262626"/>
-                </a:solidFill>
-                <a:latin typeface="Calibri"/>
-              </a:rPr>
-              <a:t>INT8 dynamic quantisation + benchmark</a:t>
-            </a:r>
-          </a:p>
-          <a:p>
-            <a:pPr>
-              <a:spcAft>
-                <a:spcPts val="700"/>
-              </a:spcAft>
-            </a:pPr>
-            <a:r>
-              <a:rPr sz="1500">
-                <a:solidFill>
-                  <a:srgbClr val="595959"/>
-                </a:solidFill>
-                <a:latin typeface="Calibri"/>
-              </a:rPr>
-              <a:t>•  </a:t>
-            </a:r>
-            <a:r>
-              <a:rPr sz="1500" b="0">
-                <a:solidFill>
-                  <a:srgbClr val="262626"/>
-                </a:solidFill>
-                <a:latin typeface="Calibri"/>
-              </a:rPr>
-              <a:t>Communication byte ledger per round</a:t>
-            </a:r>
-          </a:p>
-          <a:p>
-            <a:pPr>
-              <a:spcAft>
-                <a:spcPts val="700"/>
-              </a:spcAft>
-            </a:pPr>
-            <a:r>
-              <a:rPr sz="1500">
-                <a:solidFill>
-                  <a:srgbClr val="595959"/>
-                </a:solidFill>
-                <a:latin typeface="Calibri"/>
-              </a:rPr>
-              <a:t>•  </a:t>
-            </a:r>
-            <a:r>
-              <a:rPr sz="1500" b="0">
-                <a:solidFill>
-                  <a:srgbClr val="262626"/>
-                </a:solidFill>
-                <a:latin typeface="Calibri"/>
-              </a:rPr>
-              <a:t>Quality-retention registry</a:t>
-            </a:r>
-          </a:p>
-          <a:p>
-            <a:pPr>
-              <a:spcAft>
-                <a:spcPts val="700"/>
-              </a:spcAft>
-            </a:pPr>
-            <a:r>
-              <a:rPr sz="1500">
-                <a:solidFill>
-                  <a:srgbClr val="595959"/>
-                </a:solidFill>
-                <a:latin typeface="Calibri"/>
-              </a:rPr>
-              <a:t>•  </a:t>
-            </a:r>
-            <a:r>
-              <a:rPr sz="1500" b="0">
-                <a:solidFill>
-                  <a:srgbClr val="262626"/>
-                </a:solidFill>
-                <a:latin typeface="Calibri"/>
-              </a:rPr>
-              <a:t>Threat model, secret handling, CI with a lock-file check</a:t>
+              <a:t>Lesson: a label defect and evaluator conventions → a stronger protocol</a:t>
             </a:r>
           </a:p>
         </p:txBody>
@@ -13437,7 +13737,7 @@
                 </a:solidFill>
                 <a:latin typeface="Calibri"/>
               </a:rPr>
-              <a:t>Main study: backbone contest and the gated test protocol</a:t>
+              <a:t>Where the study ran</a:t>
             </a:r>
           </a:p>
         </p:txBody>
@@ -13485,6 +13785,41 @@
         </p:nvSpPr>
         <p:spPr>
           <a:xfrm>
+            <a:off x="502920" y="1060704"/>
+            <a:ext cx="11155680" cy="457200"/>
+          </a:xfrm>
+          <a:prstGeom prst="rect">
+            <a:avLst/>
+          </a:prstGeom>
+          <a:noFill/>
+        </p:spPr>
+        <p:txBody>
+          <a:bodyPr wrap="square" anchor="t" lIns="45720" rIns="45720">
+            <a:spAutoFit/>
+          </a:bodyPr>
+          <a:lstStyle/>
+          <a:p>
+            <a:pPr algn="l"/>
+            <a:r>
+              <a:rPr sz="1600" b="0" i="1">
+                <a:solidFill>
+                  <a:srgbClr val="595959"/>
+                </a:solidFill>
+                <a:latin typeface="Calibri"/>
+              </a:rPr>
+              <a:t>Queen's Lobot GPU cluster, reached through encrypted access</a:t>
+            </a:r>
+          </a:p>
+        </p:txBody>
+      </p:sp>
+      <p:sp>
+        <p:nvSpPr>
+          <p:cNvPr id="5" name="TextBox 4"/>
+          <p:cNvSpPr txBox="1"/>
+          <p:nvPr/>
+        </p:nvSpPr>
+        <p:spPr>
+          <a:xfrm>
             <a:off x="548640" y="6446520"/>
             <a:ext cx="8229600" cy="274320"/>
           </a:xfrm>
@@ -13514,7 +13849,7 @@
       </p:sp>
       <p:sp>
         <p:nvSpPr>
-          <p:cNvPr id="5" name="TextBox 4"/>
+          <p:cNvPr id="6" name="TextBox 5"/>
           <p:cNvSpPr txBox="1"/>
           <p:nvPr/>
         </p:nvSpPr>
@@ -13547,142 +13882,9 @@
           </a:p>
         </p:txBody>
       </p:sp>
-      <p:sp>
-        <p:nvSpPr>
-          <p:cNvPr id="6" name="TextBox 5"/>
-          <p:cNvSpPr txBox="1"/>
-          <p:nvPr/>
-        </p:nvSpPr>
-        <p:spPr>
-          <a:xfrm>
-            <a:off x="548640" y="1280160"/>
-            <a:ext cx="4023360" cy="411480"/>
-          </a:xfrm>
-          <a:prstGeom prst="rect">
-            <a:avLst/>
-          </a:prstGeom>
-          <a:noFill/>
-        </p:spPr>
-        <p:txBody>
-          <a:bodyPr wrap="square" anchor="t" lIns="45720" rIns="45720">
-            <a:spAutoFit/>
-          </a:bodyPr>
-          <a:lstStyle/>
-          <a:p>
-            <a:pPr algn="l"/>
-            <a:r>
-              <a:rPr sz="1700" b="1" i="0">
-                <a:solidFill>
-                  <a:srgbClr val="1F3864"/>
-                </a:solidFill>
-                <a:latin typeface="Calibri"/>
-              </a:rPr>
-              <a:t>Backbone contest (validation)</a:t>
-            </a:r>
-          </a:p>
-        </p:txBody>
-      </p:sp>
-      <p:sp>
-        <p:nvSpPr>
-          <p:cNvPr id="7" name="TextBox 6"/>
-          <p:cNvSpPr txBox="1"/>
-          <p:nvPr/>
-        </p:nvSpPr>
-        <p:spPr>
-          <a:xfrm>
-            <a:off x="548640" y="1737360"/>
-            <a:ext cx="4023360" cy="1874520"/>
-          </a:xfrm>
-          <a:prstGeom prst="rect">
-            <a:avLst/>
-          </a:prstGeom>
-          <a:noFill/>
-        </p:spPr>
-        <p:txBody>
-          <a:bodyPr wrap="square">
-            <a:spAutoFit/>
-          </a:bodyPr>
-          <a:lstStyle/>
-          <a:p>
-            <a:pPr>
-              <a:spcAft>
-                <a:spcPts val="700"/>
-              </a:spcAft>
-            </a:pPr>
-            <a:r>
-              <a:rPr sz="1500">
-                <a:solidFill>
-                  <a:srgbClr val="595959"/>
-                </a:solidFill>
-                <a:latin typeface="Calibri"/>
-              </a:rPr>
-              <a:t>•  </a:t>
-            </a:r>
-            <a:r>
-              <a:rPr sz="1500" b="0">
-                <a:solidFill>
-                  <a:srgbClr val="262626"/>
-                </a:solidFill>
-                <a:latin typeface="Calibri"/>
-              </a:rPr>
-              <a:t>GRU family mean 0.1569</a:t>
-            </a:r>
-          </a:p>
-          <a:p>
-            <a:pPr>
-              <a:spcAft>
-                <a:spcPts val="700"/>
-              </a:spcAft>
-            </a:pPr>
-            <a:r>
-              <a:rPr sz="1500">
-                <a:solidFill>
-                  <a:srgbClr val="595959"/>
-                </a:solidFill>
-                <a:latin typeface="Calibri"/>
-              </a:rPr>
-              <a:t>•  </a:t>
-            </a:r>
-            <a:r>
-              <a:rPr sz="1500" b="0">
-                <a:solidFill>
-                  <a:srgbClr val="262626"/>
-                </a:solidFill>
-                <a:latin typeface="Calibri"/>
-              </a:rPr>
-              <a:t>SASRec family mean 0.1612</a:t>
-            </a:r>
-          </a:p>
-          <a:p>
-            <a:pPr>
-              <a:spcAft>
-                <a:spcPts val="700"/>
-              </a:spcAft>
-            </a:pPr>
-            <a:r>
-              <a:rPr sz="1500">
-                <a:solidFill>
-                  <a:srgbClr val="595959"/>
-                </a:solidFill>
-                <a:latin typeface="Calibri"/>
-              </a:rPr>
-              <a:t>•  </a:t>
-            </a:r>
-            <a:r>
-              <a:rPr sz="1500" b="0">
-                <a:solidFill>
-                  <a:srgbClr val="262626"/>
-                </a:solidFill>
-                <a:latin typeface="Calibri"/>
-              </a:rPr>
-              <a:t>Outcome DECISIVE_STABLE → architecture lock on SASRec</a:t>
-            </a:r>
-          </a:p>
-        </p:txBody>
-      </p:sp>
       <p:pic>
         <p:nvPicPr>
-          <p:cNvPr id="8" name="Picture 7" descr="d5_gated_protocol.png"/>
+          <p:cNvPr id="7" name="Picture 6" descr="d8_compute_infrastructure.png"/>
           <p:cNvPicPr>
             <a:picLocks noChangeAspect="1"/>
           </p:cNvPicPr>
@@ -13696,147 +13898,14 @@
         </p:blipFill>
         <p:spPr>
           <a:xfrm>
-            <a:off x="4754880" y="1325880"/>
-            <a:ext cx="7132320" cy="1894015"/>
+            <a:off x="457200" y="1832518"/>
+            <a:ext cx="11247120" cy="4107364"/>
           </a:xfrm>
           <a:prstGeom prst="rect">
             <a:avLst/>
           </a:prstGeom>
         </p:spPr>
       </p:pic>
-      <p:sp>
-        <p:nvSpPr>
-          <p:cNvPr id="9" name="TextBox 8"/>
-          <p:cNvSpPr txBox="1"/>
-          <p:nvPr/>
-        </p:nvSpPr>
-        <p:spPr>
-          <a:xfrm>
-            <a:off x="548640" y="3886200"/>
-            <a:ext cx="11155680" cy="411480"/>
-          </a:xfrm>
-          <a:prstGeom prst="rect">
-            <a:avLst/>
-          </a:prstGeom>
-          <a:noFill/>
-        </p:spPr>
-        <p:txBody>
-          <a:bodyPr wrap="square" anchor="t" lIns="45720" rIns="45720">
-            <a:spAutoFit/>
-          </a:bodyPr>
-          <a:lstStyle/>
-          <a:p>
-            <a:pPr algn="l"/>
-            <a:r>
-              <a:rPr sz="1700" b="1" i="0">
-                <a:solidFill>
-                  <a:srgbClr val="1F3864"/>
-                </a:solidFill>
-                <a:latin typeface="Calibri"/>
-              </a:rPr>
-              <a:t>Why so much protocol?</a:t>
-            </a:r>
-          </a:p>
-        </p:txBody>
-      </p:sp>
-      <p:sp>
-        <p:nvSpPr>
-          <p:cNvPr id="10" name="TextBox 9"/>
-          <p:cNvSpPr txBox="1"/>
-          <p:nvPr/>
-        </p:nvSpPr>
-        <p:spPr>
-          <a:xfrm>
-            <a:off x="548640" y="4343400"/>
-            <a:ext cx="11155680" cy="1783080"/>
-          </a:xfrm>
-          <a:prstGeom prst="rect">
-            <a:avLst/>
-          </a:prstGeom>
-          <a:noFill/>
-        </p:spPr>
-        <p:txBody>
-          <a:bodyPr wrap="square">
-            <a:spAutoFit/>
-          </a:bodyPr>
-          <a:lstStyle/>
-          <a:p>
-            <a:pPr>
-              <a:spcAft>
-                <a:spcPts val="700"/>
-              </a:spcAft>
-            </a:pPr>
-            <a:r>
-              <a:rPr sz="1500">
-                <a:solidFill>
-                  <a:srgbClr val="595959"/>
-                </a:solidFill>
-                <a:latin typeface="Calibri"/>
-              </a:rPr>
-              <a:t>•  </a:t>
-            </a:r>
-            <a:r>
-              <a:rPr sz="1500" b="0">
-                <a:solidFill>
-                  <a:srgbClr val="262626"/>
-                </a:solidFill>
-                <a:latin typeface="Calibri"/>
-              </a:rPr>
-              <a:t>33 main-analysis contrasts, a Holm family of 18, two seeds, many arms — easy to fool ourselves</a:t>
-            </a:r>
-          </a:p>
-          <a:p>
-            <a:pPr>
-              <a:spcAft>
-                <a:spcPts val="700"/>
-              </a:spcAft>
-            </a:pPr>
-            <a:r>
-              <a:rPr sz="1500">
-                <a:solidFill>
-                  <a:srgbClr val="595959"/>
-                </a:solidFill>
-                <a:latin typeface="Calibri"/>
-              </a:rPr>
-              <a:t>•  </a:t>
-            </a:r>
-            <a:r>
-              <a:rPr sz="1500" b="0">
-                <a:solidFill>
-                  <a:srgbClr val="262626"/>
-                </a:solidFill>
-                <a:latin typeface="Calibri"/>
-              </a:rPr>
-              <a:t>Selection only on calibration data; main-population validation read once; TEST read once in a sealed evaluation</a:t>
-            </a:r>
-          </a:p>
-          <a:p>
-            <a:pPr>
-              <a:spcAft>
-                <a:spcPts val="700"/>
-              </a:spcAft>
-            </a:pPr>
-            <a:r>
-              <a:rPr sz="1500">
-                <a:solidFill>
-                  <a:srgbClr val="595959"/>
-                </a:solidFill>
-                <a:latin typeface="Calibri"/>
-              </a:rPr>
-              <a:t>•  </a:t>
-            </a:r>
-            <a:r>
-              <a:rPr sz="1500" b="0">
-                <a:solidFill>
-                  <a:srgbClr val="262626"/>
-                </a:solidFill>
-                <a:latin typeface="Calibri"/>
-              </a:rPr>
-              <a:t>Every later exploratory test look is a numbered, disclosed register entry (12–23)</a:t>
-            </a:r>
-          </a:p>
-        </p:txBody>
-      </p:sp>
     </p:spTree>
   </p:cSld>
   <p:clrMapOvr>
